--- a/examples/professional_demo/tech_stocks_pro_tier.pptx
+++ b/examples/professional_demo/tech_stocks_pro_tier.pptx
@@ -12,6 +12,8 @@
     <p:sldId id="260" r:id="rId11"/>
     <p:sldId id="261" r:id="rId12"/>
     <p:sldId id="262" r:id="rId13"/>
+    <p:sldId id="263" r:id="rId14"/>
+    <p:sldId id="264" r:id="rId15"/>
   </p:sldIdLst>
   <p:sldSz cx="9144000" cy="6858000" type="screen4x3"/>
   <p:notesSz cx="6858000" cy="9144000"/>
@@ -117,24 +119,6 @@
 <c:chartSpace xmlns:c="http://schemas.openxmlformats.org/drawingml/2006/chart" xmlns:a="http://schemas.openxmlformats.org/drawingml/2006/main" xmlns:r="http://schemas.openxmlformats.org/officeDocument/2006/relationships">
   <c:date1904 val="0"/>
   <c:chart>
-    <c:title>
-      <c:tx>
-        <c:rich>
-          <a:bodyPr/>
-          <a:lstStyle/>
-          <a:p>
-            <a:pPr>
-              <a:defRPr sz="1600" b="1"/>
-            </a:pPr>
-            <a:r>
-              <a:t>Market Capitalization Comparison</a:t>
-            </a:r>
-          </a:p>
-        </c:rich>
-      </c:tx>
-      <c:layout/>
-      <c:overlay val="0"/>
-    </c:title>
     <c:autoTitleDeleted val="0"/>
     <c:plotArea>
       <c:barChart>
@@ -149,94 +133,84 @@
               <c:strCache>
                 <c:ptCount val="1"/>
                 <c:pt idx="0">
-                  <c:v>Market Cap (B)</c:v>
+                  <c:v>Values</c:v>
                 </c:pt>
               </c:strCache>
             </c:strRef>
           </c:tx>
-          <c:dPt>
-            <c:idx val="0"/>
-            <c:spPr>
-              <a:solidFill>
-                <a:srgbClr val="2196F3"/>
-              </a:solidFill>
-            </c:spPr>
-          </c:dPt>
-          <c:dPt>
-            <c:idx val="1"/>
-            <c:spPr>
-              <a:solidFill>
-                <a:srgbClr val="2E7D32"/>
-              </a:solidFill>
-            </c:spPr>
-          </c:dPt>
-          <c:dPt>
-            <c:idx val="2"/>
-            <c:spPr>
-              <a:solidFill>
-                <a:srgbClr val="FFC107"/>
-              </a:solidFill>
-            </c:spPr>
-          </c:dPt>
-          <c:dPt>
-            <c:idx val="3"/>
-            <c:spPr>
-              <a:solidFill>
-                <a:srgbClr val="D32F2F"/>
-              </a:solidFill>
-            </c:spPr>
-          </c:dPt>
-          <c:dPt>
-            <c:idx val="4"/>
-            <c:spPr>
-              <a:solidFill>
-                <a:srgbClr val="9C27B0"/>
-              </a:solidFill>
-            </c:spPr>
-          </c:dPt>
           <c:cat>
             <c:strRef>
-              <c:f>Sheet1!$A$2:$A$6</c:f>
+              <c:f>Sheet1!$A$2:$A$11</c:f>
               <c:strCache>
-                <c:ptCount val="5"/>
+                <c:ptCount val="10"/>
                 <c:pt idx="0">
-                  <c:v>AAPL</c:v>
+                  <c:v>Item 1</c:v>
                 </c:pt>
                 <c:pt idx="1">
-                  <c:v>MSFT</c:v>
+                  <c:v>Item 2</c:v>
                 </c:pt>
                 <c:pt idx="2">
-                  <c:v>GOOGL</c:v>
+                  <c:v>Item 3</c:v>
                 </c:pt>
                 <c:pt idx="3">
-                  <c:v>AMZN</c:v>
+                  <c:v>Item 4</c:v>
                 </c:pt>
                 <c:pt idx="4">
-                  <c:v>TSLA</c:v>
+                  <c:v>Item 5</c:v>
+                </c:pt>
+                <c:pt idx="5">
+                  <c:v>Item 6</c:v>
+                </c:pt>
+                <c:pt idx="6">
+                  <c:v>Item 7</c:v>
+                </c:pt>
+                <c:pt idx="7">
+                  <c:v>Item 8</c:v>
+                </c:pt>
+                <c:pt idx="8">
+                  <c:v>Item 9</c:v>
+                </c:pt>
+                <c:pt idx="9">
+                  <c:v>Item 10</c:v>
                 </c:pt>
               </c:strCache>
             </c:strRef>
           </c:cat>
           <c:val>
             <c:numRef>
-              <c:f>Sheet1!$B$2:$B$6</c:f>
+              <c:f>Sheet1!$B$2:$B$11</c:f>
               <c:numCache>
                 <c:formatCode>General</c:formatCode>
-                <c:ptCount val="5"/>
+                <c:ptCount val="10"/>
                 <c:pt idx="0">
-                  <c:v>4027.681603584</c:v>
+                  <c:v>4027681603584.0</c:v>
                 </c:pt>
                 <c:pt idx="1">
-                  <c:v>3907.64691456</c:v>
+                  <c:v>3907646914560.0</c:v>
                 </c:pt>
                 <c:pt idx="2">
-                  <c:v>3398.890160128</c:v>
+                  <c:v>3398890160128.0</c:v>
                 </c:pt>
                 <c:pt idx="3">
-                  <c:v>2609.97906432</c:v>
+                  <c:v>2609979064320.0</c:v>
                 </c:pt>
                 <c:pt idx="4">
-                  <c:v>1518.435958784</c:v>
+                  <c:v>1518435958784.0</c:v>
+                </c:pt>
+                <c:pt idx="5">
+                  <c:v>0.0</c:v>
+                </c:pt>
+                <c:pt idx="6">
+                  <c:v>0.0</c:v>
+                </c:pt>
+                <c:pt idx="7">
+                  <c:v>0.0</c:v>
+                </c:pt>
+                <c:pt idx="8">
+                  <c:v>0.0</c:v>
+                </c:pt>
+                <c:pt idx="9">
+                  <c:v>0.0</c:v>
                 </c:pt>
               </c:numCache>
             </c:numRef>
@@ -275,10 +249,6 @@
         <c:crosses val="autoZero"/>
       </c:valAx>
     </c:plotArea>
-    <c:legend>
-      <c:legendPos/>
-      <c:overlay val="0"/>
-    </c:legend>
     <c:dispBlanksAs val="gap"/>
   </c:chart>
   <c:txPr>
@@ -308,10 +278,10 @@
           <a:lstStyle/>
           <a:p>
             <a:pPr>
-              <a:defRPr sz="1600" b="1"/>
-            </a:pPr>
-            <a:r>
-              <a:t>AAPL - 60-Day Price Trend</a:t>
+              <a:defRPr sz="1800" b="1"/>
+            </a:pPr>
+            <a:r>
+              <a:t>Sector Distribution</a:t>
             </a:r>
           </a:p>
         </c:rich>
@@ -321,9 +291,9 @@
     </c:title>
     <c:autoTitleDeleted val="0"/>
     <c:plotArea>
-      <c:lineChart>
-        <c:grouping val="standard"/>
-        <c:varyColors val="0"/>
+      <c:barChart>
+        <c:barDir val="bar"/>
+        <c:grouping val="clustered"/>
         <c:ser>
           <c:idx val="0"/>
           <c:order val="0"/>
@@ -333,416 +303,73 @@
               <c:strCache>
                 <c:ptCount val="1"/>
                 <c:pt idx="0">
-                  <c:v>AAPL Closing Price</c:v>
+                  <c:v>MarketCap</c:v>
                 </c:pt>
               </c:strCache>
             </c:strRef>
           </c:tx>
-          <c:spPr>
-            <a:ln w="31750">
-              <a:solidFill>
-                <a:srgbClr val="2196F3"/>
-              </a:solidFill>
-            </a:ln>
-          </c:spPr>
-          <c:marker>
-            <c:symbol val="none"/>
-          </c:marker>
           <c:cat>
             <c:strRef>
-              <c:f>Sheet1!$A$2:$A$61</c:f>
+              <c:f>Sheet1!$A$2:$A$6</c:f>
               <c:strCache>
-                <c:ptCount val="60"/>
+                <c:ptCount val="5"/>
                 <c:pt idx="0">
-                  <c:v>2025-08-08</c:v>
+                  <c:v>AAPL</c:v>
                 </c:pt>
                 <c:pt idx="1">
-                  <c:v>2025-08-11</c:v>
+                  <c:v>MSFT</c:v>
                 </c:pt>
                 <c:pt idx="2">
-                  <c:v>2025-08-12</c:v>
+                  <c:v>GOOGL</c:v>
                 </c:pt>
                 <c:pt idx="3">
-                  <c:v>2025-08-13</c:v>
+                  <c:v>AMZN</c:v>
                 </c:pt>
                 <c:pt idx="4">
-                  <c:v>2025-08-14</c:v>
-                </c:pt>
-                <c:pt idx="5">
-                  <c:v>2025-08-15</c:v>
-                </c:pt>
-                <c:pt idx="6">
-                  <c:v>2025-08-18</c:v>
-                </c:pt>
-                <c:pt idx="7">
-                  <c:v>2025-08-19</c:v>
-                </c:pt>
-                <c:pt idx="8">
-                  <c:v>2025-08-20</c:v>
-                </c:pt>
-                <c:pt idx="9">
-                  <c:v>2025-08-21</c:v>
-                </c:pt>
-                <c:pt idx="10">
-                  <c:v>2025-08-22</c:v>
-                </c:pt>
-                <c:pt idx="11">
-                  <c:v>2025-08-25</c:v>
-                </c:pt>
-                <c:pt idx="12">
-                  <c:v>2025-08-26</c:v>
-                </c:pt>
-                <c:pt idx="13">
-                  <c:v>2025-08-27</c:v>
-                </c:pt>
-                <c:pt idx="14">
-                  <c:v>2025-08-28</c:v>
-                </c:pt>
-                <c:pt idx="15">
-                  <c:v>2025-08-29</c:v>
-                </c:pt>
-                <c:pt idx="16">
-                  <c:v>2025-09-02</c:v>
-                </c:pt>
-                <c:pt idx="17">
-                  <c:v>2025-09-03</c:v>
-                </c:pt>
-                <c:pt idx="18">
-                  <c:v>2025-09-04</c:v>
-                </c:pt>
-                <c:pt idx="19">
-                  <c:v>2025-09-05</c:v>
-                </c:pt>
-                <c:pt idx="20">
-                  <c:v>2025-09-08</c:v>
-                </c:pt>
-                <c:pt idx="21">
-                  <c:v>2025-09-09</c:v>
-                </c:pt>
-                <c:pt idx="22">
-                  <c:v>2025-09-10</c:v>
-                </c:pt>
-                <c:pt idx="23">
-                  <c:v>2025-09-11</c:v>
-                </c:pt>
-                <c:pt idx="24">
-                  <c:v>2025-09-12</c:v>
-                </c:pt>
-                <c:pt idx="25">
-                  <c:v>2025-09-15</c:v>
-                </c:pt>
-                <c:pt idx="26">
-                  <c:v>2025-09-16</c:v>
-                </c:pt>
-                <c:pt idx="27">
-                  <c:v>2025-09-17</c:v>
-                </c:pt>
-                <c:pt idx="28">
-                  <c:v>2025-09-18</c:v>
-                </c:pt>
-                <c:pt idx="29">
-                  <c:v>2025-09-19</c:v>
-                </c:pt>
-                <c:pt idx="30">
-                  <c:v>2025-09-22</c:v>
-                </c:pt>
-                <c:pt idx="31">
-                  <c:v>2025-09-23</c:v>
-                </c:pt>
-                <c:pt idx="32">
-                  <c:v>2025-09-24</c:v>
-                </c:pt>
-                <c:pt idx="33">
-                  <c:v>2025-09-25</c:v>
-                </c:pt>
-                <c:pt idx="34">
-                  <c:v>2025-09-26</c:v>
-                </c:pt>
-                <c:pt idx="35">
-                  <c:v>2025-09-29</c:v>
-                </c:pt>
-                <c:pt idx="36">
-                  <c:v>2025-09-30</c:v>
-                </c:pt>
-                <c:pt idx="37">
-                  <c:v>2025-10-01</c:v>
-                </c:pt>
-                <c:pt idx="38">
-                  <c:v>2025-10-02</c:v>
-                </c:pt>
-                <c:pt idx="39">
-                  <c:v>2025-10-03</c:v>
-                </c:pt>
-                <c:pt idx="40">
-                  <c:v>2025-10-06</c:v>
-                </c:pt>
-                <c:pt idx="41">
-                  <c:v>2025-10-07</c:v>
-                </c:pt>
-                <c:pt idx="42">
-                  <c:v>2025-10-08</c:v>
-                </c:pt>
-                <c:pt idx="43">
-                  <c:v>2025-10-09</c:v>
-                </c:pt>
-                <c:pt idx="44">
-                  <c:v>2025-10-10</c:v>
-                </c:pt>
-                <c:pt idx="45">
-                  <c:v>2025-10-13</c:v>
-                </c:pt>
-                <c:pt idx="46">
-                  <c:v>2025-10-14</c:v>
-                </c:pt>
-                <c:pt idx="47">
-                  <c:v>2025-10-15</c:v>
-                </c:pt>
-                <c:pt idx="48">
-                  <c:v>2025-10-16</c:v>
-                </c:pt>
-                <c:pt idx="49">
-                  <c:v>2025-10-17</c:v>
-                </c:pt>
-                <c:pt idx="50">
-                  <c:v>2025-10-20</c:v>
-                </c:pt>
-                <c:pt idx="51">
-                  <c:v>2025-10-21</c:v>
-                </c:pt>
-                <c:pt idx="52">
-                  <c:v>2025-10-22</c:v>
-                </c:pt>
-                <c:pt idx="53">
-                  <c:v>2025-10-23</c:v>
-                </c:pt>
-                <c:pt idx="54">
-                  <c:v>2025-10-24</c:v>
-                </c:pt>
-                <c:pt idx="55">
-                  <c:v>2025-10-27</c:v>
-                </c:pt>
-                <c:pt idx="56">
-                  <c:v>2025-10-28</c:v>
-                </c:pt>
-                <c:pt idx="57">
-                  <c:v>2025-10-29</c:v>
-                </c:pt>
-                <c:pt idx="58">
-                  <c:v>2025-10-30</c:v>
-                </c:pt>
-                <c:pt idx="59">
-                  <c:v>2025-10-31</c:v>
+                  <c:v>TSLA</c:v>
                 </c:pt>
               </c:strCache>
             </c:strRef>
           </c:cat>
           <c:val>
             <c:numRef>
-              <c:f>Sheet1!$B$2:$B$61</c:f>
+              <c:f>Sheet1!$B$2:$B$6</c:f>
               <c:numCache>
                 <c:formatCode>General</c:formatCode>
-                <c:ptCount val="60"/>
+                <c:ptCount val="5"/>
                 <c:pt idx="0">
-                  <c:v>229.3500061035156</c:v>
+                  <c:v>4027681603584.0</c:v>
                 </c:pt>
                 <c:pt idx="1">
-                  <c:v>227.1799926757812</c:v>
+                  <c:v>3907646914560.0</c:v>
                 </c:pt>
                 <c:pt idx="2">
-                  <c:v>229.6499938964844</c:v>
+                  <c:v>3398890160128.0</c:v>
                 </c:pt>
                 <c:pt idx="3">
-                  <c:v>233.3300018310547</c:v>
+                  <c:v>2609979064320.0</c:v>
                 </c:pt>
                 <c:pt idx="4">
-                  <c:v>232.7799987792969</c:v>
-                </c:pt>
-                <c:pt idx="5">
-                  <c:v>231.5899963378906</c:v>
-                </c:pt>
-                <c:pt idx="6">
-                  <c:v>230.8899993896484</c:v>
-                </c:pt>
-                <c:pt idx="7">
-                  <c:v>230.5599975585938</c:v>
-                </c:pt>
-                <c:pt idx="8">
-                  <c:v>226.0099945068359</c:v>
-                </c:pt>
-                <c:pt idx="9">
-                  <c:v>224.8999938964844</c:v>
-                </c:pt>
-                <c:pt idx="10">
-                  <c:v>227.7599945068359</c:v>
-                </c:pt>
-                <c:pt idx="11">
-                  <c:v>227.1600036621094</c:v>
-                </c:pt>
-                <c:pt idx="12">
-                  <c:v>229.3099975585938</c:v>
-                </c:pt>
-                <c:pt idx="13">
-                  <c:v>230.4900054931641</c:v>
-                </c:pt>
-                <c:pt idx="14">
-                  <c:v>232.5599975585938</c:v>
-                </c:pt>
-                <c:pt idx="15">
-                  <c:v>232.1399993896484</c:v>
-                </c:pt>
-                <c:pt idx="16">
-                  <c:v>229.7200012207031</c:v>
-                </c:pt>
-                <c:pt idx="17">
-                  <c:v>238.4700012207031</c:v>
-                </c:pt>
-                <c:pt idx="18">
-                  <c:v>239.7799987792969</c:v>
-                </c:pt>
-                <c:pt idx="19">
-                  <c:v>239.6900024414062</c:v>
-                </c:pt>
-                <c:pt idx="20">
-                  <c:v>237.8800048828125</c:v>
-                </c:pt>
-                <c:pt idx="21">
-                  <c:v>234.3500061035156</c:v>
-                </c:pt>
-                <c:pt idx="22">
-                  <c:v>226.7899932861328</c:v>
-                </c:pt>
-                <c:pt idx="23">
-                  <c:v>230.0299987792969</c:v>
-                </c:pt>
-                <c:pt idx="24">
-                  <c:v>234.0700073242188</c:v>
-                </c:pt>
-                <c:pt idx="25">
-                  <c:v>236.6999969482422</c:v>
-                </c:pt>
-                <c:pt idx="26">
-                  <c:v>238.1499938964844</c:v>
-                </c:pt>
-                <c:pt idx="27">
-                  <c:v>238.9900054931641</c:v>
-                </c:pt>
-                <c:pt idx="28">
-                  <c:v>237.8800048828125</c:v>
-                </c:pt>
-                <c:pt idx="29">
-                  <c:v>245.5</c:v>
-                </c:pt>
-                <c:pt idx="30">
-                  <c:v>256.0799865722656</c:v>
-                </c:pt>
-                <c:pt idx="31">
-                  <c:v>254.4299926757812</c:v>
-                </c:pt>
-                <c:pt idx="32">
-                  <c:v>252.3099975585938</c:v>
-                </c:pt>
-                <c:pt idx="33">
-                  <c:v>256.8699951171875</c:v>
-                </c:pt>
-                <c:pt idx="34">
-                  <c:v>255.4600067138672</c:v>
-                </c:pt>
-                <c:pt idx="35">
-                  <c:v>254.4299926757812</c:v>
-                </c:pt>
-                <c:pt idx="36">
-                  <c:v>254.6300048828125</c:v>
-                </c:pt>
-                <c:pt idx="37">
-                  <c:v>255.4499969482422</c:v>
-                </c:pt>
-                <c:pt idx="38">
-                  <c:v>257.1300048828125</c:v>
-                </c:pt>
-                <c:pt idx="39">
-                  <c:v>258.0199890136719</c:v>
-                </c:pt>
-                <c:pt idx="40">
-                  <c:v>256.6900024414062</c:v>
-                </c:pt>
-                <c:pt idx="41">
-                  <c:v>256.4800109863281</c:v>
-                </c:pt>
-                <c:pt idx="42">
-                  <c:v>258.0599975585938</c:v>
-                </c:pt>
-                <c:pt idx="43">
-                  <c:v>254.0399932861328</c:v>
-                </c:pt>
-                <c:pt idx="44">
-                  <c:v>245.2700042724609</c:v>
-                </c:pt>
-                <c:pt idx="45">
-                  <c:v>247.6600036621094</c:v>
-                </c:pt>
-                <c:pt idx="46">
-                  <c:v>247.7700042724609</c:v>
-                </c:pt>
-                <c:pt idx="47">
-                  <c:v>249.3399963378906</c:v>
-                </c:pt>
-                <c:pt idx="48">
-                  <c:v>247.4499969482422</c:v>
-                </c:pt>
-                <c:pt idx="49">
-                  <c:v>252.2899932861328</c:v>
-                </c:pt>
-                <c:pt idx="50">
-                  <c:v>262.239990234375</c:v>
-                </c:pt>
-                <c:pt idx="51">
-                  <c:v>262.7699890136719</c:v>
-                </c:pt>
-                <c:pt idx="52">
-                  <c:v>258.4500122070312</c:v>
-                </c:pt>
-                <c:pt idx="53">
-                  <c:v>259.5799865722656</c:v>
-                </c:pt>
-                <c:pt idx="54">
-                  <c:v>262.8200073242188</c:v>
-                </c:pt>
-                <c:pt idx="55">
-                  <c:v>268.8099975585938</c:v>
-                </c:pt>
-                <c:pt idx="56">
-                  <c:v>269.0</c:v>
-                </c:pt>
-                <c:pt idx="57">
-                  <c:v>269.7000122070312</c:v>
-                </c:pt>
-                <c:pt idx="58">
-                  <c:v>271.3999938964844</c:v>
-                </c:pt>
-                <c:pt idx="59">
-                  <c:v>270.3699951171875</c:v>
+                  <c:v>1518435958784.0</c:v>
                 </c:pt>
               </c:numCache>
             </c:numRef>
           </c:val>
-          <c:smooth val="0"/>
         </c:ser>
-        <c:marker val="1"/>
-        <c:smooth val="0"/>
-        <c:axId val="2118791784"/>
-        <c:axId val="2140495176"/>
-      </c:lineChart>
+        <c:axId val="-2068027336"/>
+        <c:axId val="-2113994440"/>
+      </c:barChart>
       <c:catAx>
-        <c:axId val="2118791784"/>
+        <c:axId val="-2068027336"/>
         <c:scaling>
           <c:orientation val="minMax"/>
         </c:scaling>
         <c:delete val="0"/>
-        <c:axPos val="b"/>
+        <c:axPos val="l"/>
         <c:majorTickMark val="out"/>
         <c:minorTickMark val="none"/>
         <c:tickLblPos val="nextTo"/>
-        <c:crossAx val="2140495176"/>
+        <c:crossAx val="-2113994440"/>
         <c:crosses val="autoZero"/>
         <c:auto val="1"/>
         <c:lblAlgn val="ctr"/>
@@ -750,26 +377,31 @@
         <c:noMultiLvlLbl val="0"/>
       </c:catAx>
       <c:valAx>
-        <c:axId val="2140495176"/>
+        <c:axId val="-2113994440"/>
         <c:scaling/>
         <c:delete val="0"/>
-        <c:axPos val="l"/>
+        <c:axPos val="b"/>
         <c:majorGridlines/>
         <c:majorTickMark val="out"/>
         <c:minorTickMark val="none"/>
         <c:tickLblPos val="nextTo"/>
-        <c:crossAx val="2118791784"/>
+        <c:crossAx val="-2068027336"/>
         <c:crosses val="autoZero"/>
       </c:valAx>
     </c:plotArea>
     <c:legend>
       <c:legendPos val="b"/>
-      <c:layout/>
-      <c:overlay val="0"/>
+      <c:txPr>
+        <a:bodyPr/>
+        <a:lstStyle/>
+        <a:p>
+          <a:pPr>
+            <a:defRPr sz="1000"/>
+          </a:pPr>
+        </a:p>
+      </c:txPr>
     </c:legend>
-    <c:plotVisOnly val="1"/>
     <c:dispBlanksAs val="gap"/>
-    <c:showDLblsOverMax val="0"/>
   </c:chart>
   <c:txPr>
     <a:bodyPr/>
@@ -789,29 +421,13 @@
 
 <file path=ppt/charts/chart3.xml><?xml version="1.0" encoding="utf-8"?>
 <c:chartSpace xmlns:c="http://schemas.openxmlformats.org/drawingml/2006/chart" xmlns:a="http://schemas.openxmlformats.org/drawingml/2006/main" xmlns:r="http://schemas.openxmlformats.org/officeDocument/2006/relationships">
+  <c:date1904 val="0"/>
   <c:chart>
-    <c:title>
-      <c:tx>
-        <c:rich>
-          <a:bodyPr/>
-          <a:lstStyle/>
-          <a:p>
-            <a:pPr>
-              <a:defRPr sz="1600" b="1"/>
-            </a:pPr>
-            <a:r>
-              <a:t>Category Distribution</a:t>
-            </a:r>
-          </a:p>
-        </c:rich>
-      </c:tx>
-      <c:layout/>
-      <c:overlay val="0"/>
-    </c:title>
     <c:autoTitleDeleted val="0"/>
     <c:plotArea>
-      <c:pieChart>
-        <c:varyColors val="1"/>
+      <c:barChart>
+        <c:barDir val="col"/>
+        <c:grouping val="clustered"/>
         <c:ser>
           <c:idx val="0"/>
           <c:order val="0"/>
@@ -821,86 +437,122 @@
               <c:strCache>
                 <c:ptCount val="1"/>
                 <c:pt idx="0">
-                  <c:v>Value</c:v>
+                  <c:v>Values</c:v>
                 </c:pt>
               </c:strCache>
             </c:strRef>
           </c:tx>
-          <c:dPt>
-            <c:idx val="0"/>
-            <c:spPr>
-              <a:solidFill>
-                <a:srgbClr val="2196F3"/>
-              </a:solidFill>
-            </c:spPr>
-          </c:dPt>
-          <c:dPt>
-            <c:idx val="1"/>
-            <c:spPr>
-              <a:solidFill>
-                <a:srgbClr val="2E7D32"/>
-              </a:solidFill>
-            </c:spPr>
-          </c:dPt>
-          <c:dPt>
-            <c:idx val="2"/>
-            <c:spPr>
-              <a:solidFill>
-                <a:srgbClr val="FFC107"/>
-              </a:solidFill>
-            </c:spPr>
-          </c:dPt>
           <c:cat>
             <c:strRef>
-              <c:f>Sheet1!$A$2:$A$4</c:f>
+              <c:f>Sheet1!$A$2:$A$11</c:f>
               <c:strCache>
-                <c:ptCount val="3"/>
+                <c:ptCount val="10"/>
                 <c:pt idx="0">
-                  <c:v>Technology</c:v>
+                  <c:v>Item 1</c:v>
                 </c:pt>
                 <c:pt idx="1">
-                  <c:v>Consumer Cyclical</c:v>
+                  <c:v>Item 2</c:v>
                 </c:pt>
                 <c:pt idx="2">
-                  <c:v>Communication Services</c:v>
+                  <c:v>Item 3</c:v>
+                </c:pt>
+                <c:pt idx="3">
+                  <c:v>Item 4</c:v>
+                </c:pt>
+                <c:pt idx="4">
+                  <c:v>Item 5</c:v>
+                </c:pt>
+                <c:pt idx="5">
+                  <c:v>Item 6</c:v>
+                </c:pt>
+                <c:pt idx="6">
+                  <c:v>Item 7</c:v>
+                </c:pt>
+                <c:pt idx="7">
+                  <c:v>Item 8</c:v>
+                </c:pt>
+                <c:pt idx="8">
+                  <c:v>Item 9</c:v>
+                </c:pt>
+                <c:pt idx="9">
+                  <c:v>Item 10</c:v>
                 </c:pt>
               </c:strCache>
             </c:strRef>
           </c:cat>
           <c:val>
             <c:numRef>
-              <c:f>Sheet1!$B$2:$B$4</c:f>
+              <c:f>Sheet1!$B$2:$B$11</c:f>
               <c:numCache>
                 <c:formatCode>General</c:formatCode>
-                <c:ptCount val="3"/>
+                <c:ptCount val="10"/>
                 <c:pt idx="0">
-                  <c:v>2</c:v>
+                  <c:v>4027681603584.0</c:v>
                 </c:pt>
                 <c:pt idx="1">
-                  <c:v>2</c:v>
+                  <c:v>3907646914560.0</c:v>
                 </c:pt>
                 <c:pt idx="2">
-                  <c:v>1</c:v>
+                  <c:v>3398890160128.0</c:v>
+                </c:pt>
+                <c:pt idx="3">
+                  <c:v>2609979064320.0</c:v>
+                </c:pt>
+                <c:pt idx="4">
+                  <c:v>1518435958784.0</c:v>
+                </c:pt>
+                <c:pt idx="5">
+                  <c:v>0.0</c:v>
+                </c:pt>
+                <c:pt idx="6">
+                  <c:v>0.0</c:v>
+                </c:pt>
+                <c:pt idx="7">
+                  <c:v>0.0</c:v>
+                </c:pt>
+                <c:pt idx="8">
+                  <c:v>0.0</c:v>
+                </c:pt>
+                <c:pt idx="9">
+                  <c:v>0.0</c:v>
                 </c:pt>
               </c:numCache>
             </c:numRef>
           </c:val>
         </c:ser>
-        <c:dLbls>
-          <c:showLegendKey val="0"/>
-          <c:showVal val="1"/>
-          <c:showCatName val="1"/>
-          <c:showSerName val="0"/>
-          <c:showPercent val="1"/>
-          <c:showBubbleSize val="0"/>
-          <c:showLeaderLines val="1"/>
-        </c:dLbls>
-      </c:pieChart>
+        <c:axId val="-2068027336"/>
+        <c:axId val="-2113994440"/>
+      </c:barChart>
+      <c:catAx>
+        <c:axId val="-2068027336"/>
+        <c:scaling>
+          <c:orientation val="minMax"/>
+        </c:scaling>
+        <c:delete val="0"/>
+        <c:axPos val="b"/>
+        <c:majorTickMark val="out"/>
+        <c:minorTickMark val="none"/>
+        <c:tickLblPos val="nextTo"/>
+        <c:crossAx val="-2113994440"/>
+        <c:crosses val="autoZero"/>
+        <c:auto val="1"/>
+        <c:lblAlgn val="ctr"/>
+        <c:lblOffset val="100"/>
+        <c:noMultiLvlLbl val="0"/>
+      </c:catAx>
+      <c:valAx>
+        <c:axId val="-2113994440"/>
+        <c:scaling/>
+        <c:delete val="0"/>
+        <c:axPos val="l"/>
+        <c:majorGridlines/>
+        <c:majorTickMark val="out"/>
+        <c:minorTickMark val="none"/>
+        <c:tickLblPos val="nextTo"/>
+        <c:crossAx val="-2068027336"/>
+        <c:crosses val="autoZero"/>
+      </c:valAx>
     </c:plotArea>
-    <c:legend>
-      <c:legendPos/>
-      <c:overlay val="0"/>
-    </c:legend>
     <c:dispBlanksAs val="gap"/>
   </c:chart>
   <c:txPr>
@@ -3909,16 +3561,18 @@
         <p:spPr>
           <a:xfrm>
             <a:off x="0" y="0"/>
-            <a:ext cx="9144000" cy="365760"/>
+            <a:ext cx="9144000" cy="6858000"/>
           </a:xfrm>
           <a:prstGeom prst="rect">
             <a:avLst/>
           </a:prstGeom>
           <a:solidFill>
-            <a:srgbClr val="E53935"/>
+            <a:srgbClr val="192A56"/>
           </a:solidFill>
           <a:ln>
-            <a:noFill/>
+            <a:solidFill>
+              <a:srgbClr val="192A56"/>
+            </a:solidFill>
           </a:ln>
         </p:spPr>
         <p:style>
@@ -3951,8 +3605,8 @@
         </p:nvSpPr>
         <p:spPr>
           <a:xfrm>
-            <a:off x="457200" y="2011680"/>
-            <a:ext cx="8229600" cy="1371600"/>
+            <a:off x="914400" y="2286000"/>
+            <a:ext cx="7315200" cy="1371600"/>
           </a:xfrm>
           <a:prstGeom prst="rect">
             <a:avLst/>
@@ -3966,12 +3620,9 @@
           <a:lstStyle/>
           <a:p>
             <a:pPr algn="ctr">
-              <a:lnSpc>
-                <a:spcPct val="120000"/>
-              </a:lnSpc>
-              <a:defRPr sz="4800" b="1">
-                <a:solidFill>
-                  <a:srgbClr val="C62828"/>
+              <a:defRPr sz="5400" b="1">
+                <a:solidFill>
+                  <a:srgbClr val="FFFFFF"/>
                 </a:solidFill>
               </a:defRPr>
             </a:pPr>
@@ -3989,8 +3640,8 @@
         </p:nvSpPr>
         <p:spPr>
           <a:xfrm>
-            <a:off x="457200" y="3657600"/>
-            <a:ext cx="8229600" cy="914400"/>
+            <a:off x="914400" y="3840480"/>
+            <a:ext cx="7315200" cy="731520"/>
           </a:xfrm>
           <a:prstGeom prst="rect">
             <a:avLst/>
@@ -4004,55 +3655,58 @@
           <a:lstStyle/>
           <a:p>
             <a:pPr algn="ctr">
-              <a:defRPr sz="1800">
-                <a:solidFill>
-                  <a:srgbClr val="646464"/>
-                </a:solidFill>
-              </a:defRPr>
-            </a:pPr>
-            <a:r>
-              <a:t>Generated on November 2025</a:t>
-            </a:r>
-          </a:p>
-          <a:p>
-            <a:r>
-              <a:t>by Global Investment Partners</a:t>
-            </a:r>
-          </a:p>
-        </p:txBody>
-      </p:sp>
-      <p:sp>
-        <p:nvSpPr>
-          <p:cNvPr id="5" name="TextBox 4"/>
-          <p:cNvSpPr txBox="1"/>
-          <p:nvPr/>
-        </p:nvSpPr>
-        <p:spPr>
-          <a:xfrm>
-            <a:off x="457200" y="5943600"/>
-            <a:ext cx="8229600" cy="457200"/>
-          </a:xfrm>
-          <a:prstGeom prst="rect">
-            <a:avLst/>
-          </a:prstGeom>
-          <a:noFill/>
-        </p:spPr>
-        <p:txBody>
-          <a:bodyPr wrap="none">
-            <a:spAutoFit/>
-          </a:bodyPr>
-          <a:lstStyle/>
-          <a:p>
-            <a:pPr algn="ctr">
-              <a:defRPr sz="1400">
-                <a:solidFill>
-                  <a:srgbClr val="E53935"/>
-                </a:solidFill>
-              </a:defRPr>
-            </a:pPr>
-            <a:r>
-              <a:t>📊 Powered by Excel-to-PPT AI Converter</a:t>
-            </a:r>
+              <a:defRPr sz="2400">
+                <a:solidFill>
+                  <a:srgbClr val="3498DB"/>
+                </a:solidFill>
+              </a:defRPr>
+            </a:pPr>
+            <a:r>
+              <a:t>Comprehensive Business Analysis | November 2025</a:t>
+            </a:r>
+          </a:p>
+        </p:txBody>
+      </p:sp>
+      <p:sp>
+        <p:nvSpPr>
+          <p:cNvPr id="5" name="Rectangle 4"/>
+          <p:cNvSpPr/>
+          <p:nvPr/>
+        </p:nvSpPr>
+        <p:spPr>
+          <a:xfrm>
+            <a:off x="2743200" y="4754880"/>
+            <a:ext cx="3657600" cy="45720"/>
+          </a:xfrm>
+          <a:prstGeom prst="rect">
+            <a:avLst/>
+          </a:prstGeom>
+          <a:solidFill>
+            <a:srgbClr val="3498DB"/>
+          </a:solidFill>
+          <a:ln>
+            <a:noFill/>
+          </a:ln>
+        </p:spPr>
+        <p:style>
+          <a:lnRef idx="1">
+            <a:schemeClr val="accent1"/>
+          </a:lnRef>
+          <a:fillRef idx="3">
+            <a:schemeClr val="accent1"/>
+          </a:fillRef>
+          <a:effectRef idx="2">
+            <a:schemeClr val="accent1"/>
+          </a:effectRef>
+          <a:fontRef idx="minor">
+            <a:schemeClr val="lt1"/>
+          </a:fontRef>
+        </p:style>
+        <p:txBody>
+          <a:bodyPr rtlCol="0" anchor="ctr"/>
+          <a:lstStyle/>
+          <a:p>
+            <a:pPr algn="ctr"/>
           </a:p>
         </p:txBody>
       </p:sp>
@@ -4082,7 +3736,7 @@
         </p:nvSpPr>
         <p:spPr>
           <a:xfrm>
-            <a:off x="457200" y="457200"/>
+            <a:off x="457200" y="365760"/>
             <a:ext cx="8229600" cy="548640"/>
           </a:xfrm>
           <a:prstGeom prst="rect">
@@ -4097,35 +3751,37 @@
           <a:lstStyle/>
           <a:p>
             <a:pPr>
-              <a:defRPr sz="3200" b="1"/>
-            </a:pPr>
-            <a:r>
-              <a:t>📊 Executive Summary</a:t>
-            </a:r>
-          </a:p>
-        </p:txBody>
-      </p:sp>
-      <p:sp>
-        <p:nvSpPr>
-          <p:cNvPr id="3" name="Rectangle 2"/>
+              <a:defRPr sz="3600" b="1">
+                <a:solidFill>
+                  <a:srgbClr val="192A56"/>
+                </a:solidFill>
+              </a:defRPr>
+            </a:pPr>
+            <a:r>
+              <a:t>Executive Summary</a:t>
+            </a:r>
+          </a:p>
+        </p:txBody>
+      </p:sp>
+      <p:sp>
+        <p:nvSpPr>
+          <p:cNvPr id="3" name="Oval 2"/>
           <p:cNvSpPr/>
           <p:nvPr/>
         </p:nvSpPr>
         <p:spPr>
           <a:xfrm>
-            <a:off x="548640" y="1188720"/>
-            <a:ext cx="8046720" cy="4754880"/>
-          </a:xfrm>
-          <a:prstGeom prst="rect">
+            <a:off x="640080" y="1097280"/>
+            <a:ext cx="137160" cy="137160"/>
+          </a:xfrm>
+          <a:prstGeom prst="ellipse">
             <a:avLst/>
           </a:prstGeom>
           <a:solidFill>
-            <a:srgbClr val="F8F9FA"/>
+            <a:srgbClr val="2980B9"/>
           </a:solidFill>
-          <a:ln w="25400">
-            <a:solidFill>
-              <a:srgbClr val="C8DCF0"/>
-            </a:solidFill>
+          <a:ln>
+            <a:noFill/>
           </a:ln>
         </p:spPr>
         <p:style>
@@ -4158,112 +3814,356 @@
         </p:nvSpPr>
         <p:spPr>
           <a:xfrm>
-            <a:off x="1097280" y="1645920"/>
-            <a:ext cx="6949440" cy="4114800"/>
-          </a:xfrm>
-          <a:prstGeom prst="rect">
-            <a:avLst/>
-          </a:prstGeom>
-          <a:noFill/>
-        </p:spPr>
-        <p:txBody>
-          <a:bodyPr wrap="square" lIns="182880">
+            <a:off x="914400" y="1051560"/>
+            <a:ext cx="7772400" cy="457200"/>
+          </a:xfrm>
+          <a:prstGeom prst="rect">
+            <a:avLst/>
+          </a:prstGeom>
+          <a:noFill/>
+        </p:spPr>
+        <p:txBody>
+          <a:bodyPr wrap="square">
             <a:spAutoFit/>
           </a:bodyPr>
           <a:lstStyle/>
           <a:p>
             <a:pPr>
-              <a:lnSpc>
-                <a:spcPct val="130000"/>
-              </a:lnSpc>
-              <a:spcBef>
-                <a:spcPts val="500"/>
-              </a:spcBef>
               <a:spcAft>
-                <a:spcPts val="1500"/>
+                <a:spcPts val="600"/>
               </a:spcAft>
-              <a:defRPr sz="1800">
-                <a:latin typeface="Calibri"/>
-              </a:defRPr>
-            </a:pPr>
-            <a:r>
-              <a:t>✓ MarketCap averages $3.09T</a:t>
-            </a:r>
-          </a:p>
+              <a:defRPr sz="1600">
+                <a:solidFill>
+                  <a:srgbClr val="34495E"/>
+                </a:solidFill>
+              </a:defRPr>
+            </a:pPr>
+            <a:r>
+              <a:t>Analysis covers 4,826 data points across 84 dimensions</a:t>
+            </a:r>
+          </a:p>
+        </p:txBody>
+      </p:sp>
+      <p:sp>
+        <p:nvSpPr>
+          <p:cNvPr id="5" name="Oval 4"/>
+          <p:cNvSpPr/>
+          <p:nvPr/>
+        </p:nvSpPr>
+        <p:spPr>
+          <a:xfrm>
+            <a:off x="640080" y="1737360"/>
+            <a:ext cx="137160" cy="137160"/>
+          </a:xfrm>
+          <a:prstGeom prst="ellipse">
+            <a:avLst/>
+          </a:prstGeom>
+          <a:solidFill>
+            <a:srgbClr val="2980B9"/>
+          </a:solidFill>
+          <a:ln>
+            <a:noFill/>
+          </a:ln>
+        </p:spPr>
+        <p:style>
+          <a:lnRef idx="1">
+            <a:schemeClr val="accent1"/>
+          </a:lnRef>
+          <a:fillRef idx="3">
+            <a:schemeClr val="accent1"/>
+          </a:fillRef>
+          <a:effectRef idx="2">
+            <a:schemeClr val="accent1"/>
+          </a:effectRef>
+          <a:fontRef idx="minor">
+            <a:schemeClr val="lt1"/>
+          </a:fontRef>
+        </p:style>
+        <p:txBody>
+          <a:bodyPr rtlCol="0" anchor="ctr"/>
+          <a:lstStyle/>
+          <a:p>
+            <a:pPr algn="ctr"/>
+          </a:p>
+        </p:txBody>
+      </p:sp>
+      <p:sp>
+        <p:nvSpPr>
+          <p:cNvPr id="6" name="TextBox 5"/>
+          <p:cNvSpPr txBox="1"/>
+          <p:nvPr/>
+        </p:nvSpPr>
+        <p:spPr>
+          <a:xfrm>
+            <a:off x="914400" y="1691639"/>
+            <a:ext cx="7772400" cy="457200"/>
+          </a:xfrm>
+          <a:prstGeom prst="rect">
+            <a:avLst/>
+          </a:prstGeom>
+          <a:noFill/>
+        </p:spPr>
+        <p:txBody>
+          <a:bodyPr wrap="square">
+            <a:spAutoFit/>
+          </a:bodyPr>
+          <a:lstStyle/>
           <a:p>
             <a:pPr>
-              <a:lnSpc>
-                <a:spcPct val="130000"/>
-              </a:lnSpc>
-              <a:spcBef>
-                <a:spcPts val="500"/>
-              </a:spcBef>
               <a:spcAft>
-                <a:spcPts val="1500"/>
+                <a:spcPts val="600"/>
               </a:spcAft>
-              <a:defRPr sz="1800">
-                <a:latin typeface="Calibri"/>
-              </a:defRPr>
-            </a:pPr>
-            <a:r>
-              <a:t>✓ CurrentPrice ranges from $244 to $518</a:t>
-            </a:r>
-          </a:p>
+              <a:defRPr sz="1600">
+                <a:solidFill>
+                  <a:srgbClr val="34495E"/>
+                </a:solidFill>
+              </a:defRPr>
+            </a:pPr>
+            <a:r>
+              <a:t>MarketCap: Total of $15462.6B, averaging $3092.5B per record</a:t>
+            </a:r>
+          </a:p>
+        </p:txBody>
+      </p:sp>
+      <p:sp>
+        <p:nvSpPr>
+          <p:cNvPr id="7" name="Oval 6"/>
+          <p:cNvSpPr/>
+          <p:nvPr/>
+        </p:nvSpPr>
+        <p:spPr>
+          <a:xfrm>
+            <a:off x="640080" y="2377439"/>
+            <a:ext cx="137160" cy="137160"/>
+          </a:xfrm>
+          <a:prstGeom prst="ellipse">
+            <a:avLst/>
+          </a:prstGeom>
+          <a:solidFill>
+            <a:srgbClr val="2980B9"/>
+          </a:solidFill>
+          <a:ln>
+            <a:noFill/>
+          </a:ln>
+        </p:spPr>
+        <p:style>
+          <a:lnRef idx="1">
+            <a:schemeClr val="accent1"/>
+          </a:lnRef>
+          <a:fillRef idx="3">
+            <a:schemeClr val="accent1"/>
+          </a:fillRef>
+          <a:effectRef idx="2">
+            <a:schemeClr val="accent1"/>
+          </a:effectRef>
+          <a:fontRef idx="minor">
+            <a:schemeClr val="lt1"/>
+          </a:fontRef>
+        </p:style>
+        <p:txBody>
+          <a:bodyPr rtlCol="0" anchor="ctr"/>
+          <a:lstStyle/>
+          <a:p>
+            <a:pPr algn="ctr"/>
+          </a:p>
+        </p:txBody>
+      </p:sp>
+      <p:sp>
+        <p:nvSpPr>
+          <p:cNvPr id="8" name="TextBox 7"/>
+          <p:cNvSpPr txBox="1"/>
+          <p:nvPr/>
+        </p:nvSpPr>
+        <p:spPr>
+          <a:xfrm>
+            <a:off x="914400" y="2331720"/>
+            <a:ext cx="7772400" cy="457200"/>
+          </a:xfrm>
+          <a:prstGeom prst="rect">
+            <a:avLst/>
+          </a:prstGeom>
+          <a:noFill/>
+        </p:spPr>
+        <p:txBody>
+          <a:bodyPr wrap="square">
+            <a:spAutoFit/>
+          </a:bodyPr>
+          <a:lstStyle/>
           <a:p>
             <a:pPr>
-              <a:lnSpc>
-                <a:spcPct val="130000"/>
-              </a:lnSpc>
-              <a:spcBef>
-                <a:spcPts val="500"/>
-              </a:spcBef>
               <a:spcAft>
-                <a:spcPts val="1500"/>
+                <a:spcPts val="600"/>
               </a:spcAft>
-              <a:defRPr sz="1800">
-                <a:latin typeface="Calibri"/>
-              </a:defRPr>
-            </a:pPr>
-            <a:r>
-              <a:t>✓ TrailingPE exceeds ForwardPE by 34</a:t>
-            </a:r>
-          </a:p>
+              <a:defRPr sz="1600">
+                <a:solidFill>
+                  <a:srgbClr val="34495E"/>
+                </a:solidFill>
+              </a:defRPr>
+            </a:pPr>
+            <a:r>
+              <a:t>CurrentPrice: Total of $1.8K, averaging $354.03 per record</a:t>
+            </a:r>
+          </a:p>
+        </p:txBody>
+      </p:sp>
+      <p:sp>
+        <p:nvSpPr>
+          <p:cNvPr id="9" name="Oval 8"/>
+          <p:cNvSpPr/>
+          <p:nvPr/>
+        </p:nvSpPr>
+        <p:spPr>
+          <a:xfrm>
+            <a:off x="640080" y="3017520"/>
+            <a:ext cx="137160" cy="137160"/>
+          </a:xfrm>
+          <a:prstGeom prst="ellipse">
+            <a:avLst/>
+          </a:prstGeom>
+          <a:solidFill>
+            <a:srgbClr val="2980B9"/>
+          </a:solidFill>
+          <a:ln>
+            <a:noFill/>
+          </a:ln>
+        </p:spPr>
+        <p:style>
+          <a:lnRef idx="1">
+            <a:schemeClr val="accent1"/>
+          </a:lnRef>
+          <a:fillRef idx="3">
+            <a:schemeClr val="accent1"/>
+          </a:fillRef>
+          <a:effectRef idx="2">
+            <a:schemeClr val="accent1"/>
+          </a:effectRef>
+          <a:fontRef idx="minor">
+            <a:schemeClr val="lt1"/>
+          </a:fontRef>
+        </p:style>
+        <p:txBody>
+          <a:bodyPr rtlCol="0" anchor="ctr"/>
+          <a:lstStyle/>
+          <a:p>
+            <a:pPr algn="ctr"/>
+          </a:p>
+        </p:txBody>
+      </p:sp>
+      <p:sp>
+        <p:nvSpPr>
+          <p:cNvPr id="10" name="TextBox 9"/>
+          <p:cNvSpPr txBox="1"/>
+          <p:nvPr/>
+        </p:nvSpPr>
+        <p:spPr>
+          <a:xfrm>
+            <a:off x="914400" y="2971800"/>
+            <a:ext cx="7772400" cy="457200"/>
+          </a:xfrm>
+          <a:prstGeom prst="rect">
+            <a:avLst/>
+          </a:prstGeom>
+          <a:noFill/>
+        </p:spPr>
+        <p:txBody>
+          <a:bodyPr wrap="square">
+            <a:spAutoFit/>
+          </a:bodyPr>
+          <a:lstStyle/>
           <a:p>
             <a:pPr>
-              <a:lnSpc>
-                <a:spcPct val="130000"/>
-              </a:lnSpc>
-              <a:spcBef>
-                <a:spcPts val="500"/>
-              </a:spcBef>
               <a:spcAft>
-                <a:spcPts val="1500"/>
+                <a:spcPts val="600"/>
               </a:spcAft>
-              <a:defRPr sz="1800">
-                <a:latin typeface="Calibri"/>
-              </a:defRPr>
-            </a:pPr>
-            <a:r>
-              <a:t>✓ 52wHigh peaks at $555</a:t>
-            </a:r>
-          </a:p>
+              <a:defRPr sz="1600">
+                <a:solidFill>
+                  <a:srgbClr val="34495E"/>
+                </a:solidFill>
+              </a:defRPr>
+            </a:pPr>
+            <a:r>
+              <a:t>TrailingPE: Total of $448.01, averaging $89.60 per record</a:t>
+            </a:r>
+          </a:p>
+        </p:txBody>
+      </p:sp>
+      <p:sp>
+        <p:nvSpPr>
+          <p:cNvPr id="11" name="Oval 10"/>
+          <p:cNvSpPr/>
+          <p:nvPr/>
+        </p:nvSpPr>
+        <p:spPr>
+          <a:xfrm>
+            <a:off x="640080" y="3657600"/>
+            <a:ext cx="137160" cy="137160"/>
+          </a:xfrm>
+          <a:prstGeom prst="ellipse">
+            <a:avLst/>
+          </a:prstGeom>
+          <a:solidFill>
+            <a:srgbClr val="2980B9"/>
+          </a:solidFill>
+          <a:ln>
+            <a:noFill/>
+          </a:ln>
+        </p:spPr>
+        <p:style>
+          <a:lnRef idx="1">
+            <a:schemeClr val="accent1"/>
+          </a:lnRef>
+          <a:fillRef idx="3">
+            <a:schemeClr val="accent1"/>
+          </a:fillRef>
+          <a:effectRef idx="2">
+            <a:schemeClr val="accent1"/>
+          </a:effectRef>
+          <a:fontRef idx="minor">
+            <a:schemeClr val="lt1"/>
+          </a:fontRef>
+        </p:style>
+        <p:txBody>
+          <a:bodyPr rtlCol="0" anchor="ctr"/>
+          <a:lstStyle/>
+          <a:p>
+            <a:pPr algn="ctr"/>
+          </a:p>
+        </p:txBody>
+      </p:sp>
+      <p:sp>
+        <p:nvSpPr>
+          <p:cNvPr id="12" name="TextBox 11"/>
+          <p:cNvSpPr txBox="1"/>
+          <p:nvPr/>
+        </p:nvSpPr>
+        <p:spPr>
+          <a:xfrm>
+            <a:off x="914400" y="3611880"/>
+            <a:ext cx="7772400" cy="457200"/>
+          </a:xfrm>
+          <a:prstGeom prst="rect">
+            <a:avLst/>
+          </a:prstGeom>
+          <a:noFill/>
+        </p:spPr>
+        <p:txBody>
+          <a:bodyPr wrap="square">
+            <a:spAutoFit/>
+          </a:bodyPr>
+          <a:lstStyle/>
           <a:p>
             <a:pPr>
-              <a:lnSpc>
-                <a:spcPct val="130000"/>
-              </a:lnSpc>
-              <a:spcBef>
-                <a:spcPts val="500"/>
-              </a:spcBef>
               <a:spcAft>
-                <a:spcPts val="1500"/>
+                <a:spcPts val="600"/>
               </a:spcAft>
-              <a:defRPr sz="1800">
-                <a:latin typeface="Calibri"/>
-              </a:defRPr>
-            </a:pPr>
-            <a:r>
-              <a:t>✓ Growth rates vary by 285%</a:t>
+              <a:defRPr sz="1600">
+                <a:solidFill>
+                  <a:srgbClr val="34495E"/>
+                </a:solidFill>
+              </a:defRPr>
+            </a:pPr>
+            <a:r>
+              <a:t>5 unique categories identified in Ticker dimension</a:t>
             </a:r>
           </a:p>
         </p:txBody>
@@ -4294,7 +4194,7 @@
         </p:nvSpPr>
         <p:spPr>
           <a:xfrm>
-            <a:off x="457200" y="457200"/>
+            <a:off x="457200" y="365760"/>
             <a:ext cx="8229600" cy="548640"/>
           </a:xfrm>
           <a:prstGeom prst="rect">
@@ -4309,10 +4209,14 @@
           <a:lstStyle/>
           <a:p>
             <a:pPr>
-              <a:defRPr sz="3200" b="1"/>
-            </a:pPr>
-            <a:r>
-              <a:t>💵 Key Metrics Overview</a:t>
+              <a:defRPr sz="3600" b="1">
+                <a:solidFill>
+                  <a:srgbClr val="192A56"/>
+                </a:solidFill>
+              </a:defRPr>
+            </a:pPr>
+            <a:r>
+              <a:t>Key Metrics Overview</a:t>
             </a:r>
           </a:p>
         </p:txBody>
@@ -4325,21 +4229,20 @@
         </p:nvSpPr>
         <p:spPr>
           <a:xfrm>
-            <a:off x="548640" y="1463040"/>
-            <a:ext cx="3840480" cy="2011680"/>
+            <a:off x="457200" y="1188720"/>
+            <a:ext cx="2560320" cy="1645920"/>
           </a:xfrm>
           <a:prstGeom prst="rect">
             <a:avLst/>
           </a:prstGeom>
           <a:solidFill>
-            <a:srgbClr val="1F4E78"/>
+            <a:srgbClr val="ECF0F1"/>
           </a:solidFill>
           <a:ln w="12700">
             <a:solidFill>
-              <a:srgbClr val="C8C8C8"/>
+              <a:srgbClr val="7F8C8D"/>
             </a:solidFill>
           </a:ln>
-          <a:effectLst/>
         </p:spPr>
         <p:style>
           <a:lnRef idx="1">
@@ -4371,8 +4274,8 @@
         </p:nvSpPr>
         <p:spPr>
           <a:xfrm>
-            <a:off x="731520" y="1737360"/>
-            <a:ext cx="3474720" cy="457200"/>
+            <a:off x="640080" y="1371600"/>
+            <a:ext cx="2194560" cy="365760"/>
           </a:xfrm>
           <a:prstGeom prst="rect">
             <a:avLst/>
@@ -4386,14 +4289,14 @@
           <a:lstStyle/>
           <a:p>
             <a:pPr>
-              <a:defRPr sz="1800" b="1">
-                <a:solidFill>
-                  <a:srgbClr val="FFFFFF"/>
-                </a:solidFill>
-              </a:defRPr>
-            </a:pPr>
-            <a:r>
-              <a:t>Total Market Cap</a:t>
+              <a:defRPr sz="1400" b="1">
+                <a:solidFill>
+                  <a:srgbClr val="34495E"/>
+                </a:solidFill>
+              </a:defRPr>
+            </a:pPr>
+            <a:r>
+              <a:t>Total Records</a:t>
             </a:r>
           </a:p>
         </p:txBody>
@@ -4406,8 +4309,8 @@
         </p:nvSpPr>
         <p:spPr>
           <a:xfrm>
-            <a:off x="731520" y="2286000"/>
-            <a:ext cx="3474720" cy="731520"/>
+            <a:off x="640080" y="1828800"/>
+            <a:ext cx="2194560" cy="548640"/>
           </a:xfrm>
           <a:prstGeom prst="rect">
             <a:avLst/>
@@ -4421,14 +4324,14 @@
           <a:lstStyle/>
           <a:p>
             <a:pPr>
-              <a:defRPr sz="3200" b="1">
-                <a:solidFill>
-                  <a:srgbClr val="FFFFFF"/>
-                </a:solidFill>
-              </a:defRPr>
-            </a:pPr>
-            <a:r>
-              <a:t>$15462.6B</a:t>
+              <a:defRPr sz="2800" b="1">
+                <a:solidFill>
+                  <a:srgbClr val="192A56"/>
+                </a:solidFill>
+              </a:defRPr>
+            </a:pPr>
+            <a:r>
+              <a:t>4,826</a:t>
             </a:r>
           </a:p>
         </p:txBody>
@@ -4441,8 +4344,8 @@
         </p:nvSpPr>
         <p:spPr>
           <a:xfrm>
-            <a:off x="731520" y="2834640"/>
-            <a:ext cx="3474720" cy="274320"/>
+            <a:off x="640080" y="2468880"/>
+            <a:ext cx="2194560" cy="274320"/>
           </a:xfrm>
           <a:prstGeom prst="rect">
             <a:avLst/>
@@ -4456,14 +4359,14 @@
           <a:lstStyle/>
           <a:p>
             <a:pPr>
-              <a:defRPr sz="1400">
-                <a:solidFill>
-                  <a:srgbClr val="C8FFC8"/>
-                </a:solidFill>
-              </a:defRPr>
-            </a:pPr>
-            <a:r>
-              <a:t>↗️ +12.5%</a:t>
+              <a:defRPr sz="1200">
+                <a:solidFill>
+                  <a:srgbClr val="7F8C8D"/>
+                </a:solidFill>
+              </a:defRPr>
+            </a:pPr>
+            <a:r>
+              <a:t>→ Current</a:t>
             </a:r>
           </a:p>
         </p:txBody>
@@ -4476,21 +4379,20 @@
         </p:nvSpPr>
         <p:spPr>
           <a:xfrm>
-            <a:off x="4754880" y="1463040"/>
-            <a:ext cx="3840480" cy="2011680"/>
+            <a:off x="3383280" y="1188720"/>
+            <a:ext cx="2560320" cy="1645920"/>
           </a:xfrm>
           <a:prstGeom prst="rect">
             <a:avLst/>
           </a:prstGeom>
           <a:solidFill>
-            <a:srgbClr val="4F81BD"/>
+            <a:srgbClr val="ECF0F1"/>
           </a:solidFill>
           <a:ln w="12700">
             <a:solidFill>
-              <a:srgbClr val="C8C8C8"/>
+              <a:srgbClr val="7F8C8D"/>
             </a:solidFill>
           </a:ln>
-          <a:effectLst/>
         </p:spPr>
         <p:style>
           <a:lnRef idx="1">
@@ -4522,8 +4424,8 @@
         </p:nvSpPr>
         <p:spPr>
           <a:xfrm>
-            <a:off x="4937760" y="1737360"/>
-            <a:ext cx="3474720" cy="457200"/>
+            <a:off x="3566160" y="1371600"/>
+            <a:ext cx="2194560" cy="365760"/>
           </a:xfrm>
           <a:prstGeom prst="rect">
             <a:avLst/>
@@ -4537,14 +4439,14 @@
           <a:lstStyle/>
           <a:p>
             <a:pPr>
-              <a:defRPr sz="1800" b="1">
-                <a:solidFill>
-                  <a:srgbClr val="FFFFFF"/>
-                </a:solidFill>
-              </a:defRPr>
-            </a:pPr>
-            <a:r>
-              <a:t>Avg 1Y Return</a:t>
+              <a:defRPr sz="1400" b="1">
+                <a:solidFill>
+                  <a:srgbClr val="34495E"/>
+                </a:solidFill>
+              </a:defRPr>
+            </a:pPr>
+            <a:r>
+              <a:t>MarketCap</a:t>
             </a:r>
           </a:p>
         </p:txBody>
@@ -4557,8 +4459,8 @@
         </p:nvSpPr>
         <p:spPr>
           <a:xfrm>
-            <a:off x="4937760" y="2286000"/>
-            <a:ext cx="3474720" cy="731520"/>
+            <a:off x="3566160" y="1828800"/>
+            <a:ext cx="2194560" cy="548640"/>
           </a:xfrm>
           <a:prstGeom prst="rect">
             <a:avLst/>
@@ -4572,14 +4474,14 @@
           <a:lstStyle/>
           <a:p>
             <a:pPr>
-              <a:defRPr sz="3200" b="1">
-                <a:solidFill>
-                  <a:srgbClr val="FFFFFF"/>
-                </a:solidFill>
-              </a:defRPr>
-            </a:pPr>
-            <a:r>
-              <a:t>40.5%</a:t>
+              <a:defRPr sz="2800" b="1">
+                <a:solidFill>
+                  <a:srgbClr val="192A56"/>
+                </a:solidFill>
+              </a:defRPr>
+            </a:pPr>
+            <a:r>
+              <a:t>$15462.6B</a:t>
             </a:r>
           </a:p>
         </p:txBody>
@@ -4592,8 +4494,8 @@
         </p:nvSpPr>
         <p:spPr>
           <a:xfrm>
-            <a:off x="4937760" y="2834640"/>
-            <a:ext cx="3474720" cy="274320"/>
+            <a:off x="3566160" y="2468880"/>
+            <a:ext cx="2194560" cy="274320"/>
           </a:xfrm>
           <a:prstGeom prst="rect">
             <a:avLst/>
@@ -4607,14 +4509,14 @@
           <a:lstStyle/>
           <a:p>
             <a:pPr>
-              <a:defRPr sz="1400">
-                <a:solidFill>
-                  <a:srgbClr val="FFC8C8"/>
-                </a:solidFill>
-              </a:defRPr>
-            </a:pPr>
-            <a:r>
-              <a:t>↗️ Strong</a:t>
+              <a:defRPr sz="1200">
+                <a:solidFill>
+                  <a:srgbClr val="7F8C8D"/>
+                </a:solidFill>
+              </a:defRPr>
+            </a:pPr>
+            <a:r>
+              <a:t>→ Total</a:t>
             </a:r>
           </a:p>
         </p:txBody>
@@ -4627,21 +4529,20 @@
         </p:nvSpPr>
         <p:spPr>
           <a:xfrm>
-            <a:off x="548640" y="3749040"/>
-            <a:ext cx="3840480" cy="2011680"/>
+            <a:off x="6309360" y="1188720"/>
+            <a:ext cx="2560320" cy="1645920"/>
           </a:xfrm>
           <a:prstGeom prst="rect">
             <a:avLst/>
           </a:prstGeom>
           <a:solidFill>
-            <a:srgbClr val="2E75B5"/>
+            <a:srgbClr val="ECF0F1"/>
           </a:solidFill>
           <a:ln w="12700">
             <a:solidFill>
-              <a:srgbClr val="C8C8C8"/>
+              <a:srgbClr val="7F8C8D"/>
             </a:solidFill>
           </a:ln>
-          <a:effectLst/>
         </p:spPr>
         <p:style>
           <a:lnRef idx="1">
@@ -4673,8 +4574,8 @@
         </p:nvSpPr>
         <p:spPr>
           <a:xfrm>
-            <a:off x="731520" y="4023360"/>
-            <a:ext cx="3474720" cy="457200"/>
+            <a:off x="6492240" y="1371600"/>
+            <a:ext cx="2194560" cy="365760"/>
           </a:xfrm>
           <a:prstGeom prst="rect">
             <a:avLst/>
@@ -4688,14 +4589,14 @@
           <a:lstStyle/>
           <a:p>
             <a:pPr>
-              <a:defRPr sz="1800" b="1">
-                <a:solidFill>
-                  <a:srgbClr val="FFFFFF"/>
-                </a:solidFill>
-              </a:defRPr>
-            </a:pPr>
-            <a:r>
-              <a:t>Avg P/E Ratio</a:t>
+              <a:defRPr sz="1400" b="1">
+                <a:solidFill>
+                  <a:srgbClr val="34495E"/>
+                </a:solidFill>
+              </a:defRPr>
+            </a:pPr>
+            <a:r>
+              <a:t>CurrentPrice</a:t>
             </a:r>
           </a:p>
         </p:txBody>
@@ -4708,8 +4609,8 @@
         </p:nvSpPr>
         <p:spPr>
           <a:xfrm>
-            <a:off x="731520" y="4572000"/>
-            <a:ext cx="3474720" cy="731520"/>
+            <a:off x="6492240" y="1828800"/>
+            <a:ext cx="2194560" cy="548640"/>
           </a:xfrm>
           <a:prstGeom prst="rect">
             <a:avLst/>
@@ -4723,14 +4624,14 @@
           <a:lstStyle/>
           <a:p>
             <a:pPr>
-              <a:defRPr sz="3200" b="1">
-                <a:solidFill>
-                  <a:srgbClr val="FFFFFF"/>
-                </a:solidFill>
-              </a:defRPr>
-            </a:pPr>
-            <a:r>
-              <a:t>89.6x</a:t>
+              <a:defRPr sz="2800" b="1">
+                <a:solidFill>
+                  <a:srgbClr val="192A56"/>
+                </a:solidFill>
+              </a:defRPr>
+            </a:pPr>
+            <a:r>
+              <a:t>$1.8K</a:t>
             </a:r>
           </a:p>
         </p:txBody>
@@ -4743,8 +4644,8 @@
         </p:nvSpPr>
         <p:spPr>
           <a:xfrm>
-            <a:off x="731520" y="5120640"/>
-            <a:ext cx="3474720" cy="274320"/>
+            <a:off x="6492240" y="2468880"/>
+            <a:ext cx="2194560" cy="274320"/>
           </a:xfrm>
           <a:prstGeom prst="rect">
             <a:avLst/>
@@ -4758,14 +4659,14 @@
           <a:lstStyle/>
           <a:p>
             <a:pPr>
-              <a:defRPr sz="1400">
-                <a:solidFill>
-                  <a:srgbClr val="FFC8C8"/>
-                </a:solidFill>
-              </a:defRPr>
-            </a:pPr>
-            <a:r>
-              <a:t>→ Stable</a:t>
+              <a:defRPr sz="1200">
+                <a:solidFill>
+                  <a:srgbClr val="7F8C8D"/>
+                </a:solidFill>
+              </a:defRPr>
+            </a:pPr>
+            <a:r>
+              <a:t>→ Total</a:t>
             </a:r>
           </a:p>
         </p:txBody>
@@ -4778,21 +4679,20 @@
         </p:nvSpPr>
         <p:spPr>
           <a:xfrm>
-            <a:off x="4754880" y="3749040"/>
-            <a:ext cx="3840480" cy="2011680"/>
+            <a:off x="457200" y="3291840"/>
+            <a:ext cx="2560320" cy="1645920"/>
           </a:xfrm>
           <a:prstGeom prst="rect">
             <a:avLst/>
           </a:prstGeom>
           <a:solidFill>
-            <a:srgbClr val="5B9BD5"/>
+            <a:srgbClr val="ECF0F1"/>
           </a:solidFill>
           <a:ln w="12700">
             <a:solidFill>
-              <a:srgbClr val="C8C8C8"/>
+              <a:srgbClr val="7F8C8D"/>
             </a:solidFill>
           </a:ln>
-          <a:effectLst/>
         </p:spPr>
         <p:style>
           <a:lnRef idx="1">
@@ -4824,8 +4724,8 @@
         </p:nvSpPr>
         <p:spPr>
           <a:xfrm>
-            <a:off x="4937760" y="4023360"/>
-            <a:ext cx="3474720" cy="457200"/>
+            <a:off x="640080" y="3474720"/>
+            <a:ext cx="2194560" cy="365760"/>
           </a:xfrm>
           <a:prstGeom prst="rect">
             <a:avLst/>
@@ -4839,14 +4739,14 @@
           <a:lstStyle/>
           <a:p>
             <a:pPr>
-              <a:defRPr sz="1800" b="1">
-                <a:solidFill>
-                  <a:srgbClr val="FFFFFF"/>
-                </a:solidFill>
-              </a:defRPr>
-            </a:pPr>
-            <a:r>
-              <a:t>Portfolio Size</a:t>
+              <a:defRPr sz="1400" b="1">
+                <a:solidFill>
+                  <a:srgbClr val="34495E"/>
+                </a:solidFill>
+              </a:defRPr>
+            </a:pPr>
+            <a:r>
+              <a:t>TrailingPE</a:t>
             </a:r>
           </a:p>
         </p:txBody>
@@ -4859,8 +4759,8 @@
         </p:nvSpPr>
         <p:spPr>
           <a:xfrm>
-            <a:off x="4937760" y="4572000"/>
-            <a:ext cx="3474720" cy="731520"/>
+            <a:off x="640080" y="3931920"/>
+            <a:ext cx="2194560" cy="548640"/>
           </a:xfrm>
           <a:prstGeom prst="rect">
             <a:avLst/>
@@ -4874,14 +4774,14 @@
           <a:lstStyle/>
           <a:p>
             <a:pPr>
-              <a:defRPr sz="3200" b="1">
-                <a:solidFill>
-                  <a:srgbClr val="FFFFFF"/>
-                </a:solidFill>
-              </a:defRPr>
-            </a:pPr>
-            <a:r>
-              <a:t>5 Stocks</a:t>
+              <a:defRPr sz="2800" b="1">
+                <a:solidFill>
+                  <a:srgbClr val="192A56"/>
+                </a:solidFill>
+              </a:defRPr>
+            </a:pPr>
+            <a:r>
+              <a:t>$448.01</a:t>
             </a:r>
           </a:p>
         </p:txBody>
@@ -4894,8 +4794,8 @@
         </p:nvSpPr>
         <p:spPr>
           <a:xfrm>
-            <a:off x="4937760" y="5120640"/>
-            <a:ext cx="3474720" cy="274320"/>
+            <a:off x="640080" y="4572000"/>
+            <a:ext cx="2194560" cy="274320"/>
           </a:xfrm>
           <a:prstGeom prst="rect">
             <a:avLst/>
@@ -4909,12 +4809,315 @@
           <a:lstStyle/>
           <a:p>
             <a:pPr>
-              <a:defRPr sz="1400">
-                <a:solidFill>
-                  <a:srgbClr val="FFC8C8"/>
-                </a:solidFill>
-              </a:defRPr>
-            </a:pPr>
+              <a:defRPr sz="1200">
+                <a:solidFill>
+                  <a:srgbClr val="7F8C8D"/>
+                </a:solidFill>
+              </a:defRPr>
+            </a:pPr>
+            <a:r>
+              <a:t>→ Total</a:t>
+            </a:r>
+          </a:p>
+        </p:txBody>
+      </p:sp>
+      <p:sp>
+        <p:nvSpPr>
+          <p:cNvPr id="19" name="Rectangle 18"/>
+          <p:cNvSpPr/>
+          <p:nvPr/>
+        </p:nvSpPr>
+        <p:spPr>
+          <a:xfrm>
+            <a:off x="3383280" y="3291840"/>
+            <a:ext cx="2560320" cy="1645920"/>
+          </a:xfrm>
+          <a:prstGeom prst="rect">
+            <a:avLst/>
+          </a:prstGeom>
+          <a:solidFill>
+            <a:srgbClr val="ECF0F1"/>
+          </a:solidFill>
+          <a:ln w="12700">
+            <a:solidFill>
+              <a:srgbClr val="7F8C8D"/>
+            </a:solidFill>
+          </a:ln>
+        </p:spPr>
+        <p:style>
+          <a:lnRef idx="1">
+            <a:schemeClr val="accent1"/>
+          </a:lnRef>
+          <a:fillRef idx="3">
+            <a:schemeClr val="accent1"/>
+          </a:fillRef>
+          <a:effectRef idx="2">
+            <a:schemeClr val="accent1"/>
+          </a:effectRef>
+          <a:fontRef idx="minor">
+            <a:schemeClr val="lt1"/>
+          </a:fontRef>
+        </p:style>
+        <p:txBody>
+          <a:bodyPr rtlCol="0" anchor="ctr"/>
+          <a:lstStyle/>
+          <a:p>
+            <a:pPr algn="ctr"/>
+          </a:p>
+        </p:txBody>
+      </p:sp>
+      <p:sp>
+        <p:nvSpPr>
+          <p:cNvPr id="20" name="TextBox 19"/>
+          <p:cNvSpPr txBox="1"/>
+          <p:nvPr/>
+        </p:nvSpPr>
+        <p:spPr>
+          <a:xfrm>
+            <a:off x="3566160" y="3474720"/>
+            <a:ext cx="2194560" cy="365760"/>
+          </a:xfrm>
+          <a:prstGeom prst="rect">
+            <a:avLst/>
+          </a:prstGeom>
+          <a:noFill/>
+        </p:spPr>
+        <p:txBody>
+          <a:bodyPr wrap="none">
+            <a:spAutoFit/>
+          </a:bodyPr>
+          <a:lstStyle/>
+          <a:p>
+            <a:pPr>
+              <a:defRPr sz="1400" b="1">
+                <a:solidFill>
+                  <a:srgbClr val="34495E"/>
+                </a:solidFill>
+              </a:defRPr>
+            </a:pPr>
+            <a:r>
+              <a:t>ForwardPE</a:t>
+            </a:r>
+          </a:p>
+        </p:txBody>
+      </p:sp>
+      <p:sp>
+        <p:nvSpPr>
+          <p:cNvPr id="21" name="TextBox 20"/>
+          <p:cNvSpPr txBox="1"/>
+          <p:nvPr/>
+        </p:nvSpPr>
+        <p:spPr>
+          <a:xfrm>
+            <a:off x="3566160" y="3931920"/>
+            <a:ext cx="2194560" cy="548640"/>
+          </a:xfrm>
+          <a:prstGeom prst="rect">
+            <a:avLst/>
+          </a:prstGeom>
+          <a:noFill/>
+        </p:spPr>
+        <p:txBody>
+          <a:bodyPr wrap="none">
+            <a:spAutoFit/>
+          </a:bodyPr>
+          <a:lstStyle/>
+          <a:p>
+            <a:pPr>
+              <a:defRPr sz="2800" b="1">
+                <a:solidFill>
+                  <a:srgbClr val="192A56"/>
+                </a:solidFill>
+              </a:defRPr>
+            </a:pPr>
+            <a:r>
+              <a:t>$279.18</a:t>
+            </a:r>
+          </a:p>
+        </p:txBody>
+      </p:sp>
+      <p:sp>
+        <p:nvSpPr>
+          <p:cNvPr id="22" name="TextBox 21"/>
+          <p:cNvSpPr txBox="1"/>
+          <p:nvPr/>
+        </p:nvSpPr>
+        <p:spPr>
+          <a:xfrm>
+            <a:off x="3566160" y="4572000"/>
+            <a:ext cx="2194560" cy="274320"/>
+          </a:xfrm>
+          <a:prstGeom prst="rect">
+            <a:avLst/>
+          </a:prstGeom>
+          <a:noFill/>
+        </p:spPr>
+        <p:txBody>
+          <a:bodyPr wrap="none">
+            <a:spAutoFit/>
+          </a:bodyPr>
+          <a:lstStyle/>
+          <a:p>
+            <a:pPr>
+              <a:defRPr sz="1200">
+                <a:solidFill>
+                  <a:srgbClr val="7F8C8D"/>
+                </a:solidFill>
+              </a:defRPr>
+            </a:pPr>
+            <a:r>
+              <a:t>→ Total</a:t>
+            </a:r>
+          </a:p>
+        </p:txBody>
+      </p:sp>
+      <p:sp>
+        <p:nvSpPr>
+          <p:cNvPr id="23" name="Rectangle 22"/>
+          <p:cNvSpPr/>
+          <p:nvPr/>
+        </p:nvSpPr>
+        <p:spPr>
+          <a:xfrm>
+            <a:off x="6309360" y="3291840"/>
+            <a:ext cx="2560320" cy="1645920"/>
+          </a:xfrm>
+          <a:prstGeom prst="rect">
+            <a:avLst/>
+          </a:prstGeom>
+          <a:solidFill>
+            <a:srgbClr val="ECF0F1"/>
+          </a:solidFill>
+          <a:ln w="12700">
+            <a:solidFill>
+              <a:srgbClr val="7F8C8D"/>
+            </a:solidFill>
+          </a:ln>
+        </p:spPr>
+        <p:style>
+          <a:lnRef idx="1">
+            <a:schemeClr val="accent1"/>
+          </a:lnRef>
+          <a:fillRef idx="3">
+            <a:schemeClr val="accent1"/>
+          </a:fillRef>
+          <a:effectRef idx="2">
+            <a:schemeClr val="accent1"/>
+          </a:effectRef>
+          <a:fontRef idx="minor">
+            <a:schemeClr val="lt1"/>
+          </a:fontRef>
+        </p:style>
+        <p:txBody>
+          <a:bodyPr rtlCol="0" anchor="ctr"/>
+          <a:lstStyle/>
+          <a:p>
+            <a:pPr algn="ctr"/>
+          </a:p>
+        </p:txBody>
+      </p:sp>
+      <p:sp>
+        <p:nvSpPr>
+          <p:cNvPr id="24" name="TextBox 23"/>
+          <p:cNvSpPr txBox="1"/>
+          <p:nvPr/>
+        </p:nvSpPr>
+        <p:spPr>
+          <a:xfrm>
+            <a:off x="6492240" y="3474720"/>
+            <a:ext cx="2194560" cy="365760"/>
+          </a:xfrm>
+          <a:prstGeom prst="rect">
+            <a:avLst/>
+          </a:prstGeom>
+          <a:noFill/>
+        </p:spPr>
+        <p:txBody>
+          <a:bodyPr wrap="none">
+            <a:spAutoFit/>
+          </a:bodyPr>
+          <a:lstStyle/>
+          <a:p>
+            <a:pPr>
+              <a:defRPr sz="1400" b="1">
+                <a:solidFill>
+                  <a:srgbClr val="34495E"/>
+                </a:solidFill>
+              </a:defRPr>
+            </a:pPr>
+            <a:r>
+              <a:t>Ticker Count</a:t>
+            </a:r>
+          </a:p>
+        </p:txBody>
+      </p:sp>
+      <p:sp>
+        <p:nvSpPr>
+          <p:cNvPr id="25" name="TextBox 24"/>
+          <p:cNvSpPr txBox="1"/>
+          <p:nvPr/>
+        </p:nvSpPr>
+        <p:spPr>
+          <a:xfrm>
+            <a:off x="6492240" y="3931920"/>
+            <a:ext cx="2194560" cy="548640"/>
+          </a:xfrm>
+          <a:prstGeom prst="rect">
+            <a:avLst/>
+          </a:prstGeom>
+          <a:noFill/>
+        </p:spPr>
+        <p:txBody>
+          <a:bodyPr wrap="none">
+            <a:spAutoFit/>
+          </a:bodyPr>
+          <a:lstStyle/>
+          <a:p>
+            <a:pPr>
+              <a:defRPr sz="2800" b="1">
+                <a:solidFill>
+                  <a:srgbClr val="192A56"/>
+                </a:solidFill>
+              </a:defRPr>
+            </a:pPr>
+            <a:r>
+              <a:t>5</a:t>
+            </a:r>
+          </a:p>
+        </p:txBody>
+      </p:sp>
+      <p:sp>
+        <p:nvSpPr>
+          <p:cNvPr id="26" name="TextBox 25"/>
+          <p:cNvSpPr txBox="1"/>
+          <p:nvPr/>
+        </p:nvSpPr>
+        <p:spPr>
+          <a:xfrm>
+            <a:off x="6492240" y="4572000"/>
+            <a:ext cx="2194560" cy="274320"/>
+          </a:xfrm>
+          <a:prstGeom prst="rect">
+            <a:avLst/>
+          </a:prstGeom>
+          <a:noFill/>
+        </p:spPr>
+        <p:txBody>
+          <a:bodyPr wrap="none">
+            <a:spAutoFit/>
+          </a:bodyPr>
+          <a:lstStyle/>
+          <a:p>
+            <a:pPr>
+              <a:defRPr sz="1200">
+                <a:solidFill>
+                  <a:srgbClr val="7F8C8D"/>
+                </a:solidFill>
+              </a:defRPr>
+            </a:pPr>
+            <a:r>
+              <a:t>→ Unique</a:t>
+            </a:r>
           </a:p>
         </p:txBody>
       </p:sp>
@@ -4929,14 +5132,6 @@
 <file path=ppt/slides/slide4.xml><?xml version="1.0" encoding="utf-8"?>
 <p:sld xmlns:a="http://schemas.openxmlformats.org/drawingml/2006/main" xmlns:p="http://schemas.openxmlformats.org/presentationml/2006/main" xmlns:r="http://schemas.openxmlformats.org/officeDocument/2006/relationships">
   <p:cSld>
-    <p:bg>
-      <p:bgPr>
-        <a:solidFill>
-          <a:srgbClr val="FFFFFF"/>
-        </a:solidFill>
-        <a:effectLst/>
-      </p:bgPr>
-    </p:bg>
     <p:spTree>
       <p:nvGrpSpPr>
         <p:cNvPr id="1" name=""/>
@@ -4967,29 +5162,113 @@
           <a:lstStyle/>
           <a:p>
             <a:pPr>
-              <a:defRPr sz="3200" b="1">
+              <a:defRPr sz="3600" b="1">
                 <a:solidFill>
                   <a:srgbClr val="192A56"/>
                 </a:solidFill>
               </a:defRPr>
             </a:pPr>
             <a:r>
-              <a:t>📈 Market Performance Dashboard</a:t>
+              <a:t>Data Insights &amp; Analysis</a:t>
+            </a:r>
+          </a:p>
+        </p:txBody>
+      </p:sp>
+      <p:sp>
+        <p:nvSpPr>
+          <p:cNvPr id="3" name="TextBox 2"/>
+          <p:cNvSpPr txBox="1"/>
+          <p:nvPr/>
+        </p:nvSpPr>
+        <p:spPr>
+          <a:xfrm>
+            <a:off x="457200" y="1097280"/>
+            <a:ext cx="4114800" cy="1828800"/>
+          </a:xfrm>
+          <a:prstGeom prst="rect">
+            <a:avLst/>
+          </a:prstGeom>
+          <a:noFill/>
+        </p:spPr>
+        <p:txBody>
+          <a:bodyPr wrap="square">
+            <a:spAutoFit/>
+          </a:bodyPr>
+          <a:lstStyle/>
+          <a:p/>
+          <a:p>
+            <a:pPr>
+              <a:spcAft>
+                <a:spcPts val="1200"/>
+              </a:spcAft>
+              <a:defRPr sz="1400">
+                <a:solidFill>
+                  <a:srgbClr val="34495E"/>
+                </a:solidFill>
+              </a:defRPr>
+            </a:pPr>
+            <a:r>
+              <a:t>• MarketCap totals $15462.6B with strong performance</a:t>
+            </a:r>
+          </a:p>
+          <a:p>
+            <a:pPr>
+              <a:spcAft>
+                <a:spcPts val="1200"/>
+              </a:spcAft>
+              <a:defRPr sz="1400">
+                <a:solidFill>
+                  <a:srgbClr val="34495E"/>
+                </a:solidFill>
+              </a:defRPr>
+            </a:pPr>
+            <a:r>
+              <a:t>• CurrentPrice shows $124.20 standard deviation</a:t>
+            </a:r>
+          </a:p>
+          <a:p>
+            <a:pPr>
+              <a:spcAft>
+                <a:spcPts val="1200"/>
+              </a:spcAft>
+              <a:defRPr sz="1400">
+                <a:solidFill>
+                  <a:srgbClr val="34495E"/>
+                </a:solidFill>
+              </a:defRPr>
+            </a:pPr>
+            <a:r>
+              <a:t>• Most common category: AAPL</a:t>
+            </a:r>
+          </a:p>
+          <a:p>
+            <a:pPr>
+              <a:spcAft>
+                <a:spcPts val="1200"/>
+              </a:spcAft>
+              <a:defRPr sz="1400">
+                <a:solidFill>
+                  <a:srgbClr val="34495E"/>
+                </a:solidFill>
+              </a:defRPr>
+            </a:pPr>
+            <a:r>
+              <a:t>• Data quality verified across all metrics</a:t>
             </a:r>
           </a:p>
         </p:txBody>
       </p:sp>
       <p:graphicFrame>
         <p:nvGraphicFramePr>
-          <p:cNvPr id="3" name="Chart 2"/>
+          <p:cNvPr id="4" name="Chart 3"/>
           <p:cNvGraphicFramePr>
             <a:graphicFrameLocks noGrp="1"/>
           </p:cNvGraphicFramePr>
           <p:nvPr/>
         </p:nvGraphicFramePr>
         <p:xfrm>
-          <a:off x="457200" y="1188720"/>
-          <a:ext cx="3931920" cy="4754880"/>
+          <a:off x="4754880" y="1188720"/>
+          <a:ext cx="3931920" cy="3200400"/>
         </p:xfrm>
         <a:graphic>
           <a:graphicData uri="http://schemas.openxmlformats.org/drawingml/2006/chart">
@@ -4997,71 +5276,6 @@
           </a:graphicData>
         </a:graphic>
       </p:graphicFrame>
-      <p:graphicFrame>
-        <p:nvGraphicFramePr>
-          <p:cNvPr id="4" name="Chart 3"/>
-          <p:cNvGraphicFramePr>
-            <a:graphicFrameLocks noGrp="1"/>
-          </p:cNvGraphicFramePr>
-          <p:nvPr/>
-        </p:nvGraphicFramePr>
-        <p:xfrm>
-          <a:off x="4754880" y="1188720"/>
-          <a:ext cx="3931920" cy="4754880"/>
-        </p:xfrm>
-        <a:graphic>
-          <a:graphicData uri="http://schemas.openxmlformats.org/drawingml/2006/chart">
-            <c:chart xmlns:c="http://schemas.openxmlformats.org/drawingml/2006/chart" r:id="rId3"/>
-          </a:graphicData>
-        </a:graphic>
-      </p:graphicFrame>
-      <p:sp>
-        <p:nvSpPr>
-          <p:cNvPr id="5" name="TextBox 4"/>
-          <p:cNvSpPr txBox="1"/>
-          <p:nvPr/>
-        </p:nvSpPr>
-        <p:spPr>
-          <a:xfrm>
-            <a:off x="457200" y="6035040"/>
-            <a:ext cx="8229600" cy="457200"/>
-          </a:xfrm>
-          <a:prstGeom prst="rect">
-            <a:avLst/>
-          </a:prstGeom>
-          <a:noFill/>
-        </p:spPr>
-        <p:txBody>
-          <a:bodyPr wrap="square">
-            <a:spAutoFit/>
-          </a:bodyPr>
-          <a:lstStyle/>
-          <a:p>
-            <a:pPr algn="ctr">
-              <a:defRPr sz="900">
-                <a:solidFill>
-                  <a:srgbClr val="505050"/>
-                </a:solidFill>
-              </a:defRPr>
-            </a:pPr>
-            <a:r>
-              <a:t>Color Key (Left Chart - MarketCap):</a:t>
-            </a:r>
-          </a:p>
-          <a:p>
-            <a:pPr algn="ctr">
-              <a:defRPr sz="900">
-                <a:solidFill>
-                  <a:srgbClr val="505050"/>
-                </a:solidFill>
-              </a:defRPr>
-            </a:pPr>
-            <a:r>
-              <a:t>🔵 Blue = AAPL (Apple)  |  🟢 Green = MSFT (Microsoft)  |  🟡 Gold = GOOGL (Alphabet)  |  🔴 Red = AMZN (Amazon)  |  🟣 Purple = TSLA (Tesla)</a:t>
-            </a:r>
-          </a:p>
-        </p:txBody>
-      </p:sp>
     </p:spTree>
   </p:cSld>
   <p:clrMapOvr>
@@ -5073,14 +5287,6 @@
 <file path=ppt/slides/slide5.xml><?xml version="1.0" encoding="utf-8"?>
 <p:sld xmlns:a="http://schemas.openxmlformats.org/drawingml/2006/main" xmlns:p="http://schemas.openxmlformats.org/presentationml/2006/main" xmlns:r="http://schemas.openxmlformats.org/officeDocument/2006/relationships">
   <p:cSld>
-    <p:bg>
-      <p:bgPr>
-        <a:solidFill>
-          <a:srgbClr val="FFFFFF"/>
-        </a:solidFill>
-        <a:effectLst/>
-      </p:bgPr>
-    </p:bg>
     <p:spTree>
       <p:nvGrpSpPr>
         <p:cNvPr id="1" name=""/>
@@ -5111,14 +5317,14 @@
           <a:lstStyle/>
           <a:p>
             <a:pPr>
-              <a:defRPr sz="3200" b="1">
+              <a:defRPr sz="3600" b="1">
                 <a:solidFill>
                   <a:srgbClr val="192A56"/>
                 </a:solidFill>
               </a:defRPr>
             </a:pPr>
             <a:r>
-              <a:t>🗂️ Sector Distribution Analysis</a:t>
+              <a:t>Sector Distribution</a:t>
             </a:r>
           </a:p>
         </p:txBody>
@@ -5132,8 +5338,8 @@
           <p:nvPr/>
         </p:nvGraphicFramePr>
         <p:xfrm>
-          <a:off x="1371600" y="1371600"/>
-          <a:ext cx="6400800" cy="3657600"/>
+          <a:off x="457200" y="1188720"/>
+          <a:ext cx="4114800" cy="3657600"/>
         </p:xfrm>
         <a:graphic>
           <a:graphicData uri="http://schemas.openxmlformats.org/drawingml/2006/chart">
@@ -5149,8 +5355,8 @@
         </p:nvSpPr>
         <p:spPr>
           <a:xfrm>
-            <a:off x="731520" y="5303520"/>
-            <a:ext cx="7680960" cy="914400"/>
+            <a:off x="5029200" y="1371600"/>
+            <a:ext cx="3657600" cy="365760"/>
           </a:xfrm>
           <a:prstGeom prst="rect">
             <a:avLst/>
@@ -5163,18 +5369,325 @@
           </a:bodyPr>
           <a:lstStyle/>
           <a:p>
-            <a:pPr algn="ctr">
-              <a:lnSpc>
-                <a:spcPct val="130000"/>
-              </a:lnSpc>
-              <a:defRPr sz="1400" i="1">
-                <a:solidFill>
-                  <a:srgbClr val="343A40"/>
-                </a:solidFill>
-              </a:defRPr>
-            </a:pPr>
-            <a:r>
-              <a:t>💡 Key Insight: Technology accounts for the largest portion at 40.0%.</a:t>
+            <a:pPr>
+              <a:defRPr sz="1600" b="1">
+                <a:solidFill>
+                  <a:srgbClr val="192A56"/>
+                </a:solidFill>
+              </a:defRPr>
+            </a:pPr>
+            <a:r>
+              <a:t>Distribution Summary</a:t>
+            </a:r>
+          </a:p>
+        </p:txBody>
+      </p:sp>
+      <p:sp>
+        <p:nvSpPr>
+          <p:cNvPr id="5" name="TextBox 4"/>
+          <p:cNvSpPr txBox="1"/>
+          <p:nvPr/>
+        </p:nvSpPr>
+        <p:spPr>
+          <a:xfrm>
+            <a:off x="5029200" y="1828800"/>
+            <a:ext cx="2286000" cy="274320"/>
+          </a:xfrm>
+          <a:prstGeom prst="rect">
+            <a:avLst/>
+          </a:prstGeom>
+          <a:noFill/>
+        </p:spPr>
+        <p:txBody>
+          <a:bodyPr wrap="none">
+            <a:spAutoFit/>
+          </a:bodyPr>
+          <a:lstStyle/>
+          <a:p>
+            <a:pPr>
+              <a:defRPr sz="1200"/>
+            </a:pPr>
+            <a:r>
+              <a:t>AAPL</a:t>
+            </a:r>
+          </a:p>
+        </p:txBody>
+      </p:sp>
+      <p:sp>
+        <p:nvSpPr>
+          <p:cNvPr id="6" name="TextBox 5"/>
+          <p:cNvSpPr txBox="1"/>
+          <p:nvPr/>
+        </p:nvSpPr>
+        <p:spPr>
+          <a:xfrm>
+            <a:off x="7498079" y="1828800"/>
+            <a:ext cx="914400" cy="274320"/>
+          </a:xfrm>
+          <a:prstGeom prst="rect">
+            <a:avLst/>
+          </a:prstGeom>
+          <a:noFill/>
+        </p:spPr>
+        <p:txBody>
+          <a:bodyPr wrap="none">
+            <a:spAutoFit/>
+          </a:bodyPr>
+          <a:lstStyle/>
+          <a:p>
+            <a:pPr algn="r">
+              <a:defRPr sz="1200" b="1"/>
+            </a:pPr>
+            <a:r>
+              <a:t>26.0%</a:t>
+            </a:r>
+          </a:p>
+        </p:txBody>
+      </p:sp>
+      <p:sp>
+        <p:nvSpPr>
+          <p:cNvPr id="7" name="TextBox 6"/>
+          <p:cNvSpPr txBox="1"/>
+          <p:nvPr/>
+        </p:nvSpPr>
+        <p:spPr>
+          <a:xfrm>
+            <a:off x="5029200" y="2194560"/>
+            <a:ext cx="2286000" cy="274320"/>
+          </a:xfrm>
+          <a:prstGeom prst="rect">
+            <a:avLst/>
+          </a:prstGeom>
+          <a:noFill/>
+        </p:spPr>
+        <p:txBody>
+          <a:bodyPr wrap="none">
+            <a:spAutoFit/>
+          </a:bodyPr>
+          <a:lstStyle/>
+          <a:p>
+            <a:pPr>
+              <a:defRPr sz="1200"/>
+            </a:pPr>
+            <a:r>
+              <a:t>MSFT</a:t>
+            </a:r>
+          </a:p>
+        </p:txBody>
+      </p:sp>
+      <p:sp>
+        <p:nvSpPr>
+          <p:cNvPr id="8" name="TextBox 7"/>
+          <p:cNvSpPr txBox="1"/>
+          <p:nvPr/>
+        </p:nvSpPr>
+        <p:spPr>
+          <a:xfrm>
+            <a:off x="7498079" y="2194560"/>
+            <a:ext cx="914400" cy="274320"/>
+          </a:xfrm>
+          <a:prstGeom prst="rect">
+            <a:avLst/>
+          </a:prstGeom>
+          <a:noFill/>
+        </p:spPr>
+        <p:txBody>
+          <a:bodyPr wrap="none">
+            <a:spAutoFit/>
+          </a:bodyPr>
+          <a:lstStyle/>
+          <a:p>
+            <a:pPr algn="r">
+              <a:defRPr sz="1200" b="1"/>
+            </a:pPr>
+            <a:r>
+              <a:t>25.3%</a:t>
+            </a:r>
+          </a:p>
+        </p:txBody>
+      </p:sp>
+      <p:sp>
+        <p:nvSpPr>
+          <p:cNvPr id="9" name="TextBox 8"/>
+          <p:cNvSpPr txBox="1"/>
+          <p:nvPr/>
+        </p:nvSpPr>
+        <p:spPr>
+          <a:xfrm>
+            <a:off x="5029200" y="2560320"/>
+            <a:ext cx="2286000" cy="274320"/>
+          </a:xfrm>
+          <a:prstGeom prst="rect">
+            <a:avLst/>
+          </a:prstGeom>
+          <a:noFill/>
+        </p:spPr>
+        <p:txBody>
+          <a:bodyPr wrap="none">
+            <a:spAutoFit/>
+          </a:bodyPr>
+          <a:lstStyle/>
+          <a:p>
+            <a:pPr>
+              <a:defRPr sz="1200"/>
+            </a:pPr>
+            <a:r>
+              <a:t>GOOGL</a:t>
+            </a:r>
+          </a:p>
+        </p:txBody>
+      </p:sp>
+      <p:sp>
+        <p:nvSpPr>
+          <p:cNvPr id="10" name="TextBox 9"/>
+          <p:cNvSpPr txBox="1"/>
+          <p:nvPr/>
+        </p:nvSpPr>
+        <p:spPr>
+          <a:xfrm>
+            <a:off x="7498079" y="2560320"/>
+            <a:ext cx="914400" cy="274320"/>
+          </a:xfrm>
+          <a:prstGeom prst="rect">
+            <a:avLst/>
+          </a:prstGeom>
+          <a:noFill/>
+        </p:spPr>
+        <p:txBody>
+          <a:bodyPr wrap="none">
+            <a:spAutoFit/>
+          </a:bodyPr>
+          <a:lstStyle/>
+          <a:p>
+            <a:pPr algn="r">
+              <a:defRPr sz="1200" b="1"/>
+            </a:pPr>
+            <a:r>
+              <a:t>22.0%</a:t>
+            </a:r>
+          </a:p>
+        </p:txBody>
+      </p:sp>
+      <p:sp>
+        <p:nvSpPr>
+          <p:cNvPr id="11" name="TextBox 10"/>
+          <p:cNvSpPr txBox="1"/>
+          <p:nvPr/>
+        </p:nvSpPr>
+        <p:spPr>
+          <a:xfrm>
+            <a:off x="5029200" y="2926079"/>
+            <a:ext cx="2286000" cy="274320"/>
+          </a:xfrm>
+          <a:prstGeom prst="rect">
+            <a:avLst/>
+          </a:prstGeom>
+          <a:noFill/>
+        </p:spPr>
+        <p:txBody>
+          <a:bodyPr wrap="none">
+            <a:spAutoFit/>
+          </a:bodyPr>
+          <a:lstStyle/>
+          <a:p>
+            <a:pPr>
+              <a:defRPr sz="1200"/>
+            </a:pPr>
+            <a:r>
+              <a:t>AMZN</a:t>
+            </a:r>
+          </a:p>
+        </p:txBody>
+      </p:sp>
+      <p:sp>
+        <p:nvSpPr>
+          <p:cNvPr id="12" name="TextBox 11"/>
+          <p:cNvSpPr txBox="1"/>
+          <p:nvPr/>
+        </p:nvSpPr>
+        <p:spPr>
+          <a:xfrm>
+            <a:off x="7498079" y="2926079"/>
+            <a:ext cx="914400" cy="274320"/>
+          </a:xfrm>
+          <a:prstGeom prst="rect">
+            <a:avLst/>
+          </a:prstGeom>
+          <a:noFill/>
+        </p:spPr>
+        <p:txBody>
+          <a:bodyPr wrap="none">
+            <a:spAutoFit/>
+          </a:bodyPr>
+          <a:lstStyle/>
+          <a:p>
+            <a:pPr algn="r">
+              <a:defRPr sz="1200" b="1"/>
+            </a:pPr>
+            <a:r>
+              <a:t>16.9%</a:t>
+            </a:r>
+          </a:p>
+        </p:txBody>
+      </p:sp>
+      <p:sp>
+        <p:nvSpPr>
+          <p:cNvPr id="13" name="TextBox 12"/>
+          <p:cNvSpPr txBox="1"/>
+          <p:nvPr/>
+        </p:nvSpPr>
+        <p:spPr>
+          <a:xfrm>
+            <a:off x="5029200" y="3291839"/>
+            <a:ext cx="2286000" cy="274320"/>
+          </a:xfrm>
+          <a:prstGeom prst="rect">
+            <a:avLst/>
+          </a:prstGeom>
+          <a:noFill/>
+        </p:spPr>
+        <p:txBody>
+          <a:bodyPr wrap="none">
+            <a:spAutoFit/>
+          </a:bodyPr>
+          <a:lstStyle/>
+          <a:p>
+            <a:pPr>
+              <a:defRPr sz="1200"/>
+            </a:pPr>
+            <a:r>
+              <a:t>TSLA</a:t>
+            </a:r>
+          </a:p>
+        </p:txBody>
+      </p:sp>
+      <p:sp>
+        <p:nvSpPr>
+          <p:cNvPr id="14" name="TextBox 13"/>
+          <p:cNvSpPr txBox="1"/>
+          <p:nvPr/>
+        </p:nvSpPr>
+        <p:spPr>
+          <a:xfrm>
+            <a:off x="7498079" y="3291839"/>
+            <a:ext cx="914400" cy="274320"/>
+          </a:xfrm>
+          <a:prstGeom prst="rect">
+            <a:avLst/>
+          </a:prstGeom>
+          <a:noFill/>
+        </p:spPr>
+        <p:txBody>
+          <a:bodyPr wrap="none">
+            <a:spAutoFit/>
+          </a:bodyPr>
+          <a:lstStyle/>
+          <a:p>
+            <a:pPr algn="r">
+              <a:defRPr sz="1200" b="1"/>
+            </a:pPr>
+            <a:r>
+              <a:t>9.8%</a:t>
             </a:r>
           </a:p>
         </p:txBody>
@@ -5190,14 +5703,6 @@
 <file path=ppt/slides/slide6.xml><?xml version="1.0" encoding="utf-8"?>
 <p:sld xmlns:a="http://schemas.openxmlformats.org/drawingml/2006/main" xmlns:p="http://schemas.openxmlformats.org/presentationml/2006/main" xmlns:r="http://schemas.openxmlformats.org/officeDocument/2006/relationships">
   <p:cSld>
-    <p:bg>
-      <p:bgPr>
-        <a:solidFill>
-          <a:srgbClr val="FFFFFF"/>
-        </a:solidFill>
-        <a:effectLst/>
-      </p:bgPr>
-    </p:bg>
     <p:spTree>
       <p:nvGrpSpPr>
         <p:cNvPr id="1" name=""/>
@@ -5228,470 +5733,63 @@
           <a:lstStyle/>
           <a:p>
             <a:pPr>
-              <a:defRPr sz="3200" b="1">
+              <a:defRPr sz="3600" b="1">
                 <a:solidFill>
                   <a:srgbClr val="192A56"/>
                 </a:solidFill>
               </a:defRPr>
             </a:pPr>
             <a:r>
-              <a:t>🏆 Top Performers - 1 Year Returns</a:t>
-            </a:r>
-          </a:p>
-        </p:txBody>
-      </p:sp>
-      <p:graphicFrame>
-        <p:nvGraphicFramePr>
-          <p:cNvPr id="3" name="Table 2"/>
-          <p:cNvGraphicFramePr>
-            <a:graphicFrameLocks noGrp="1"/>
-          </p:cNvGraphicFramePr>
-          <p:nvPr/>
-        </p:nvGraphicFramePr>
-        <p:xfrm>
-          <a:off x="1371600" y="1371600"/>
-          <a:ext cx="4846320" cy="3200400"/>
-        </p:xfrm>
-        <a:graphic>
-          <a:graphicData uri="http://schemas.openxmlformats.org/drawingml/2006/table">
-            <a:tbl>
-              <a:tblPr firstRow="1" bandRow="1">
-                <a:tableStyleId>{5C22544A-7EE6-4342-B048-85BDC9FD1C3A}</a:tableStyleId>
-              </a:tblPr>
-              <a:tblGrid>
-                <a:gridCol w="731520"/>
-                <a:gridCol w="2286000"/>
-                <a:gridCol w="1097280"/>
-                <a:gridCol w="731520"/>
-              </a:tblGrid>
-              <a:tr h="533400">
-                <a:tc>
-                  <a:txBody>
-                    <a:bodyPr/>
-                    <a:lstStyle/>
-                    <a:p>
-                      <a:pPr algn="ctr">
-                        <a:defRPr sz="1100" b="1">
-                          <a:solidFill>
-                            <a:srgbClr val="FFFFFF"/>
-                          </a:solidFill>
-                        </a:defRPr>
-                      </a:pPr>
-                      <a:r>
-                        <a:t>Ticker</a:t>
-                      </a:r>
-                    </a:p>
-                  </a:txBody>
-                  <a:tcPr>
-                    <a:solidFill>
-                      <a:srgbClr val="192A56"/>
-                    </a:solidFill>
-                  </a:tcPr>
-                </a:tc>
-                <a:tc>
-                  <a:txBody>
-                    <a:bodyPr/>
-                    <a:lstStyle/>
-                    <a:p>
-                      <a:pPr algn="ctr">
-                        <a:defRPr sz="1100" b="1">
-                          <a:solidFill>
-                            <a:srgbClr val="FFFFFF"/>
-                          </a:solidFill>
-                        </a:defRPr>
-                      </a:pPr>
-                      <a:r>
-                        <a:t>Company</a:t>
-                      </a:r>
-                    </a:p>
-                  </a:txBody>
-                  <a:tcPr>
-                    <a:solidFill>
-                      <a:srgbClr val="192A56"/>
-                    </a:solidFill>
-                  </a:tcPr>
-                </a:tc>
-                <a:tc>
-                  <a:txBody>
-                    <a:bodyPr/>
-                    <a:lstStyle/>
-                    <a:p>
-                      <a:pPr algn="ctr">
-                        <a:defRPr sz="1100" b="1">
-                          <a:solidFill>
-                            <a:srgbClr val="FFFFFF"/>
-                          </a:solidFill>
-                        </a:defRPr>
-                      </a:pPr>
-                      <a:r>
-                        <a:t>1Y Return %</a:t>
-                      </a:r>
-                    </a:p>
-                  </a:txBody>
-                  <a:tcPr>
-                    <a:solidFill>
-                      <a:srgbClr val="192A56"/>
-                    </a:solidFill>
-                  </a:tcPr>
-                </a:tc>
-                <a:tc>
-                  <a:txBody>
-                    <a:bodyPr/>
-                    <a:lstStyle/>
-                    <a:p>
-                      <a:pPr algn="ctr">
-                        <a:defRPr sz="1100" b="1">
-                          <a:solidFill>
-                            <a:srgbClr val="FFFFFF"/>
-                          </a:solidFill>
-                        </a:defRPr>
-                      </a:pPr>
-                      <a:r>
-                        <a:t>Status</a:t>
-                      </a:r>
-                    </a:p>
-                  </a:txBody>
-                  <a:tcPr>
-                    <a:solidFill>
-                      <a:srgbClr val="192A56"/>
-                    </a:solidFill>
-                  </a:tcPr>
-                </a:tc>
-              </a:tr>
-              <a:tr h="533400">
-                <a:tc>
-                  <a:txBody>
-                    <a:bodyPr/>
-                    <a:lstStyle/>
-                    <a:p>
-                      <a:pPr algn="ctr">
-                        <a:defRPr sz="1000" b="1"/>
-                      </a:pPr>
-                      <a:r>
-                        <a:t>TSLA</a:t>
-                      </a:r>
-                    </a:p>
-                  </a:txBody>
-                  <a:tcPr/>
-                </a:tc>
-                <a:tc>
-                  <a:txBody>
-                    <a:bodyPr/>
-                    <a:lstStyle/>
-                    <a:p>
-                      <a:pPr>
-                        <a:defRPr sz="1000"/>
-                      </a:pPr>
-                      <a:r>
-                        <a:t>Tesla, Inc.</a:t>
-                      </a:r>
-                    </a:p>
-                  </a:txBody>
-                  <a:tcPr/>
-                </a:tc>
-                <a:tc>
-                  <a:txBody>
-                    <a:bodyPr/>
-                    <a:lstStyle/>
-                    <a:p>
-                      <a:pPr algn="ctr">
-                        <a:defRPr sz="1000" b="1"/>
-                      </a:pPr>
-                      <a:r>
-                        <a:t>77.27%</a:t>
-                      </a:r>
-                    </a:p>
-                  </a:txBody>
-                  <a:tcPr/>
-                </a:tc>
-                <a:tc>
-                  <a:txBody>
-                    <a:bodyPr/>
-                    <a:lstStyle/>
-                    <a:p>
-                      <a:pPr algn="ctr">
-                        <a:defRPr sz="1400"/>
-                      </a:pPr>
-                      <a:r>
-                        <a:t>🟢</a:t>
-                      </a:r>
-                    </a:p>
-                  </a:txBody>
-                  <a:tcPr>
-                    <a:solidFill>
-                      <a:srgbClr val="C8E6C9"/>
-                    </a:solidFill>
-                  </a:tcPr>
-                </a:tc>
-              </a:tr>
-              <a:tr h="533400">
-                <a:tc>
-                  <a:txBody>
-                    <a:bodyPr/>
-                    <a:lstStyle/>
-                    <a:p>
-                      <a:pPr algn="ctr">
-                        <a:defRPr sz="1000" b="1"/>
-                      </a:pPr>
-                      <a:r>
-                        <a:t>GOOGL</a:t>
-                      </a:r>
-                    </a:p>
-                  </a:txBody>
-                  <a:tcPr/>
-                </a:tc>
-                <a:tc>
-                  <a:txBody>
-                    <a:bodyPr/>
-                    <a:lstStyle/>
-                    <a:p>
-                      <a:pPr>
-                        <a:defRPr sz="1000"/>
-                      </a:pPr>
-                      <a:r>
-                        <a:t>Alphabet Inc.</a:t>
-                      </a:r>
-                    </a:p>
-                  </a:txBody>
-                  <a:tcPr/>
-                </a:tc>
-                <a:tc>
-                  <a:txBody>
-                    <a:bodyPr/>
-                    <a:lstStyle/>
-                    <a:p>
-                      <a:pPr algn="ctr">
-                        <a:defRPr sz="1000" b="1"/>
-                      </a:pPr>
-                      <a:r>
-                        <a:t>61.18%</a:t>
-                      </a:r>
-                    </a:p>
-                  </a:txBody>
-                  <a:tcPr/>
-                </a:tc>
-                <a:tc>
-                  <a:txBody>
-                    <a:bodyPr/>
-                    <a:lstStyle/>
-                    <a:p>
-                      <a:pPr algn="ctr">
-                        <a:defRPr sz="1400"/>
-                      </a:pPr>
-                      <a:r>
-                        <a:t>🟢</a:t>
-                      </a:r>
-                    </a:p>
-                  </a:txBody>
-                  <a:tcPr>
-                    <a:solidFill>
-                      <a:srgbClr val="C8E6C9"/>
-                    </a:solidFill>
-                  </a:tcPr>
-                </a:tc>
-              </a:tr>
-              <a:tr h="533400">
-                <a:tc>
-                  <a:txBody>
-                    <a:bodyPr/>
-                    <a:lstStyle/>
-                    <a:p>
-                      <a:pPr algn="ctr">
-                        <a:defRPr sz="1000" b="1"/>
-                      </a:pPr>
-                      <a:r>
-                        <a:t>AMZN</a:t>
-                      </a:r>
-                    </a:p>
-                  </a:txBody>
-                  <a:tcPr/>
-                </a:tc>
-                <a:tc>
-                  <a:txBody>
-                    <a:bodyPr/>
-                    <a:lstStyle/>
-                    <a:p>
-                      <a:pPr>
-                        <a:defRPr sz="1000"/>
-                      </a:pPr>
-                      <a:r>
-                        <a:t>Amazon.com, Inc.</a:t>
-                      </a:r>
-                    </a:p>
-                  </a:txBody>
-                  <a:tcPr/>
-                </a:tc>
-                <a:tc>
-                  <a:txBody>
-                    <a:bodyPr/>
-                    <a:lstStyle/>
-                    <a:p>
-                      <a:pPr algn="ctr">
-                        <a:defRPr sz="1000" b="1"/>
-                      </a:pPr>
-                      <a:r>
-                        <a:t>26.72%</a:t>
-                      </a:r>
-                    </a:p>
-                  </a:txBody>
-                  <a:tcPr/>
-                </a:tc>
-                <a:tc>
-                  <a:txBody>
-                    <a:bodyPr/>
-                    <a:lstStyle/>
-                    <a:p>
-                      <a:pPr algn="ctr">
-                        <a:defRPr sz="1400"/>
-                      </a:pPr>
-                      <a:r>
-                        <a:t>🟡</a:t>
-                      </a:r>
-                    </a:p>
-                  </a:txBody>
-                  <a:tcPr>
-                    <a:solidFill>
-                      <a:srgbClr val="FFF9C4"/>
-                    </a:solidFill>
-                  </a:tcPr>
-                </a:tc>
-              </a:tr>
-              <a:tr h="533400">
-                <a:tc>
-                  <a:txBody>
-                    <a:bodyPr/>
-                    <a:lstStyle/>
-                    <a:p>
-                      <a:pPr algn="ctr">
-                        <a:defRPr sz="1000" b="1"/>
-                      </a:pPr>
-                      <a:r>
-                        <a:t>MSFT</a:t>
-                      </a:r>
-                    </a:p>
-                  </a:txBody>
-                  <a:tcPr/>
-                </a:tc>
-                <a:tc>
-                  <a:txBody>
-                    <a:bodyPr/>
-                    <a:lstStyle/>
-                    <a:p>
-                      <a:pPr>
-                        <a:defRPr sz="1000"/>
-                      </a:pPr>
-                      <a:r>
-                        <a:t>Microsoft Corporation</a:t>
-                      </a:r>
-                    </a:p>
-                  </a:txBody>
-                  <a:tcPr/>
-                </a:tc>
-                <a:tc>
-                  <a:txBody>
-                    <a:bodyPr/>
-                    <a:lstStyle/>
-                    <a:p>
-                      <a:pPr algn="ctr">
-                        <a:defRPr sz="1000" b="1"/>
-                      </a:pPr>
-                      <a:r>
-                        <a:t>19.72%</a:t>
-                      </a:r>
-                    </a:p>
-                  </a:txBody>
-                  <a:tcPr/>
-                </a:tc>
-                <a:tc>
-                  <a:txBody>
-                    <a:bodyPr/>
-                    <a:lstStyle/>
-                    <a:p>
-                      <a:pPr algn="ctr">
-                        <a:defRPr sz="1400"/>
-                      </a:pPr>
-                      <a:r>
-                        <a:t>🟠</a:t>
-                      </a:r>
-                    </a:p>
-                  </a:txBody>
-                  <a:tcPr>
-                    <a:solidFill>
-                      <a:srgbClr val="FFE0B2"/>
-                    </a:solidFill>
-                  </a:tcPr>
-                </a:tc>
-              </a:tr>
-              <a:tr h="533400">
-                <a:tc>
-                  <a:txBody>
-                    <a:bodyPr/>
-                    <a:lstStyle/>
-                    <a:p>
-                      <a:pPr algn="ctr">
-                        <a:defRPr sz="1000" b="1"/>
-                      </a:pPr>
-                      <a:r>
-                        <a:t>AAPL</a:t>
-                      </a:r>
-                    </a:p>
-                  </a:txBody>
-                  <a:tcPr/>
-                </a:tc>
-                <a:tc>
-                  <a:txBody>
-                    <a:bodyPr/>
-                    <a:lstStyle/>
-                    <a:p>
-                      <a:pPr>
-                        <a:defRPr sz="1000"/>
-                      </a:pPr>
-                      <a:r>
-                        <a:t>Apple Inc.</a:t>
-                      </a:r>
-                    </a:p>
-                  </a:txBody>
-                  <a:tcPr/>
-                </a:tc>
-                <a:tc>
-                  <a:txBody>
-                    <a:bodyPr/>
-                    <a:lstStyle/>
-                    <a:p>
-                      <a:pPr algn="ctr">
-                        <a:defRPr sz="1000" b="1"/>
-                      </a:pPr>
-                      <a:r>
-                        <a:t>17.50%</a:t>
-                      </a:r>
-                    </a:p>
-                  </a:txBody>
-                  <a:tcPr/>
-                </a:tc>
-                <a:tc>
-                  <a:txBody>
-                    <a:bodyPr/>
-                    <a:lstStyle/>
-                    <a:p>
-                      <a:pPr algn="ctr">
-                        <a:defRPr sz="1400"/>
-                      </a:pPr>
-                      <a:r>
-                        <a:t>🟠</a:t>
-                      </a:r>
-                    </a:p>
-                  </a:txBody>
-                  <a:tcPr>
-                    <a:solidFill>
-                      <a:srgbClr val="FFE0B2"/>
-                    </a:solidFill>
-                  </a:tcPr>
-                </a:tc>
-              </a:tr>
-            </a:tbl>
-          </a:graphicData>
-        </a:graphic>
-      </p:graphicFrame>
+              <a:t>Key Data Insights</a:t>
+            </a:r>
+          </a:p>
+        </p:txBody>
+      </p:sp>
+      <p:sp>
+        <p:nvSpPr>
+          <p:cNvPr id="3" name="Rectangle 2"/>
+          <p:cNvSpPr/>
+          <p:nvPr/>
+        </p:nvSpPr>
+        <p:spPr>
+          <a:xfrm>
+            <a:off x="457200" y="1188720"/>
+            <a:ext cx="8229600" cy="1097280"/>
+          </a:xfrm>
+          <a:prstGeom prst="rect">
+            <a:avLst/>
+          </a:prstGeom>
+          <a:solidFill>
+            <a:srgbClr val="ECF0F1"/>
+          </a:solidFill>
+          <a:ln w="25400">
+            <a:solidFill>
+              <a:srgbClr val="2980B9"/>
+            </a:solidFill>
+          </a:ln>
+        </p:spPr>
+        <p:style>
+          <a:lnRef idx="1">
+            <a:schemeClr val="accent1"/>
+          </a:lnRef>
+          <a:fillRef idx="3">
+            <a:schemeClr val="accent1"/>
+          </a:fillRef>
+          <a:effectRef idx="2">
+            <a:schemeClr val="accent1"/>
+          </a:effectRef>
+          <a:fontRef idx="minor">
+            <a:schemeClr val="lt1"/>
+          </a:fontRef>
+        </p:style>
+        <p:txBody>
+          <a:bodyPr rtlCol="0" anchor="ctr"/>
+          <a:lstStyle/>
+          <a:p>
+            <a:pPr algn="ctr"/>
+          </a:p>
+        </p:txBody>
+      </p:sp>
       <p:sp>
         <p:nvSpPr>
           <p:cNvPr id="4" name="TextBox 3"/>
@@ -5700,8 +5798,8 @@
         </p:nvSpPr>
         <p:spPr>
           <a:xfrm>
-            <a:off x="1371600" y="4663440"/>
-            <a:ext cx="6400800" cy="365760"/>
+            <a:off x="640080" y="1325880"/>
+            <a:ext cx="7863840" cy="274320"/>
           </a:xfrm>
           <a:prstGeom prst="rect">
             <a:avLst/>
@@ -5715,14 +5813,14 @@
           <a:lstStyle/>
           <a:p>
             <a:pPr>
-              <a:defRPr sz="900">
-                <a:solidFill>
-                  <a:srgbClr val="646464"/>
-                </a:solidFill>
-              </a:defRPr>
-            </a:pPr>
-            <a:r>
-              <a:t>Legend: 🟢 Strong (&gt;50%)  🟡 Good (20-50%)  🟠 Moderate (0-20%)  🔴 Negative (&lt;0%)</a:t>
+              <a:defRPr sz="1600" b="1">
+                <a:solidFill>
+                  <a:srgbClr val="192A56"/>
+                </a:solidFill>
+              </a:defRPr>
+            </a:pPr>
+            <a:r>
+              <a:t>Strong MarketCap Performance</a:t>
             </a:r>
           </a:p>
         </p:txBody>
@@ -5735,8 +5833,88 @@
         </p:nvSpPr>
         <p:spPr>
           <a:xfrm>
-            <a:off x="731520" y="5029200"/>
-            <a:ext cx="7680960" cy="914400"/>
+            <a:off x="640080" y="1691640"/>
+            <a:ext cx="7863840" cy="457200"/>
+          </a:xfrm>
+          <a:prstGeom prst="rect">
+            <a:avLst/>
+          </a:prstGeom>
+          <a:noFill/>
+        </p:spPr>
+        <p:txBody>
+          <a:bodyPr wrap="square">
+            <a:spAutoFit/>
+          </a:bodyPr>
+          <a:lstStyle/>
+          <a:p>
+            <a:pPr>
+              <a:defRPr sz="1300">
+                <a:solidFill>
+                  <a:srgbClr val="34495E"/>
+                </a:solidFill>
+              </a:defRPr>
+            </a:pPr>
+            <a:r>
+              <a:t>Total MarketCap of $15462.6B with average of $3092.5B per record, demonstrating solid execution.</a:t>
+            </a:r>
+          </a:p>
+        </p:txBody>
+      </p:sp>
+      <p:sp>
+        <p:nvSpPr>
+          <p:cNvPr id="6" name="Rectangle 5"/>
+          <p:cNvSpPr/>
+          <p:nvPr/>
+        </p:nvSpPr>
+        <p:spPr>
+          <a:xfrm>
+            <a:off x="457200" y="2468880"/>
+            <a:ext cx="8229600" cy="1097280"/>
+          </a:xfrm>
+          <a:prstGeom prst="rect">
+            <a:avLst/>
+          </a:prstGeom>
+          <a:solidFill>
+            <a:srgbClr val="ECF0F1"/>
+          </a:solidFill>
+          <a:ln w="25400">
+            <a:solidFill>
+              <a:srgbClr val="2980B9"/>
+            </a:solidFill>
+          </a:ln>
+        </p:spPr>
+        <p:style>
+          <a:lnRef idx="1">
+            <a:schemeClr val="accent1"/>
+          </a:lnRef>
+          <a:fillRef idx="3">
+            <a:schemeClr val="accent1"/>
+          </a:fillRef>
+          <a:effectRef idx="2">
+            <a:schemeClr val="accent1"/>
+          </a:effectRef>
+          <a:fontRef idx="minor">
+            <a:schemeClr val="lt1"/>
+          </a:fontRef>
+        </p:style>
+        <p:txBody>
+          <a:bodyPr rtlCol="0" anchor="ctr"/>
+          <a:lstStyle/>
+          <a:p>
+            <a:pPr algn="ctr"/>
+          </a:p>
+        </p:txBody>
+      </p:sp>
+      <p:sp>
+        <p:nvSpPr>
+          <p:cNvPr id="7" name="TextBox 6"/>
+          <p:cNvSpPr txBox="1"/>
+          <p:nvPr/>
+        </p:nvSpPr>
+        <p:spPr>
+          <a:xfrm>
+            <a:off x="640080" y="2606040"/>
+            <a:ext cx="7863840" cy="274320"/>
           </a:xfrm>
           <a:prstGeom prst="rect">
             <a:avLst/>
@@ -5749,18 +5927,165 @@
           </a:bodyPr>
           <a:lstStyle/>
           <a:p>
-            <a:pPr algn="ctr">
-              <a:lnSpc>
-                <a:spcPct val="130000"/>
-              </a:lnSpc>
-              <a:defRPr sz="1400" i="1">
-                <a:solidFill>
-                  <a:srgbClr val="343A40"/>
-                </a:solidFill>
-              </a:defRPr>
-            </a:pPr>
-            <a:r>
-              <a:t>💡 TSLA (Tesla, Inc.) leads the portfolio with an impressive 77.27% annual return, demonstrating exceptional market performance and strong investor confidence.</a:t>
+            <a:pPr>
+              <a:defRPr sz="1600" b="1">
+                <a:solidFill>
+                  <a:srgbClr val="192A56"/>
+                </a:solidFill>
+              </a:defRPr>
+            </a:pPr>
+            <a:r>
+              <a:t>CurrentPrice Consistency Analysis</a:t>
+            </a:r>
+          </a:p>
+        </p:txBody>
+      </p:sp>
+      <p:sp>
+        <p:nvSpPr>
+          <p:cNvPr id="8" name="TextBox 7"/>
+          <p:cNvSpPr txBox="1"/>
+          <p:nvPr/>
+        </p:nvSpPr>
+        <p:spPr>
+          <a:xfrm>
+            <a:off x="640080" y="2971800"/>
+            <a:ext cx="7863840" cy="457200"/>
+          </a:xfrm>
+          <a:prstGeom prst="rect">
+            <a:avLst/>
+          </a:prstGeom>
+          <a:noFill/>
+        </p:spPr>
+        <p:txBody>
+          <a:bodyPr wrap="square">
+            <a:spAutoFit/>
+          </a:bodyPr>
+          <a:lstStyle/>
+          <a:p>
+            <a:pPr>
+              <a:defRPr sz="1300">
+                <a:solidFill>
+                  <a:srgbClr val="34495E"/>
+                </a:solidFill>
+              </a:defRPr>
+            </a:pPr>
+            <a:r>
+              <a:t>Standard deviation of $124.20 indicates moderate variability in performance.</a:t>
+            </a:r>
+          </a:p>
+        </p:txBody>
+      </p:sp>
+      <p:sp>
+        <p:nvSpPr>
+          <p:cNvPr id="9" name="Rectangle 8"/>
+          <p:cNvSpPr/>
+          <p:nvPr/>
+        </p:nvSpPr>
+        <p:spPr>
+          <a:xfrm>
+            <a:off x="457200" y="3749039"/>
+            <a:ext cx="8229600" cy="1097280"/>
+          </a:xfrm>
+          <a:prstGeom prst="rect">
+            <a:avLst/>
+          </a:prstGeom>
+          <a:solidFill>
+            <a:srgbClr val="ECF0F1"/>
+          </a:solidFill>
+          <a:ln w="25400">
+            <a:solidFill>
+              <a:srgbClr val="2980B9"/>
+            </a:solidFill>
+          </a:ln>
+        </p:spPr>
+        <p:style>
+          <a:lnRef idx="1">
+            <a:schemeClr val="accent1"/>
+          </a:lnRef>
+          <a:fillRef idx="3">
+            <a:schemeClr val="accent1"/>
+          </a:fillRef>
+          <a:effectRef idx="2">
+            <a:schemeClr val="accent1"/>
+          </a:effectRef>
+          <a:fontRef idx="minor">
+            <a:schemeClr val="lt1"/>
+          </a:fontRef>
+        </p:style>
+        <p:txBody>
+          <a:bodyPr rtlCol="0" anchor="ctr"/>
+          <a:lstStyle/>
+          <a:p>
+            <a:pPr algn="ctr"/>
+          </a:p>
+        </p:txBody>
+      </p:sp>
+      <p:sp>
+        <p:nvSpPr>
+          <p:cNvPr id="10" name="TextBox 9"/>
+          <p:cNvSpPr txBox="1"/>
+          <p:nvPr/>
+        </p:nvSpPr>
+        <p:spPr>
+          <a:xfrm>
+            <a:off x="640080" y="3886200"/>
+            <a:ext cx="7863840" cy="274320"/>
+          </a:xfrm>
+          <a:prstGeom prst="rect">
+            <a:avLst/>
+          </a:prstGeom>
+          <a:noFill/>
+        </p:spPr>
+        <p:txBody>
+          <a:bodyPr wrap="none">
+            <a:spAutoFit/>
+          </a:bodyPr>
+          <a:lstStyle/>
+          <a:p>
+            <a:pPr>
+              <a:defRPr sz="1600" b="1">
+                <a:solidFill>
+                  <a:srgbClr val="192A56"/>
+                </a:solidFill>
+              </a:defRPr>
+            </a:pPr>
+            <a:r>
+              <a:t>Category Diversity</a:t>
+            </a:r>
+          </a:p>
+        </p:txBody>
+      </p:sp>
+      <p:sp>
+        <p:nvSpPr>
+          <p:cNvPr id="11" name="TextBox 10"/>
+          <p:cNvSpPr txBox="1"/>
+          <p:nvPr/>
+        </p:nvSpPr>
+        <p:spPr>
+          <a:xfrm>
+            <a:off x="640080" y="4251959"/>
+            <a:ext cx="7863840" cy="457200"/>
+          </a:xfrm>
+          <a:prstGeom prst="rect">
+            <a:avLst/>
+          </a:prstGeom>
+          <a:noFill/>
+        </p:spPr>
+        <p:txBody>
+          <a:bodyPr wrap="square">
+            <a:spAutoFit/>
+          </a:bodyPr>
+          <a:lstStyle/>
+          <a:p>
+            <a:pPr>
+              <a:defRPr sz="1300">
+                <a:solidFill>
+                  <a:srgbClr val="34495E"/>
+                </a:solidFill>
+              </a:defRPr>
+            </a:pPr>
+            <a:r>
+              <a:t>Analysis spans 5 distinct categories in Ticker, providing comprehensive market coverage and insights.</a:t>
             </a:r>
           </a:p>
         </p:txBody>
@@ -5785,20 +6110,20 @@
       <p:grpSpPr/>
       <p:sp>
         <p:nvSpPr>
-          <p:cNvPr id="2" name="Rectangle 1"/>
+          <p:cNvPr id="18" name="Rectangle 17"/>
           <p:cNvSpPr/>
           <p:nvPr/>
         </p:nvSpPr>
         <p:spPr>
           <a:xfrm>
-            <a:off x="0" y="0"/>
-            <a:ext cx="9144000" cy="1371600"/>
+            <a:off x="640080" y="2377440"/>
+            <a:ext cx="548640" cy="320040"/>
           </a:xfrm>
           <a:prstGeom prst="rect">
             <a:avLst/>
           </a:prstGeom>
           <a:solidFill>
-            <a:srgbClr val="E53935"/>
+            <a:srgbClr val="ECF0F1"/>
           </a:solidFill>
           <a:ln>
             <a:noFill/>
@@ -5828,20 +6153,20 @@
       </p:sp>
       <p:sp>
         <p:nvSpPr>
-          <p:cNvPr id="3" name="Rectangle 2"/>
+          <p:cNvPr id="13" name="Rectangle 12"/>
           <p:cNvSpPr/>
           <p:nvPr/>
         </p:nvSpPr>
         <p:spPr>
           <a:xfrm>
-            <a:off x="0" y="5486400"/>
-            <a:ext cx="9144000" cy="1371600"/>
+            <a:off x="640080" y="2011680"/>
+            <a:ext cx="548640" cy="320040"/>
           </a:xfrm>
           <a:prstGeom prst="rect">
             <a:avLst/>
           </a:prstGeom>
           <a:solidFill>
-            <a:srgbClr val="C62828"/>
+            <a:srgbClr val="ECF0F1"/>
           </a:solidFill>
           <a:ln>
             <a:noFill/>
@@ -5871,14 +6196,127 @@
       </p:sp>
       <p:sp>
         <p:nvSpPr>
+          <p:cNvPr id="8" name="Rectangle 7"/>
+          <p:cNvSpPr/>
+          <p:nvPr/>
+        </p:nvSpPr>
+        <p:spPr>
+          <a:xfrm>
+            <a:off x="640080" y="1645920"/>
+            <a:ext cx="548640" cy="320040"/>
+          </a:xfrm>
+          <a:prstGeom prst="rect">
+            <a:avLst/>
+          </a:prstGeom>
+          <a:solidFill>
+            <a:srgbClr val="F1C40F"/>
+          </a:solidFill>
+          <a:ln>
+            <a:noFill/>
+          </a:ln>
+        </p:spPr>
+        <p:style>
+          <a:lnRef idx="1">
+            <a:schemeClr val="accent1"/>
+          </a:lnRef>
+          <a:fillRef idx="3">
+            <a:schemeClr val="accent1"/>
+          </a:fillRef>
+          <a:effectRef idx="2">
+            <a:schemeClr val="accent1"/>
+          </a:effectRef>
+          <a:fontRef idx="minor">
+            <a:schemeClr val="lt1"/>
+          </a:fontRef>
+        </p:style>
+        <p:txBody>
+          <a:bodyPr rtlCol="0" anchor="ctr"/>
+          <a:lstStyle/>
+          <a:p>
+            <a:pPr algn="ctr"/>
+          </a:p>
+        </p:txBody>
+      </p:sp>
+      <p:sp>
+        <p:nvSpPr>
+          <p:cNvPr id="2" name="TextBox 1"/>
+          <p:cNvSpPr txBox="1"/>
+          <p:nvPr/>
+        </p:nvSpPr>
+        <p:spPr>
+          <a:xfrm>
+            <a:off x="457200" y="365760"/>
+            <a:ext cx="8229600" cy="548640"/>
+          </a:xfrm>
+          <a:prstGeom prst="rect">
+            <a:avLst/>
+          </a:prstGeom>
+          <a:noFill/>
+        </p:spPr>
+        <p:txBody>
+          <a:bodyPr wrap="none">
+            <a:spAutoFit/>
+          </a:bodyPr>
+          <a:lstStyle/>
+          <a:p>
+            <a:pPr>
+              <a:defRPr sz="3600" b="1">
+                <a:solidFill>
+                  <a:srgbClr val="192A56"/>
+                </a:solidFill>
+              </a:defRPr>
+            </a:pPr>
+            <a:r>
+              <a:t>Top Performers</a:t>
+            </a:r>
+          </a:p>
+        </p:txBody>
+      </p:sp>
+      <p:sp>
+        <p:nvSpPr>
+          <p:cNvPr id="3" name="TextBox 2"/>
+          <p:cNvSpPr txBox="1"/>
+          <p:nvPr/>
+        </p:nvSpPr>
+        <p:spPr>
+          <a:xfrm>
+            <a:off x="640080" y="1188720"/>
+            <a:ext cx="548640" cy="365760"/>
+          </a:xfrm>
+          <a:prstGeom prst="rect">
+            <a:avLst/>
+          </a:prstGeom>
+          <a:noFill/>
+        </p:spPr>
+        <p:txBody>
+          <a:bodyPr wrap="none">
+            <a:spAutoFit/>
+          </a:bodyPr>
+          <a:lstStyle/>
+          <a:p>
+            <a:pPr>
+              <a:defRPr sz="1400" b="1">
+                <a:solidFill>
+                  <a:srgbClr val="192A56"/>
+                </a:solidFill>
+              </a:defRPr>
+            </a:pPr>
+            <a:r>
+              <a:t>Rank</a:t>
+            </a:r>
+          </a:p>
+        </p:txBody>
+      </p:sp>
+      <p:sp>
+        <p:nvSpPr>
           <p:cNvPr id="4" name="TextBox 3"/>
           <p:cNvSpPr txBox="1"/>
           <p:nvPr/>
         </p:nvSpPr>
         <p:spPr>
           <a:xfrm>
-            <a:off x="457200" y="2560320"/>
-            <a:ext cx="8229600" cy="1097280"/>
+            <a:off x="1371600" y="1188720"/>
+            <a:ext cx="3200400" cy="365760"/>
           </a:xfrm>
           <a:prstGeom prst="rect">
             <a:avLst/>
@@ -5891,15 +6329,1429 @@
           </a:bodyPr>
           <a:lstStyle/>
           <a:p>
+            <a:pPr>
+              <a:defRPr sz="1400" b="1">
+                <a:solidFill>
+                  <a:srgbClr val="192A56"/>
+                </a:solidFill>
+              </a:defRPr>
+            </a:pPr>
+            <a:r>
+              <a:t>Name</a:t>
+            </a:r>
+          </a:p>
+        </p:txBody>
+      </p:sp>
+      <p:sp>
+        <p:nvSpPr>
+          <p:cNvPr id="5" name="TextBox 4"/>
+          <p:cNvSpPr txBox="1"/>
+          <p:nvPr/>
+        </p:nvSpPr>
+        <p:spPr>
+          <a:xfrm>
+            <a:off x="4754880" y="1188720"/>
+            <a:ext cx="1828800" cy="365760"/>
+          </a:xfrm>
+          <a:prstGeom prst="rect">
+            <a:avLst/>
+          </a:prstGeom>
+          <a:noFill/>
+        </p:spPr>
+        <p:txBody>
+          <a:bodyPr wrap="none">
+            <a:spAutoFit/>
+          </a:bodyPr>
+          <a:lstStyle/>
+          <a:p>
+            <a:pPr>
+              <a:defRPr sz="1400" b="1">
+                <a:solidFill>
+                  <a:srgbClr val="192A56"/>
+                </a:solidFill>
+              </a:defRPr>
+            </a:pPr>
+            <a:r>
+              <a:t>Value</a:t>
+            </a:r>
+          </a:p>
+        </p:txBody>
+      </p:sp>
+      <p:sp>
+        <p:nvSpPr>
+          <p:cNvPr id="6" name="TextBox 5"/>
+          <p:cNvSpPr txBox="1"/>
+          <p:nvPr/>
+        </p:nvSpPr>
+        <p:spPr>
+          <a:xfrm>
+            <a:off x="6766560" y="1188720"/>
+            <a:ext cx="1645920" cy="365760"/>
+          </a:xfrm>
+          <a:prstGeom prst="rect">
+            <a:avLst/>
+          </a:prstGeom>
+          <a:noFill/>
+        </p:spPr>
+        <p:txBody>
+          <a:bodyPr wrap="none">
+            <a:spAutoFit/>
+          </a:bodyPr>
+          <a:lstStyle/>
+          <a:p>
+            <a:pPr>
+              <a:defRPr sz="1400" b="1">
+                <a:solidFill>
+                  <a:srgbClr val="192A56"/>
+                </a:solidFill>
+              </a:defRPr>
+            </a:pPr>
+            <a:r>
+              <a:t>Status</a:t>
+            </a:r>
+          </a:p>
+        </p:txBody>
+      </p:sp>
+      <p:sp>
+        <p:nvSpPr>
+          <p:cNvPr id="7" name="TextBox 6"/>
+          <p:cNvSpPr txBox="1"/>
+          <p:nvPr/>
+        </p:nvSpPr>
+        <p:spPr>
+          <a:xfrm>
+            <a:off x="640080" y="1645920"/>
+            <a:ext cx="548640" cy="320040"/>
+          </a:xfrm>
+          <a:prstGeom prst="rect">
+            <a:avLst/>
+          </a:prstGeom>
+          <a:noFill/>
+        </p:spPr>
+        <p:txBody>
+          <a:bodyPr wrap="none">
+            <a:spAutoFit/>
+          </a:bodyPr>
+          <a:lstStyle/>
+          <a:p>
             <a:pPr algn="ctr">
-              <a:defRPr sz="5400" b="1">
-                <a:solidFill>
-                  <a:srgbClr val="C62828"/>
-                </a:solidFill>
-              </a:defRPr>
-            </a:pPr>
-            <a:r>
-              <a:t>Thank You</a:t>
+              <a:defRPr sz="1600" b="1"/>
+            </a:pPr>
+            <a:r>
+              <a:t>1</a:t>
+            </a:r>
+          </a:p>
+        </p:txBody>
+      </p:sp>
+      <p:sp>
+        <p:nvSpPr>
+          <p:cNvPr id="9" name="TextBox 8"/>
+          <p:cNvSpPr txBox="1"/>
+          <p:nvPr/>
+        </p:nvSpPr>
+        <p:spPr>
+          <a:xfrm>
+            <a:off x="1371600" y="1645920"/>
+            <a:ext cx="3200400" cy="320040"/>
+          </a:xfrm>
+          <a:prstGeom prst="rect">
+            <a:avLst/>
+          </a:prstGeom>
+          <a:noFill/>
+        </p:spPr>
+        <p:txBody>
+          <a:bodyPr wrap="none">
+            <a:spAutoFit/>
+          </a:bodyPr>
+          <a:lstStyle/>
+          <a:p>
+            <a:pPr>
+              <a:defRPr sz="1300"/>
+            </a:pPr>
+            <a:r>
+              <a:t>AAPL</a:t>
+            </a:r>
+          </a:p>
+        </p:txBody>
+      </p:sp>
+      <p:sp>
+        <p:nvSpPr>
+          <p:cNvPr id="10" name="TextBox 9"/>
+          <p:cNvSpPr txBox="1"/>
+          <p:nvPr/>
+        </p:nvSpPr>
+        <p:spPr>
+          <a:xfrm>
+            <a:off x="4754880" y="1645920"/>
+            <a:ext cx="1828800" cy="320040"/>
+          </a:xfrm>
+          <a:prstGeom prst="rect">
+            <a:avLst/>
+          </a:prstGeom>
+          <a:noFill/>
+        </p:spPr>
+        <p:txBody>
+          <a:bodyPr wrap="none">
+            <a:spAutoFit/>
+          </a:bodyPr>
+          <a:lstStyle/>
+          <a:p>
+            <a:pPr algn="r">
+              <a:defRPr sz="1300" b="1"/>
+            </a:pPr>
+            <a:r>
+              <a:t>$4027.7B</a:t>
+            </a:r>
+          </a:p>
+        </p:txBody>
+      </p:sp>
+      <p:sp>
+        <p:nvSpPr>
+          <p:cNvPr id="11" name="TextBox 10"/>
+          <p:cNvSpPr txBox="1"/>
+          <p:nvPr/>
+        </p:nvSpPr>
+        <p:spPr>
+          <a:xfrm>
+            <a:off x="6766560" y="1645920"/>
+            <a:ext cx="1645920" cy="320040"/>
+          </a:xfrm>
+          <a:prstGeom prst="rect">
+            <a:avLst/>
+          </a:prstGeom>
+          <a:noFill/>
+        </p:spPr>
+        <p:txBody>
+          <a:bodyPr wrap="none">
+            <a:spAutoFit/>
+          </a:bodyPr>
+          <a:lstStyle/>
+          <a:p>
+            <a:pPr>
+              <a:defRPr sz="1200">
+                <a:solidFill>
+                  <a:srgbClr val="27AE60"/>
+                </a:solidFill>
+              </a:defRPr>
+            </a:pPr>
+            <a:r>
+              <a:t>✓ Excellent</a:t>
+            </a:r>
+          </a:p>
+        </p:txBody>
+      </p:sp>
+      <p:sp>
+        <p:nvSpPr>
+          <p:cNvPr id="12" name="TextBox 11"/>
+          <p:cNvSpPr txBox="1"/>
+          <p:nvPr/>
+        </p:nvSpPr>
+        <p:spPr>
+          <a:xfrm>
+            <a:off x="640080" y="2011680"/>
+            <a:ext cx="548640" cy="320040"/>
+          </a:xfrm>
+          <a:prstGeom prst="rect">
+            <a:avLst/>
+          </a:prstGeom>
+          <a:noFill/>
+        </p:spPr>
+        <p:txBody>
+          <a:bodyPr wrap="none">
+            <a:spAutoFit/>
+          </a:bodyPr>
+          <a:lstStyle/>
+          <a:p>
+            <a:pPr algn="ctr">
+              <a:defRPr sz="1600" b="1"/>
+            </a:pPr>
+            <a:r>
+              <a:t>2</a:t>
+            </a:r>
+          </a:p>
+        </p:txBody>
+      </p:sp>
+      <p:sp>
+        <p:nvSpPr>
+          <p:cNvPr id="14" name="TextBox 13"/>
+          <p:cNvSpPr txBox="1"/>
+          <p:nvPr/>
+        </p:nvSpPr>
+        <p:spPr>
+          <a:xfrm>
+            <a:off x="1371600" y="2011680"/>
+            <a:ext cx="3200400" cy="320040"/>
+          </a:xfrm>
+          <a:prstGeom prst="rect">
+            <a:avLst/>
+          </a:prstGeom>
+          <a:noFill/>
+        </p:spPr>
+        <p:txBody>
+          <a:bodyPr wrap="none">
+            <a:spAutoFit/>
+          </a:bodyPr>
+          <a:lstStyle/>
+          <a:p>
+            <a:pPr>
+              <a:defRPr sz="1300"/>
+            </a:pPr>
+            <a:r>
+              <a:t>MSFT</a:t>
+            </a:r>
+          </a:p>
+        </p:txBody>
+      </p:sp>
+      <p:sp>
+        <p:nvSpPr>
+          <p:cNvPr id="15" name="TextBox 14"/>
+          <p:cNvSpPr txBox="1"/>
+          <p:nvPr/>
+        </p:nvSpPr>
+        <p:spPr>
+          <a:xfrm>
+            <a:off x="4754880" y="2011680"/>
+            <a:ext cx="1828800" cy="320040"/>
+          </a:xfrm>
+          <a:prstGeom prst="rect">
+            <a:avLst/>
+          </a:prstGeom>
+          <a:noFill/>
+        </p:spPr>
+        <p:txBody>
+          <a:bodyPr wrap="none">
+            <a:spAutoFit/>
+          </a:bodyPr>
+          <a:lstStyle/>
+          <a:p>
+            <a:pPr algn="r">
+              <a:defRPr sz="1300" b="1"/>
+            </a:pPr>
+            <a:r>
+              <a:t>$3907.6B</a:t>
+            </a:r>
+          </a:p>
+        </p:txBody>
+      </p:sp>
+      <p:sp>
+        <p:nvSpPr>
+          <p:cNvPr id="16" name="TextBox 15"/>
+          <p:cNvSpPr txBox="1"/>
+          <p:nvPr/>
+        </p:nvSpPr>
+        <p:spPr>
+          <a:xfrm>
+            <a:off x="6766560" y="2011680"/>
+            <a:ext cx="1645920" cy="320040"/>
+          </a:xfrm>
+          <a:prstGeom prst="rect">
+            <a:avLst/>
+          </a:prstGeom>
+          <a:noFill/>
+        </p:spPr>
+        <p:txBody>
+          <a:bodyPr wrap="none">
+            <a:spAutoFit/>
+          </a:bodyPr>
+          <a:lstStyle/>
+          <a:p>
+            <a:pPr>
+              <a:defRPr sz="1200">
+                <a:solidFill>
+                  <a:srgbClr val="27AE60"/>
+                </a:solidFill>
+              </a:defRPr>
+            </a:pPr>
+            <a:r>
+              <a:t>✓ Excellent</a:t>
+            </a:r>
+          </a:p>
+        </p:txBody>
+      </p:sp>
+      <p:sp>
+        <p:nvSpPr>
+          <p:cNvPr id="17" name="TextBox 16"/>
+          <p:cNvSpPr txBox="1"/>
+          <p:nvPr/>
+        </p:nvSpPr>
+        <p:spPr>
+          <a:xfrm>
+            <a:off x="640080" y="2377440"/>
+            <a:ext cx="548640" cy="320040"/>
+          </a:xfrm>
+          <a:prstGeom prst="rect">
+            <a:avLst/>
+          </a:prstGeom>
+          <a:noFill/>
+        </p:spPr>
+        <p:txBody>
+          <a:bodyPr wrap="none">
+            <a:spAutoFit/>
+          </a:bodyPr>
+          <a:lstStyle/>
+          <a:p>
+            <a:pPr algn="ctr">
+              <a:defRPr sz="1600" b="1"/>
+            </a:pPr>
+            <a:r>
+              <a:t>3</a:t>
+            </a:r>
+          </a:p>
+        </p:txBody>
+      </p:sp>
+      <p:sp>
+        <p:nvSpPr>
+          <p:cNvPr id="19" name="TextBox 18"/>
+          <p:cNvSpPr txBox="1"/>
+          <p:nvPr/>
+        </p:nvSpPr>
+        <p:spPr>
+          <a:xfrm>
+            <a:off x="1371600" y="2377440"/>
+            <a:ext cx="3200400" cy="320040"/>
+          </a:xfrm>
+          <a:prstGeom prst="rect">
+            <a:avLst/>
+          </a:prstGeom>
+          <a:noFill/>
+        </p:spPr>
+        <p:txBody>
+          <a:bodyPr wrap="none">
+            <a:spAutoFit/>
+          </a:bodyPr>
+          <a:lstStyle/>
+          <a:p>
+            <a:pPr>
+              <a:defRPr sz="1300"/>
+            </a:pPr>
+            <a:r>
+              <a:t>GOOGL</a:t>
+            </a:r>
+          </a:p>
+        </p:txBody>
+      </p:sp>
+      <p:sp>
+        <p:nvSpPr>
+          <p:cNvPr id="20" name="TextBox 19"/>
+          <p:cNvSpPr txBox="1"/>
+          <p:nvPr/>
+        </p:nvSpPr>
+        <p:spPr>
+          <a:xfrm>
+            <a:off x="4754880" y="2377440"/>
+            <a:ext cx="1828800" cy="320040"/>
+          </a:xfrm>
+          <a:prstGeom prst="rect">
+            <a:avLst/>
+          </a:prstGeom>
+          <a:noFill/>
+        </p:spPr>
+        <p:txBody>
+          <a:bodyPr wrap="none">
+            <a:spAutoFit/>
+          </a:bodyPr>
+          <a:lstStyle/>
+          <a:p>
+            <a:pPr algn="r">
+              <a:defRPr sz="1300" b="1"/>
+            </a:pPr>
+            <a:r>
+              <a:t>$3398.9B</a:t>
+            </a:r>
+          </a:p>
+        </p:txBody>
+      </p:sp>
+      <p:sp>
+        <p:nvSpPr>
+          <p:cNvPr id="21" name="TextBox 20"/>
+          <p:cNvSpPr txBox="1"/>
+          <p:nvPr/>
+        </p:nvSpPr>
+        <p:spPr>
+          <a:xfrm>
+            <a:off x="6766560" y="2377440"/>
+            <a:ext cx="1645920" cy="320040"/>
+          </a:xfrm>
+          <a:prstGeom prst="rect">
+            <a:avLst/>
+          </a:prstGeom>
+          <a:noFill/>
+        </p:spPr>
+        <p:txBody>
+          <a:bodyPr wrap="none">
+            <a:spAutoFit/>
+          </a:bodyPr>
+          <a:lstStyle/>
+          <a:p>
+            <a:pPr>
+              <a:defRPr sz="1200">
+                <a:solidFill>
+                  <a:srgbClr val="27AE60"/>
+                </a:solidFill>
+              </a:defRPr>
+            </a:pPr>
+            <a:r>
+              <a:t>✓ Excellent</a:t>
+            </a:r>
+          </a:p>
+        </p:txBody>
+      </p:sp>
+      <p:sp>
+        <p:nvSpPr>
+          <p:cNvPr id="22" name="TextBox 21"/>
+          <p:cNvSpPr txBox="1"/>
+          <p:nvPr/>
+        </p:nvSpPr>
+        <p:spPr>
+          <a:xfrm>
+            <a:off x="640080" y="2743200"/>
+            <a:ext cx="548640" cy="320040"/>
+          </a:xfrm>
+          <a:prstGeom prst="rect">
+            <a:avLst/>
+          </a:prstGeom>
+          <a:noFill/>
+        </p:spPr>
+        <p:txBody>
+          <a:bodyPr wrap="none">
+            <a:spAutoFit/>
+          </a:bodyPr>
+          <a:lstStyle/>
+          <a:p>
+            <a:pPr algn="ctr">
+              <a:defRPr sz="1600" b="1"/>
+            </a:pPr>
+            <a:r>
+              <a:t>4</a:t>
+            </a:r>
+          </a:p>
+        </p:txBody>
+      </p:sp>
+      <p:sp>
+        <p:nvSpPr>
+          <p:cNvPr id="23" name="TextBox 22"/>
+          <p:cNvSpPr txBox="1"/>
+          <p:nvPr/>
+        </p:nvSpPr>
+        <p:spPr>
+          <a:xfrm>
+            <a:off x="1371600" y="2743200"/>
+            <a:ext cx="3200400" cy="320040"/>
+          </a:xfrm>
+          <a:prstGeom prst="rect">
+            <a:avLst/>
+          </a:prstGeom>
+          <a:noFill/>
+        </p:spPr>
+        <p:txBody>
+          <a:bodyPr wrap="none">
+            <a:spAutoFit/>
+          </a:bodyPr>
+          <a:lstStyle/>
+          <a:p>
+            <a:pPr>
+              <a:defRPr sz="1300"/>
+            </a:pPr>
+            <a:r>
+              <a:t>AMZN</a:t>
+            </a:r>
+          </a:p>
+        </p:txBody>
+      </p:sp>
+      <p:sp>
+        <p:nvSpPr>
+          <p:cNvPr id="24" name="TextBox 23"/>
+          <p:cNvSpPr txBox="1"/>
+          <p:nvPr/>
+        </p:nvSpPr>
+        <p:spPr>
+          <a:xfrm>
+            <a:off x="4754880" y="2743200"/>
+            <a:ext cx="1828800" cy="320040"/>
+          </a:xfrm>
+          <a:prstGeom prst="rect">
+            <a:avLst/>
+          </a:prstGeom>
+          <a:noFill/>
+        </p:spPr>
+        <p:txBody>
+          <a:bodyPr wrap="none">
+            <a:spAutoFit/>
+          </a:bodyPr>
+          <a:lstStyle/>
+          <a:p>
+            <a:pPr algn="r">
+              <a:defRPr sz="1300" b="1"/>
+            </a:pPr>
+            <a:r>
+              <a:t>$2610.0B</a:t>
+            </a:r>
+          </a:p>
+        </p:txBody>
+      </p:sp>
+      <p:sp>
+        <p:nvSpPr>
+          <p:cNvPr id="25" name="TextBox 24"/>
+          <p:cNvSpPr txBox="1"/>
+          <p:nvPr/>
+        </p:nvSpPr>
+        <p:spPr>
+          <a:xfrm>
+            <a:off x="6766560" y="2743200"/>
+            <a:ext cx="1645920" cy="320040"/>
+          </a:xfrm>
+          <a:prstGeom prst="rect">
+            <a:avLst/>
+          </a:prstGeom>
+          <a:noFill/>
+        </p:spPr>
+        <p:txBody>
+          <a:bodyPr wrap="none">
+            <a:spAutoFit/>
+          </a:bodyPr>
+          <a:lstStyle/>
+          <a:p>
+            <a:pPr>
+              <a:defRPr sz="1200">
+                <a:solidFill>
+                  <a:srgbClr val="27AE60"/>
+                </a:solidFill>
+              </a:defRPr>
+            </a:pPr>
+            <a:r>
+              <a:t>✓ Strong</a:t>
+            </a:r>
+          </a:p>
+        </p:txBody>
+      </p:sp>
+      <p:sp>
+        <p:nvSpPr>
+          <p:cNvPr id="26" name="TextBox 25"/>
+          <p:cNvSpPr txBox="1"/>
+          <p:nvPr/>
+        </p:nvSpPr>
+        <p:spPr>
+          <a:xfrm>
+            <a:off x="640080" y="3108960"/>
+            <a:ext cx="548640" cy="320040"/>
+          </a:xfrm>
+          <a:prstGeom prst="rect">
+            <a:avLst/>
+          </a:prstGeom>
+          <a:noFill/>
+        </p:spPr>
+        <p:txBody>
+          <a:bodyPr wrap="none">
+            <a:spAutoFit/>
+          </a:bodyPr>
+          <a:lstStyle/>
+          <a:p>
+            <a:pPr algn="ctr">
+              <a:defRPr sz="1600" b="1"/>
+            </a:pPr>
+            <a:r>
+              <a:t>5</a:t>
+            </a:r>
+          </a:p>
+        </p:txBody>
+      </p:sp>
+      <p:sp>
+        <p:nvSpPr>
+          <p:cNvPr id="27" name="TextBox 26"/>
+          <p:cNvSpPr txBox="1"/>
+          <p:nvPr/>
+        </p:nvSpPr>
+        <p:spPr>
+          <a:xfrm>
+            <a:off x="1371600" y="3108960"/>
+            <a:ext cx="3200400" cy="320040"/>
+          </a:xfrm>
+          <a:prstGeom prst="rect">
+            <a:avLst/>
+          </a:prstGeom>
+          <a:noFill/>
+        </p:spPr>
+        <p:txBody>
+          <a:bodyPr wrap="none">
+            <a:spAutoFit/>
+          </a:bodyPr>
+          <a:lstStyle/>
+          <a:p>
+            <a:pPr>
+              <a:defRPr sz="1300"/>
+            </a:pPr>
+            <a:r>
+              <a:t>TSLA</a:t>
+            </a:r>
+          </a:p>
+        </p:txBody>
+      </p:sp>
+      <p:sp>
+        <p:nvSpPr>
+          <p:cNvPr id="28" name="TextBox 27"/>
+          <p:cNvSpPr txBox="1"/>
+          <p:nvPr/>
+        </p:nvSpPr>
+        <p:spPr>
+          <a:xfrm>
+            <a:off x="4754880" y="3108960"/>
+            <a:ext cx="1828800" cy="320040"/>
+          </a:xfrm>
+          <a:prstGeom prst="rect">
+            <a:avLst/>
+          </a:prstGeom>
+          <a:noFill/>
+        </p:spPr>
+        <p:txBody>
+          <a:bodyPr wrap="none">
+            <a:spAutoFit/>
+          </a:bodyPr>
+          <a:lstStyle/>
+          <a:p>
+            <a:pPr algn="r">
+              <a:defRPr sz="1300" b="1"/>
+            </a:pPr>
+            <a:r>
+              <a:t>$1518.4B</a:t>
+            </a:r>
+          </a:p>
+        </p:txBody>
+      </p:sp>
+      <p:sp>
+        <p:nvSpPr>
+          <p:cNvPr id="29" name="TextBox 28"/>
+          <p:cNvSpPr txBox="1"/>
+          <p:nvPr/>
+        </p:nvSpPr>
+        <p:spPr>
+          <a:xfrm>
+            <a:off x="6766560" y="3108960"/>
+            <a:ext cx="1645920" cy="320040"/>
+          </a:xfrm>
+          <a:prstGeom prst="rect">
+            <a:avLst/>
+          </a:prstGeom>
+          <a:noFill/>
+        </p:spPr>
+        <p:txBody>
+          <a:bodyPr wrap="none">
+            <a:spAutoFit/>
+          </a:bodyPr>
+          <a:lstStyle/>
+          <a:p>
+            <a:pPr>
+              <a:defRPr sz="1200">
+                <a:solidFill>
+                  <a:srgbClr val="27AE60"/>
+                </a:solidFill>
+              </a:defRPr>
+            </a:pPr>
+            <a:r>
+              <a:t>✓ Strong</a:t>
+            </a:r>
+          </a:p>
+        </p:txBody>
+      </p:sp>
+      <p:sp>
+        <p:nvSpPr>
+          <p:cNvPr id="30" name="TextBox 29"/>
+          <p:cNvSpPr txBox="1"/>
+          <p:nvPr/>
+        </p:nvSpPr>
+        <p:spPr>
+          <a:xfrm>
+            <a:off x="640080" y="3474720"/>
+            <a:ext cx="548640" cy="320040"/>
+          </a:xfrm>
+          <a:prstGeom prst="rect">
+            <a:avLst/>
+          </a:prstGeom>
+          <a:noFill/>
+        </p:spPr>
+        <p:txBody>
+          <a:bodyPr wrap="none">
+            <a:spAutoFit/>
+          </a:bodyPr>
+          <a:lstStyle/>
+          <a:p>
+            <a:pPr algn="ctr">
+              <a:defRPr sz="1600" b="1"/>
+            </a:pPr>
+            <a:r>
+              <a:t>6</a:t>
+            </a:r>
+          </a:p>
+        </p:txBody>
+      </p:sp>
+      <p:sp>
+        <p:nvSpPr>
+          <p:cNvPr id="31" name="TextBox 30"/>
+          <p:cNvSpPr txBox="1"/>
+          <p:nvPr/>
+        </p:nvSpPr>
+        <p:spPr>
+          <a:xfrm>
+            <a:off x="1371600" y="3474720"/>
+            <a:ext cx="3200400" cy="320040"/>
+          </a:xfrm>
+          <a:prstGeom prst="rect">
+            <a:avLst/>
+          </a:prstGeom>
+          <a:noFill/>
+        </p:spPr>
+        <p:txBody>
+          <a:bodyPr wrap="none">
+            <a:spAutoFit/>
+          </a:bodyPr>
+          <a:lstStyle/>
+          <a:p>
+            <a:pPr>
+              <a:defRPr sz="1300"/>
+            </a:pPr>
+            <a:r>
+              <a:t>nan</a:t>
+            </a:r>
+          </a:p>
+        </p:txBody>
+      </p:sp>
+      <p:sp>
+        <p:nvSpPr>
+          <p:cNvPr id="32" name="TextBox 31"/>
+          <p:cNvSpPr txBox="1"/>
+          <p:nvPr/>
+        </p:nvSpPr>
+        <p:spPr>
+          <a:xfrm>
+            <a:off x="4754880" y="3474720"/>
+            <a:ext cx="1828800" cy="320040"/>
+          </a:xfrm>
+          <a:prstGeom prst="rect">
+            <a:avLst/>
+          </a:prstGeom>
+          <a:noFill/>
+        </p:spPr>
+        <p:txBody>
+          <a:bodyPr wrap="none">
+            <a:spAutoFit/>
+          </a:bodyPr>
+          <a:lstStyle/>
+          <a:p>
+            <a:pPr algn="r">
+              <a:defRPr sz="1300" b="1"/>
+            </a:pPr>
+            <a:r>
+              <a:t>$nan</a:t>
+            </a:r>
+          </a:p>
+        </p:txBody>
+      </p:sp>
+      <p:sp>
+        <p:nvSpPr>
+          <p:cNvPr id="33" name="TextBox 32"/>
+          <p:cNvSpPr txBox="1"/>
+          <p:nvPr/>
+        </p:nvSpPr>
+        <p:spPr>
+          <a:xfrm>
+            <a:off x="6766560" y="3474720"/>
+            <a:ext cx="1645920" cy="320040"/>
+          </a:xfrm>
+          <a:prstGeom prst="rect">
+            <a:avLst/>
+          </a:prstGeom>
+          <a:noFill/>
+        </p:spPr>
+        <p:txBody>
+          <a:bodyPr wrap="none">
+            <a:spAutoFit/>
+          </a:bodyPr>
+          <a:lstStyle/>
+          <a:p>
+            <a:pPr>
+              <a:defRPr sz="1200">
+                <a:solidFill>
+                  <a:srgbClr val="27AE60"/>
+                </a:solidFill>
+              </a:defRPr>
+            </a:pPr>
+            <a:r>
+              <a:t>✓ Strong</a:t>
+            </a:r>
+          </a:p>
+        </p:txBody>
+      </p:sp>
+      <p:sp>
+        <p:nvSpPr>
+          <p:cNvPr id="34" name="TextBox 33"/>
+          <p:cNvSpPr txBox="1"/>
+          <p:nvPr/>
+        </p:nvSpPr>
+        <p:spPr>
+          <a:xfrm>
+            <a:off x="640080" y="3840480"/>
+            <a:ext cx="548640" cy="320040"/>
+          </a:xfrm>
+          <a:prstGeom prst="rect">
+            <a:avLst/>
+          </a:prstGeom>
+          <a:noFill/>
+        </p:spPr>
+        <p:txBody>
+          <a:bodyPr wrap="none">
+            <a:spAutoFit/>
+          </a:bodyPr>
+          <a:lstStyle/>
+          <a:p>
+            <a:pPr algn="ctr">
+              <a:defRPr sz="1600" b="1"/>
+            </a:pPr>
+            <a:r>
+              <a:t>7</a:t>
+            </a:r>
+          </a:p>
+        </p:txBody>
+      </p:sp>
+      <p:sp>
+        <p:nvSpPr>
+          <p:cNvPr id="35" name="TextBox 34"/>
+          <p:cNvSpPr txBox="1"/>
+          <p:nvPr/>
+        </p:nvSpPr>
+        <p:spPr>
+          <a:xfrm>
+            <a:off x="1371600" y="3840480"/>
+            <a:ext cx="3200400" cy="320040"/>
+          </a:xfrm>
+          <a:prstGeom prst="rect">
+            <a:avLst/>
+          </a:prstGeom>
+          <a:noFill/>
+        </p:spPr>
+        <p:txBody>
+          <a:bodyPr wrap="none">
+            <a:spAutoFit/>
+          </a:bodyPr>
+          <a:lstStyle/>
+          <a:p>
+            <a:pPr>
+              <a:defRPr sz="1300"/>
+            </a:pPr>
+            <a:r>
+              <a:t>nan</a:t>
+            </a:r>
+          </a:p>
+        </p:txBody>
+      </p:sp>
+      <p:sp>
+        <p:nvSpPr>
+          <p:cNvPr id="36" name="TextBox 35"/>
+          <p:cNvSpPr txBox="1"/>
+          <p:nvPr/>
+        </p:nvSpPr>
+        <p:spPr>
+          <a:xfrm>
+            <a:off x="4754880" y="3840480"/>
+            <a:ext cx="1828800" cy="320040"/>
+          </a:xfrm>
+          <a:prstGeom prst="rect">
+            <a:avLst/>
+          </a:prstGeom>
+          <a:noFill/>
+        </p:spPr>
+        <p:txBody>
+          <a:bodyPr wrap="none">
+            <a:spAutoFit/>
+          </a:bodyPr>
+          <a:lstStyle/>
+          <a:p>
+            <a:pPr algn="r">
+              <a:defRPr sz="1300" b="1"/>
+            </a:pPr>
+            <a:r>
+              <a:t>$nan</a:t>
+            </a:r>
+          </a:p>
+        </p:txBody>
+      </p:sp>
+      <p:sp>
+        <p:nvSpPr>
+          <p:cNvPr id="37" name="TextBox 36"/>
+          <p:cNvSpPr txBox="1"/>
+          <p:nvPr/>
+        </p:nvSpPr>
+        <p:spPr>
+          <a:xfrm>
+            <a:off x="6766560" y="3840480"/>
+            <a:ext cx="1645920" cy="320040"/>
+          </a:xfrm>
+          <a:prstGeom prst="rect">
+            <a:avLst/>
+          </a:prstGeom>
+          <a:noFill/>
+        </p:spPr>
+        <p:txBody>
+          <a:bodyPr wrap="none">
+            <a:spAutoFit/>
+          </a:bodyPr>
+          <a:lstStyle/>
+          <a:p>
+            <a:pPr>
+              <a:defRPr sz="1200">
+                <a:solidFill>
+                  <a:srgbClr val="27AE60"/>
+                </a:solidFill>
+              </a:defRPr>
+            </a:pPr>
+            <a:r>
+              <a:t>✓ Good</a:t>
+            </a:r>
+          </a:p>
+        </p:txBody>
+      </p:sp>
+      <p:sp>
+        <p:nvSpPr>
+          <p:cNvPr id="38" name="TextBox 37"/>
+          <p:cNvSpPr txBox="1"/>
+          <p:nvPr/>
+        </p:nvSpPr>
+        <p:spPr>
+          <a:xfrm>
+            <a:off x="640080" y="4206240"/>
+            <a:ext cx="548640" cy="320040"/>
+          </a:xfrm>
+          <a:prstGeom prst="rect">
+            <a:avLst/>
+          </a:prstGeom>
+          <a:noFill/>
+        </p:spPr>
+        <p:txBody>
+          <a:bodyPr wrap="none">
+            <a:spAutoFit/>
+          </a:bodyPr>
+          <a:lstStyle/>
+          <a:p>
+            <a:pPr algn="ctr">
+              <a:defRPr sz="1600" b="1"/>
+            </a:pPr>
+            <a:r>
+              <a:t>8</a:t>
+            </a:r>
+          </a:p>
+        </p:txBody>
+      </p:sp>
+      <p:sp>
+        <p:nvSpPr>
+          <p:cNvPr id="39" name="TextBox 38"/>
+          <p:cNvSpPr txBox="1"/>
+          <p:nvPr/>
+        </p:nvSpPr>
+        <p:spPr>
+          <a:xfrm>
+            <a:off x="1371600" y="4206240"/>
+            <a:ext cx="3200400" cy="320040"/>
+          </a:xfrm>
+          <a:prstGeom prst="rect">
+            <a:avLst/>
+          </a:prstGeom>
+          <a:noFill/>
+        </p:spPr>
+        <p:txBody>
+          <a:bodyPr wrap="none">
+            <a:spAutoFit/>
+          </a:bodyPr>
+          <a:lstStyle/>
+          <a:p>
+            <a:pPr>
+              <a:defRPr sz="1300"/>
+            </a:pPr>
+            <a:r>
+              <a:t>nan</a:t>
+            </a:r>
+          </a:p>
+        </p:txBody>
+      </p:sp>
+      <p:sp>
+        <p:nvSpPr>
+          <p:cNvPr id="40" name="TextBox 39"/>
+          <p:cNvSpPr txBox="1"/>
+          <p:nvPr/>
+        </p:nvSpPr>
+        <p:spPr>
+          <a:xfrm>
+            <a:off x="4754880" y="4206240"/>
+            <a:ext cx="1828800" cy="320040"/>
+          </a:xfrm>
+          <a:prstGeom prst="rect">
+            <a:avLst/>
+          </a:prstGeom>
+          <a:noFill/>
+        </p:spPr>
+        <p:txBody>
+          <a:bodyPr wrap="none">
+            <a:spAutoFit/>
+          </a:bodyPr>
+          <a:lstStyle/>
+          <a:p>
+            <a:pPr algn="r">
+              <a:defRPr sz="1300" b="1"/>
+            </a:pPr>
+            <a:r>
+              <a:t>$nan</a:t>
+            </a:r>
+          </a:p>
+        </p:txBody>
+      </p:sp>
+      <p:sp>
+        <p:nvSpPr>
+          <p:cNvPr id="41" name="TextBox 40"/>
+          <p:cNvSpPr txBox="1"/>
+          <p:nvPr/>
+        </p:nvSpPr>
+        <p:spPr>
+          <a:xfrm>
+            <a:off x="6766560" y="4206240"/>
+            <a:ext cx="1645920" cy="320040"/>
+          </a:xfrm>
+          <a:prstGeom prst="rect">
+            <a:avLst/>
+          </a:prstGeom>
+          <a:noFill/>
+        </p:spPr>
+        <p:txBody>
+          <a:bodyPr wrap="none">
+            <a:spAutoFit/>
+          </a:bodyPr>
+          <a:lstStyle/>
+          <a:p>
+            <a:pPr>
+              <a:defRPr sz="1200">
+                <a:solidFill>
+                  <a:srgbClr val="27AE60"/>
+                </a:solidFill>
+              </a:defRPr>
+            </a:pPr>
+            <a:r>
+              <a:t>✓ Good</a:t>
+            </a:r>
+          </a:p>
+        </p:txBody>
+      </p:sp>
+    </p:spTree>
+  </p:cSld>
+  <p:clrMapOvr>
+    <a:masterClrMapping/>
+  </p:clrMapOvr>
+</p:sld>
+</file>
+
+<file path=ppt/slides/slide8.xml><?xml version="1.0" encoding="utf-8"?>
+<p:sld xmlns:a="http://schemas.openxmlformats.org/drawingml/2006/main" xmlns:p="http://schemas.openxmlformats.org/presentationml/2006/main" xmlns:r="http://schemas.openxmlformats.org/officeDocument/2006/relationships">
+  <p:cSld>
+    <p:spTree>
+      <p:nvGrpSpPr>
+        <p:cNvPr id="1" name=""/>
+        <p:cNvGrpSpPr/>
+        <p:nvPr/>
+      </p:nvGrpSpPr>
+      <p:grpSpPr/>
+      <p:sp>
+        <p:nvSpPr>
+          <p:cNvPr id="2" name="TextBox 1"/>
+          <p:cNvSpPr txBox="1"/>
+          <p:nvPr/>
+        </p:nvSpPr>
+        <p:spPr>
+          <a:xfrm>
+            <a:off x="457200" y="365760"/>
+            <a:ext cx="8229600" cy="548640"/>
+          </a:xfrm>
+          <a:prstGeom prst="rect">
+            <a:avLst/>
+          </a:prstGeom>
+          <a:noFill/>
+        </p:spPr>
+        <p:txBody>
+          <a:bodyPr wrap="none">
+            <a:spAutoFit/>
+          </a:bodyPr>
+          <a:lstStyle/>
+          <a:p>
+            <a:pPr>
+              <a:defRPr sz="3600" b="1">
+                <a:solidFill>
+                  <a:srgbClr val="192A56"/>
+                </a:solidFill>
+              </a:defRPr>
+            </a:pPr>
+            <a:r>
+              <a:t>Trend Analysis</a:t>
+            </a:r>
+          </a:p>
+        </p:txBody>
+      </p:sp>
+      <p:sp>
+        <p:nvSpPr>
+          <p:cNvPr id="3" name="TextBox 2"/>
+          <p:cNvSpPr txBox="1"/>
+          <p:nvPr/>
+        </p:nvSpPr>
+        <p:spPr>
+          <a:xfrm>
+            <a:off x="457200" y="1097280"/>
+            <a:ext cx="4114800" cy="1371600"/>
+          </a:xfrm>
+          <a:prstGeom prst="rect">
+            <a:avLst/>
+          </a:prstGeom>
+          <a:noFill/>
+        </p:spPr>
+        <p:txBody>
+          <a:bodyPr wrap="square">
+            <a:spAutoFit/>
+          </a:bodyPr>
+          <a:lstStyle/>
+          <a:p/>
+          <a:p>
+            <a:pPr>
+              <a:spcAft>
+                <a:spcPts val="1000"/>
+              </a:spcAft>
+              <a:defRPr sz="1400">
+                <a:solidFill>
+                  <a:srgbClr val="34495E"/>
+                </a:solidFill>
+              </a:defRPr>
+            </a:pPr>
+            <a:r>
+              <a:t>• Upward trajectory observed in key metrics</a:t>
+            </a:r>
+          </a:p>
+          <a:p>
+            <a:pPr>
+              <a:spcAft>
+                <a:spcPts val="1000"/>
+              </a:spcAft>
+              <a:defRPr sz="1400">
+                <a:solidFill>
+                  <a:srgbClr val="34495E"/>
+                </a:solidFill>
+              </a:defRPr>
+            </a:pPr>
+            <a:r>
+              <a:t>• Growth rate remains consistent with projections</a:t>
+            </a:r>
+          </a:p>
+          <a:p>
+            <a:pPr>
+              <a:spcAft>
+                <a:spcPts val="1000"/>
+              </a:spcAft>
+              <a:defRPr sz="1400">
+                <a:solidFill>
+                  <a:srgbClr val="34495E"/>
+                </a:solidFill>
+              </a:defRPr>
+            </a:pPr>
+            <a:r>
+              <a:t>• Seasonal patterns identified for optimization</a:t>
+            </a:r>
+          </a:p>
+          <a:p>
+            <a:pPr>
+              <a:spcAft>
+                <a:spcPts val="1000"/>
+              </a:spcAft>
+              <a:defRPr sz="1400">
+                <a:solidFill>
+                  <a:srgbClr val="34495E"/>
+                </a:solidFill>
+              </a:defRPr>
+            </a:pPr>
+            <a:r>
+              <a:t>• Positive outlook for next reporting period</a:t>
+            </a:r>
+          </a:p>
+        </p:txBody>
+      </p:sp>
+      <p:graphicFrame>
+        <p:nvGraphicFramePr>
+          <p:cNvPr id="4" name="Chart 3"/>
+          <p:cNvGraphicFramePr>
+            <a:graphicFrameLocks noGrp="1"/>
+          </p:cNvGraphicFramePr>
+          <p:nvPr/>
+        </p:nvGraphicFramePr>
+        <p:xfrm>
+          <a:off x="4754880" y="1188720"/>
+          <a:ext cx="3931920" cy="3200400"/>
+        </p:xfrm>
+        <a:graphic>
+          <a:graphicData uri="http://schemas.openxmlformats.org/drawingml/2006/chart">
+            <c:chart xmlns:c="http://schemas.openxmlformats.org/drawingml/2006/chart" r:id="rId2"/>
+          </a:graphicData>
+        </a:graphic>
+      </p:graphicFrame>
+    </p:spTree>
+  </p:cSld>
+  <p:clrMapOvr>
+    <a:masterClrMapping/>
+  </p:clrMapOvr>
+</p:sld>
+</file>
+
+<file path=ppt/slides/slide9.xml><?xml version="1.0" encoding="utf-8"?>
+<p:sld xmlns:a="http://schemas.openxmlformats.org/drawingml/2006/main" xmlns:p="http://schemas.openxmlformats.org/presentationml/2006/main" xmlns:r="http://schemas.openxmlformats.org/officeDocument/2006/relationships">
+  <p:cSld>
+    <p:spTree>
+      <p:nvGrpSpPr>
+        <p:cNvPr id="1" name=""/>
+        <p:cNvGrpSpPr/>
+        <p:nvPr/>
+      </p:nvGrpSpPr>
+      <p:grpSpPr/>
+      <p:sp>
+        <p:nvSpPr>
+          <p:cNvPr id="2" name="Rectangle 1"/>
+          <p:cNvSpPr/>
+          <p:nvPr/>
+        </p:nvSpPr>
+        <p:spPr>
+          <a:xfrm>
+            <a:off x="0" y="0"/>
+            <a:ext cx="9144000" cy="6858000"/>
+          </a:xfrm>
+          <a:prstGeom prst="rect">
+            <a:avLst/>
+          </a:prstGeom>
+          <a:solidFill>
+            <a:srgbClr val="192A56"/>
+          </a:solidFill>
+          <a:ln>
+            <a:noFill/>
+          </a:ln>
+        </p:spPr>
+        <p:style>
+          <a:lnRef idx="1">
+            <a:schemeClr val="accent1"/>
+          </a:lnRef>
+          <a:fillRef idx="3">
+            <a:schemeClr val="accent1"/>
+          </a:fillRef>
+          <a:effectRef idx="2">
+            <a:schemeClr val="accent1"/>
+          </a:effectRef>
+          <a:fontRef idx="minor">
+            <a:schemeClr val="lt1"/>
+          </a:fontRef>
+        </p:style>
+        <p:txBody>
+          <a:bodyPr rtlCol="0" anchor="ctr"/>
+          <a:lstStyle/>
+          <a:p>
+            <a:pPr algn="ctr"/>
+          </a:p>
+        </p:txBody>
+      </p:sp>
+      <p:sp>
+        <p:nvSpPr>
+          <p:cNvPr id="3" name="TextBox 2"/>
+          <p:cNvSpPr txBox="1"/>
+          <p:nvPr/>
+        </p:nvSpPr>
+        <p:spPr>
+          <a:xfrm>
+            <a:off x="914400" y="1828800"/>
+            <a:ext cx="7315200" cy="914400"/>
+          </a:xfrm>
+          <a:prstGeom prst="rect">
+            <a:avLst/>
+          </a:prstGeom>
+          <a:noFill/>
+        </p:spPr>
+        <p:txBody>
+          <a:bodyPr wrap="none">
+            <a:spAutoFit/>
+          </a:bodyPr>
+          <a:lstStyle/>
+          <a:p>
+            <a:pPr algn="ctr">
+              <a:defRPr sz="4400" b="1">
+                <a:solidFill>
+                  <a:srgbClr val="FFFFFF"/>
+                </a:solidFill>
+              </a:defRPr>
+            </a:pPr>
+            <a:r>
+              <a:t>Summary &amp; Next Steps</a:t>
+            </a:r>
+          </a:p>
+        </p:txBody>
+      </p:sp>
+      <p:sp>
+        <p:nvSpPr>
+          <p:cNvPr id="4" name="TextBox 3"/>
+          <p:cNvSpPr txBox="1"/>
+          <p:nvPr/>
+        </p:nvSpPr>
+        <p:spPr>
+          <a:xfrm>
+            <a:off x="1371600" y="2926080"/>
+            <a:ext cx="6400800" cy="1371600"/>
+          </a:xfrm>
+          <a:prstGeom prst="rect">
+            <a:avLst/>
+          </a:prstGeom>
+          <a:noFill/>
+        </p:spPr>
+        <p:txBody>
+          <a:bodyPr wrap="square">
+            <a:spAutoFit/>
+          </a:bodyPr>
+          <a:lstStyle/>
+          <a:p/>
+          <a:p>
+            <a:pPr algn="ctr">
+              <a:spcAft>
+                <a:spcPts val="1200"/>
+              </a:spcAft>
+              <a:defRPr sz="1800">
+                <a:solidFill>
+                  <a:srgbClr val="3498DB"/>
+                </a:solidFill>
+              </a:defRPr>
+            </a:pPr>
+            <a:r>
+              <a:t>✓ Comprehensive analysis completed</a:t>
+            </a:r>
+          </a:p>
+          <a:p>
+            <a:pPr algn="ctr">
+              <a:spcAft>
+                <a:spcPts val="1200"/>
+              </a:spcAft>
+              <a:defRPr sz="1800">
+                <a:solidFill>
+                  <a:srgbClr val="3498DB"/>
+                </a:solidFill>
+              </a:defRPr>
+            </a:pPr>
+            <a:r>
+              <a:t>✓ Key insights identified for action</a:t>
+            </a:r>
+          </a:p>
+          <a:p>
+            <a:pPr algn="ctr">
+              <a:spcAft>
+                <a:spcPts val="1200"/>
+              </a:spcAft>
+              <a:defRPr sz="1800">
+                <a:solidFill>
+                  <a:srgbClr val="3498DB"/>
+                </a:solidFill>
+              </a:defRPr>
+            </a:pPr>
+            <a:r>
+              <a:t>✓ Data-driven recommendations provided</a:t>
             </a:r>
           </a:p>
         </p:txBody>
@@ -5912,48 +7764,8 @@
         </p:nvSpPr>
         <p:spPr>
           <a:xfrm>
-            <a:off x="457200" y="3657600"/>
-            <a:ext cx="8229600" cy="731520"/>
-          </a:xfrm>
-          <a:prstGeom prst="rect">
-            <a:avLst/>
-          </a:prstGeom>
-          <a:noFill/>
-        </p:spPr>
-        <p:txBody>
-          <a:bodyPr wrap="none">
-            <a:spAutoFit/>
-          </a:bodyPr>
-          <a:lstStyle/>
-          <a:p>
-            <a:pPr algn="ctr">
-              <a:defRPr sz="1800">
-                <a:solidFill>
-                  <a:srgbClr val="646464"/>
-                </a:solidFill>
-              </a:defRPr>
-            </a:pPr>
-            <a:r>
-              <a:t>Global Investment Partners</a:t>
-            </a:r>
-          </a:p>
-          <a:p>
-            <a:r>
-              <a:t>analytics@globalinvest.com</a:t>
-            </a:r>
-          </a:p>
-        </p:txBody>
-      </p:sp>
-      <p:sp>
-        <p:nvSpPr>
-          <p:cNvPr id="6" name="TextBox 5"/>
-          <p:cNvSpPr txBox="1"/>
-          <p:nvPr/>
-        </p:nvSpPr>
-        <p:spPr>
-          <a:xfrm>
-            <a:off x="457200" y="5486400"/>
-            <a:ext cx="8229600" cy="731520"/>
+            <a:off x="914400" y="4572000"/>
+            <a:ext cx="7315200" cy="457200"/>
           </a:xfrm>
           <a:prstGeom prst="rect">
             <a:avLst/>
@@ -5969,17 +7781,12 @@
             <a:pPr algn="ctr">
               <a:defRPr sz="1400">
                 <a:solidFill>
-                  <a:srgbClr val="969696"/>
-                </a:solidFill>
-              </a:defRPr>
-            </a:pPr>
-            <a:r>
-              <a:t>📊 Generated via Excel-to-PPT AI Converter</a:t>
-            </a:r>
-          </a:p>
-          <a:p>
-            <a:r>
-              <a:t>www.exceltoppt.ai</a:t>
+                  <a:srgbClr val="ECF0F1"/>
+                </a:solidFill>
+              </a:defRPr>
+            </a:pPr>
+            <a:r>
+              <a:t>Generated by FinDeck | November 06, 2025</a:t>
             </a:r>
           </a:p>
         </p:txBody>

--- a/examples/professional_demo/tech_stocks_pro_tier.pptx
+++ b/examples/professional_demo/tech_stocks_pro_tier.pptx
@@ -118,7 +118,469 @@
 <file path=ppt/charts/chart1.xml><?xml version="1.0" encoding="utf-8"?>
 <c:chartSpace xmlns:c="http://schemas.openxmlformats.org/drawingml/2006/chart" xmlns:a="http://schemas.openxmlformats.org/drawingml/2006/main" xmlns:r="http://schemas.openxmlformats.org/officeDocument/2006/relationships">
   <c:date1904 val="0"/>
+  <c:roundedCorners val="0"/>
   <c:chart>
+    <c:title>
+      <c:tx>
+        <c:rich>
+          <a:bodyPr/>
+          <a:lstStyle/>
+          <a:p>
+            <a:pPr>
+              <a:defRPr sz="2000" b="1">
+                <a:solidFill>
+                  <a:srgbClr val="192A56"/>
+                </a:solidFill>
+              </a:defRPr>
+            </a:pPr>
+            <a:r>
+              <a:t>Data Insights</a:t>
+            </a:r>
+          </a:p>
+        </c:rich>
+      </c:tx>
+      <c:layout/>
+      <c:overlay val="0"/>
+    </c:title>
+    <c:autoTitleDeleted val="0"/>
+    <c:plotArea>
+      <c:layout/>
+      <c:areaChart>
+        <c:grouping val="stacked"/>
+        <c:varyColors val="0"/>
+        <c:ser>
+          <c:idx val="0"/>
+          <c:order val="0"/>
+          <c:tx>
+            <c:strRef>
+              <c:f>Sheet1!$B$1</c:f>
+              <c:strCache>
+                <c:ptCount val="1"/>
+                <c:pt idx="0">
+                  <c:v>MarketCap</c:v>
+                </c:pt>
+              </c:strCache>
+            </c:strRef>
+          </c:tx>
+          <c:spPr>
+            <a:solidFill>
+              <a:srgbClr val="2980B9"/>
+            </a:solidFill>
+          </c:spPr>
+          <c:cat>
+            <c:strRef>
+              <c:f>Sheet1!$A$2:$A$13</c:f>
+              <c:strCache>
+                <c:ptCount val="12"/>
+                <c:pt idx="0">
+                  <c:v>AAPL</c:v>
+                </c:pt>
+                <c:pt idx="1">
+                  <c:v>MSFT</c:v>
+                </c:pt>
+                <c:pt idx="2">
+                  <c:v>GOOGL</c:v>
+                </c:pt>
+                <c:pt idx="3">
+                  <c:v>AMZN</c:v>
+                </c:pt>
+                <c:pt idx="4">
+                  <c:v>TSLA</c:v>
+                </c:pt>
+                <c:pt idx="5">
+                  <c:v>nan</c:v>
+                </c:pt>
+                <c:pt idx="6">
+                  <c:v>nan</c:v>
+                </c:pt>
+                <c:pt idx="7">
+                  <c:v>nan</c:v>
+                </c:pt>
+                <c:pt idx="8">
+                  <c:v>nan</c:v>
+                </c:pt>
+                <c:pt idx="9">
+                  <c:v>nan</c:v>
+                </c:pt>
+                <c:pt idx="10">
+                  <c:v>nan</c:v>
+                </c:pt>
+                <c:pt idx="11">
+                  <c:v>nan</c:v>
+                </c:pt>
+              </c:strCache>
+            </c:strRef>
+          </c:cat>
+          <c:val>
+            <c:numRef>
+              <c:f>Sheet1!$B$2:$B$13</c:f>
+              <c:numCache>
+                <c:formatCode>General</c:formatCode>
+                <c:ptCount val="12"/>
+                <c:pt idx="0">
+                  <c:v>4027681603584.0</c:v>
+                </c:pt>
+                <c:pt idx="1">
+                  <c:v>3907646914560.0</c:v>
+                </c:pt>
+                <c:pt idx="2">
+                  <c:v>3398890160128.0</c:v>
+                </c:pt>
+                <c:pt idx="3">
+                  <c:v>2609979064320.0</c:v>
+                </c:pt>
+                <c:pt idx="4">
+                  <c:v>1518435958784.0</c:v>
+                </c:pt>
+                <c:pt idx="5">
+                  <c:v>0.0</c:v>
+                </c:pt>
+                <c:pt idx="6">
+                  <c:v>0.0</c:v>
+                </c:pt>
+                <c:pt idx="7">
+                  <c:v>0.0</c:v>
+                </c:pt>
+                <c:pt idx="8">
+                  <c:v>0.0</c:v>
+                </c:pt>
+                <c:pt idx="9">
+                  <c:v>0.0</c:v>
+                </c:pt>
+                <c:pt idx="10">
+                  <c:v>0.0</c:v>
+                </c:pt>
+                <c:pt idx="11">
+                  <c:v>0.0</c:v>
+                </c:pt>
+              </c:numCache>
+            </c:numRef>
+          </c:val>
+        </c:ser>
+        <c:ser>
+          <c:idx val="1"/>
+          <c:order val="1"/>
+          <c:tx>
+            <c:strRef>
+              <c:f>Sheet1!$C$1</c:f>
+              <c:strCache>
+                <c:ptCount val="1"/>
+                <c:pt idx="0">
+                  <c:v>CurrentPrice</c:v>
+                </c:pt>
+              </c:strCache>
+            </c:strRef>
+          </c:tx>
+          <c:spPr>
+            <a:solidFill>
+              <a:srgbClr val="27AE60"/>
+            </a:solidFill>
+          </c:spPr>
+          <c:cat>
+            <c:strRef>
+              <c:f>Sheet1!$A$2:$A$13</c:f>
+              <c:strCache>
+                <c:ptCount val="12"/>
+                <c:pt idx="0">
+                  <c:v>AAPL</c:v>
+                </c:pt>
+                <c:pt idx="1">
+                  <c:v>MSFT</c:v>
+                </c:pt>
+                <c:pt idx="2">
+                  <c:v>GOOGL</c:v>
+                </c:pt>
+                <c:pt idx="3">
+                  <c:v>AMZN</c:v>
+                </c:pt>
+                <c:pt idx="4">
+                  <c:v>TSLA</c:v>
+                </c:pt>
+                <c:pt idx="5">
+                  <c:v>nan</c:v>
+                </c:pt>
+                <c:pt idx="6">
+                  <c:v>nan</c:v>
+                </c:pt>
+                <c:pt idx="7">
+                  <c:v>nan</c:v>
+                </c:pt>
+                <c:pt idx="8">
+                  <c:v>nan</c:v>
+                </c:pt>
+                <c:pt idx="9">
+                  <c:v>nan</c:v>
+                </c:pt>
+                <c:pt idx="10">
+                  <c:v>nan</c:v>
+                </c:pt>
+                <c:pt idx="11">
+                  <c:v>nan</c:v>
+                </c:pt>
+              </c:strCache>
+            </c:strRef>
+          </c:cat>
+          <c:val>
+            <c:numRef>
+              <c:f>Sheet1!$C$2:$C$13</c:f>
+              <c:numCache>
+                <c:formatCode>General</c:formatCode>
+                <c:ptCount val="12"/>
+                <c:pt idx="0">
+                  <c:v>270.37</c:v>
+                </c:pt>
+                <c:pt idx="1">
+                  <c:v>517.81</c:v>
+                </c:pt>
+                <c:pt idx="2">
+                  <c:v>281.19</c:v>
+                </c:pt>
+                <c:pt idx="3">
+                  <c:v>244.22</c:v>
+                </c:pt>
+                <c:pt idx="4">
+                  <c:v>456.56</c:v>
+                </c:pt>
+                <c:pt idx="5">
+                  <c:v>0.0</c:v>
+                </c:pt>
+                <c:pt idx="6">
+                  <c:v>0.0</c:v>
+                </c:pt>
+                <c:pt idx="7">
+                  <c:v>0.0</c:v>
+                </c:pt>
+                <c:pt idx="8">
+                  <c:v>0.0</c:v>
+                </c:pt>
+                <c:pt idx="9">
+                  <c:v>0.0</c:v>
+                </c:pt>
+                <c:pt idx="10">
+                  <c:v>0.0</c:v>
+                </c:pt>
+                <c:pt idx="11">
+                  <c:v>0.0</c:v>
+                </c:pt>
+              </c:numCache>
+            </c:numRef>
+          </c:val>
+        </c:ser>
+        <c:ser>
+          <c:idx val="2"/>
+          <c:order val="2"/>
+          <c:tx>
+            <c:strRef>
+              <c:f>Sheet1!$D$1</c:f>
+              <c:strCache>
+                <c:ptCount val="1"/>
+                <c:pt idx="0">
+                  <c:v>TrailingPE</c:v>
+                </c:pt>
+              </c:strCache>
+            </c:strRef>
+          </c:tx>
+          <c:spPr>
+            <a:solidFill>
+              <a:srgbClr val="E67E22"/>
+            </a:solidFill>
+          </c:spPr>
+          <c:cat>
+            <c:strRef>
+              <c:f>Sheet1!$A$2:$A$13</c:f>
+              <c:strCache>
+                <c:ptCount val="12"/>
+                <c:pt idx="0">
+                  <c:v>AAPL</c:v>
+                </c:pt>
+                <c:pt idx="1">
+                  <c:v>MSFT</c:v>
+                </c:pt>
+                <c:pt idx="2">
+                  <c:v>GOOGL</c:v>
+                </c:pt>
+                <c:pt idx="3">
+                  <c:v>AMZN</c:v>
+                </c:pt>
+                <c:pt idx="4">
+                  <c:v>TSLA</c:v>
+                </c:pt>
+                <c:pt idx="5">
+                  <c:v>nan</c:v>
+                </c:pt>
+                <c:pt idx="6">
+                  <c:v>nan</c:v>
+                </c:pt>
+                <c:pt idx="7">
+                  <c:v>nan</c:v>
+                </c:pt>
+                <c:pt idx="8">
+                  <c:v>nan</c:v>
+                </c:pt>
+                <c:pt idx="9">
+                  <c:v>nan</c:v>
+                </c:pt>
+                <c:pt idx="10">
+                  <c:v>nan</c:v>
+                </c:pt>
+                <c:pt idx="11">
+                  <c:v>nan</c:v>
+                </c:pt>
+              </c:strCache>
+            </c:strRef>
+          </c:cat>
+          <c:val>
+            <c:numRef>
+              <c:f>Sheet1!$D$2:$D$13</c:f>
+              <c:numCache>
+                <c:formatCode>General</c:formatCode>
+                <c:ptCount val="12"/>
+                <c:pt idx="0">
+                  <c:v>36.24</c:v>
+                </c:pt>
+                <c:pt idx="1">
+                  <c:v>36.78</c:v>
+                </c:pt>
+                <c:pt idx="2">
+                  <c:v>27.79</c:v>
+                </c:pt>
+                <c:pt idx="3">
+                  <c:v>34.49</c:v>
+                </c:pt>
+                <c:pt idx="4">
+                  <c:v>312.71</c:v>
+                </c:pt>
+                <c:pt idx="5">
+                  <c:v>0.0</c:v>
+                </c:pt>
+                <c:pt idx="6">
+                  <c:v>0.0</c:v>
+                </c:pt>
+                <c:pt idx="7">
+                  <c:v>0.0</c:v>
+                </c:pt>
+                <c:pt idx="8">
+                  <c:v>0.0</c:v>
+                </c:pt>
+                <c:pt idx="9">
+                  <c:v>0.0</c:v>
+                </c:pt>
+                <c:pt idx="10">
+                  <c:v>0.0</c:v>
+                </c:pt>
+                <c:pt idx="11">
+                  <c:v>0.0</c:v>
+                </c:pt>
+              </c:numCache>
+            </c:numRef>
+          </c:val>
+        </c:ser>
+        <c:dLbls>
+          <c:showLegendKey val="0"/>
+          <c:showVal val="0"/>
+          <c:showCatName val="0"/>
+          <c:showSerName val="0"/>
+          <c:showPercent val="0"/>
+          <c:showBubbleSize val="0"/>
+        </c:dLbls>
+        <c:axId val="-2101159928"/>
+        <c:axId val="-2100718248"/>
+      </c:areaChart>
+      <c:catAx>
+        <c:axId val="-2101159928"/>
+        <c:scaling>
+          <c:orientation val="minMax"/>
+        </c:scaling>
+        <c:delete val="0"/>
+        <c:axPos val="b"/>
+        <c:numFmt formatCode="General" sourceLinked="1"/>
+        <c:majorTickMark val="out"/>
+        <c:minorTickMark val="none"/>
+        <c:tickLblPos val="nextTo"/>
+        <c:crossAx val="-2100718248"/>
+        <c:crosses val="autoZero"/>
+        <c:auto val="1"/>
+        <c:lblAlgn val="ctr"/>
+        <c:lblOffset val="100"/>
+        <c:noMultiLvlLbl val="0"/>
+      </c:catAx>
+      <c:valAx>
+        <c:axId val="-2100718248"/>
+        <c:scaling>
+          <c:orientation val="minMax"/>
+        </c:scaling>
+        <c:delete val="0"/>
+        <c:axPos val="l"/>
+        <c:majorGridlines/>
+        <c:numFmt formatCode="General" sourceLinked="1"/>
+        <c:majorTickMark val="out"/>
+        <c:minorTickMark val="none"/>
+        <c:tickLblPos val="nextTo"/>
+        <c:crossAx val="-2101159928"/>
+        <c:crosses val="autoZero"/>
+        <c:crossBetween val="midCat"/>
+      </c:valAx>
+    </c:plotArea>
+    <c:legend>
+      <c:legendPos val="b"/>
+      <c:layout/>
+      <c:overlay val="0"/>
+      <c:txPr>
+        <a:bodyPr/>
+        <a:lstStyle/>
+        <a:p>
+          <a:pPr>
+            <a:defRPr sz="1100" b="0"/>
+          </a:pPr>
+        </a:p>
+      </c:txPr>
+    </c:legend>
+    <c:plotVisOnly val="1"/>
+    <c:dispBlanksAs val="zero"/>
+    <c:showDLblsOverMax val="0"/>
+  </c:chart>
+  <c:txPr>
+    <a:bodyPr/>
+    <a:lstStyle/>
+    <a:p>
+      <a:pPr>
+        <a:defRPr sz="1800"/>
+      </a:pPr>
+      <a:endParaRPr/>
+    </a:p>
+  </c:txPr>
+  <c:externalData r:id="rId1">
+    <c:autoUpdate val="0"/>
+  </c:externalData>
+</c:chartSpace>
+</file>
+
+<file path=ppt/charts/chart2.xml><?xml version="1.0" encoding="utf-8"?>
+<c:chartSpace xmlns:c="http://schemas.openxmlformats.org/drawingml/2006/chart" xmlns:a="http://schemas.openxmlformats.org/drawingml/2006/main" xmlns:r="http://schemas.openxmlformats.org/officeDocument/2006/relationships">
+  <c:date1904 val="0"/>
+  <c:chart>
+    <c:title>
+      <c:tx>
+        <c:rich>
+          <a:bodyPr/>
+          <a:lstStyle/>
+          <a:p>
+            <a:pPr>
+              <a:defRPr sz="2000" b="1">
+                <a:solidFill>
+                  <a:srgbClr val="192A56"/>
+                </a:solidFill>
+              </a:defRPr>
+            </a:pPr>
+            <a:r>
+              <a:t>Sector Distribution</a:t>
+            </a:r>
+          </a:p>
+        </c:rich>
+      </c:tx>
+      <c:layout/>
+      <c:overlay val="0"/>
+    </c:title>
     <c:autoTitleDeleted val="0"/>
     <c:plotArea>
       <c:barChart>
@@ -133,55 +595,45 @@
               <c:strCache>
                 <c:ptCount val="1"/>
                 <c:pt idx="0">
-                  <c:v>Values</c:v>
+                  <c:v>MarketCap</c:v>
                 </c:pt>
               </c:strCache>
             </c:strRef>
           </c:tx>
+          <c:spPr>
+            <a:solidFill>
+              <a:srgbClr val="2980B9"/>
+            </a:solidFill>
+          </c:spPr>
           <c:cat>
             <c:strRef>
-              <c:f>Sheet1!$A$2:$A$11</c:f>
+              <c:f>Sheet1!$A$2:$A$6</c:f>
               <c:strCache>
-                <c:ptCount val="10"/>
+                <c:ptCount val="5"/>
                 <c:pt idx="0">
-                  <c:v>Item 1</c:v>
+                  <c:v>AAPL</c:v>
                 </c:pt>
                 <c:pt idx="1">
-                  <c:v>Item 2</c:v>
+                  <c:v>MSFT</c:v>
                 </c:pt>
                 <c:pt idx="2">
-                  <c:v>Item 3</c:v>
+                  <c:v>GOOGL</c:v>
                 </c:pt>
                 <c:pt idx="3">
-                  <c:v>Item 4</c:v>
+                  <c:v>AMZN</c:v>
                 </c:pt>
                 <c:pt idx="4">
-                  <c:v>Item 5</c:v>
-                </c:pt>
-                <c:pt idx="5">
-                  <c:v>Item 6</c:v>
-                </c:pt>
-                <c:pt idx="6">
-                  <c:v>Item 7</c:v>
-                </c:pt>
-                <c:pt idx="7">
-                  <c:v>Item 8</c:v>
-                </c:pt>
-                <c:pt idx="8">
-                  <c:v>Item 9</c:v>
-                </c:pt>
-                <c:pt idx="9">
-                  <c:v>Item 10</c:v>
+                  <c:v>TSLA</c:v>
                 </c:pt>
               </c:strCache>
             </c:strRef>
           </c:cat>
           <c:val>
             <c:numRef>
-              <c:f>Sheet1!$B$2:$B$11</c:f>
+              <c:f>Sheet1!$B$2:$B$6</c:f>
               <c:numCache>
                 <c:formatCode>General</c:formatCode>
-                <c:ptCount val="10"/>
+                <c:ptCount val="5"/>
                 <c:pt idx="0">
                   <c:v>4027681603584.0</c:v>
                 </c:pt>
@@ -196,26 +648,31 @@
                 </c:pt>
                 <c:pt idx="4">
                   <c:v>1518435958784.0</c:v>
-                </c:pt>
-                <c:pt idx="5">
-                  <c:v>0.0</c:v>
-                </c:pt>
-                <c:pt idx="6">
-                  <c:v>0.0</c:v>
-                </c:pt>
-                <c:pt idx="7">
-                  <c:v>0.0</c:v>
-                </c:pt>
-                <c:pt idx="8">
-                  <c:v>0.0</c:v>
-                </c:pt>
-                <c:pt idx="9">
-                  <c:v>0.0</c:v>
                 </c:pt>
               </c:numCache>
             </c:numRef>
           </c:val>
         </c:ser>
+        <c:dLbls>
+          <c:numFmt formatCode="#,##0" sourceLinked="0"/>
+          <c:txPr>
+            <a:bodyPr/>
+            <a:lstStyle/>
+            <a:p>
+              <a:pPr>
+                <a:defRPr sz="900" b="1"/>
+              </a:pPr>
+            </a:p>
+          </c:txPr>
+          <c:dLblPos val="outEnd"/>
+          <c:showLegendKey val="0"/>
+          <c:showVal val="1"/>
+          <c:showCatName val="0"/>
+          <c:showSerName val="0"/>
+          <c:showPercent val="0"/>
+          <c:showBubbleSize val="0"/>
+          <c:showLeaderLines val="1"/>
+        </c:dLbls>
         <c:axId val="-2068027336"/>
         <c:axId val="-2113994440"/>
       </c:barChart>
@@ -249,146 +706,6 @@
         <c:crosses val="autoZero"/>
       </c:valAx>
     </c:plotArea>
-    <c:dispBlanksAs val="gap"/>
-  </c:chart>
-  <c:txPr>
-    <a:bodyPr/>
-    <a:lstStyle/>
-    <a:p>
-      <a:pPr>
-        <a:defRPr sz="1800"/>
-      </a:pPr>
-      <a:endParaRPr lang="en-US"/>
-    </a:p>
-  </c:txPr>
-  <c:externalData r:id="rId1">
-    <c:autoUpdate val="0"/>
-  </c:externalData>
-</c:chartSpace>
-</file>
-
-<file path=ppt/charts/chart2.xml><?xml version="1.0" encoding="utf-8"?>
-<c:chartSpace xmlns:c="http://schemas.openxmlformats.org/drawingml/2006/chart" xmlns:a="http://schemas.openxmlformats.org/drawingml/2006/main" xmlns:r="http://schemas.openxmlformats.org/officeDocument/2006/relationships">
-  <c:date1904 val="0"/>
-  <c:chart>
-    <c:title>
-      <c:tx>
-        <c:rich>
-          <a:bodyPr/>
-          <a:lstStyle/>
-          <a:p>
-            <a:pPr>
-              <a:defRPr sz="1800" b="1"/>
-            </a:pPr>
-            <a:r>
-              <a:t>Sector Distribution</a:t>
-            </a:r>
-          </a:p>
-        </c:rich>
-      </c:tx>
-      <c:layout/>
-      <c:overlay val="0"/>
-    </c:title>
-    <c:autoTitleDeleted val="0"/>
-    <c:plotArea>
-      <c:barChart>
-        <c:barDir val="bar"/>
-        <c:grouping val="clustered"/>
-        <c:ser>
-          <c:idx val="0"/>
-          <c:order val="0"/>
-          <c:tx>
-            <c:strRef>
-              <c:f>Sheet1!$B$1</c:f>
-              <c:strCache>
-                <c:ptCount val="1"/>
-                <c:pt idx="0">
-                  <c:v>MarketCap</c:v>
-                </c:pt>
-              </c:strCache>
-            </c:strRef>
-          </c:tx>
-          <c:cat>
-            <c:strRef>
-              <c:f>Sheet1!$A$2:$A$6</c:f>
-              <c:strCache>
-                <c:ptCount val="5"/>
-                <c:pt idx="0">
-                  <c:v>AAPL</c:v>
-                </c:pt>
-                <c:pt idx="1">
-                  <c:v>MSFT</c:v>
-                </c:pt>
-                <c:pt idx="2">
-                  <c:v>GOOGL</c:v>
-                </c:pt>
-                <c:pt idx="3">
-                  <c:v>AMZN</c:v>
-                </c:pt>
-                <c:pt idx="4">
-                  <c:v>TSLA</c:v>
-                </c:pt>
-              </c:strCache>
-            </c:strRef>
-          </c:cat>
-          <c:val>
-            <c:numRef>
-              <c:f>Sheet1!$B$2:$B$6</c:f>
-              <c:numCache>
-                <c:formatCode>General</c:formatCode>
-                <c:ptCount val="5"/>
-                <c:pt idx="0">
-                  <c:v>4027681603584.0</c:v>
-                </c:pt>
-                <c:pt idx="1">
-                  <c:v>3907646914560.0</c:v>
-                </c:pt>
-                <c:pt idx="2">
-                  <c:v>3398890160128.0</c:v>
-                </c:pt>
-                <c:pt idx="3">
-                  <c:v>2609979064320.0</c:v>
-                </c:pt>
-                <c:pt idx="4">
-                  <c:v>1518435958784.0</c:v>
-                </c:pt>
-              </c:numCache>
-            </c:numRef>
-          </c:val>
-        </c:ser>
-        <c:axId val="-2068027336"/>
-        <c:axId val="-2113994440"/>
-      </c:barChart>
-      <c:catAx>
-        <c:axId val="-2068027336"/>
-        <c:scaling>
-          <c:orientation val="minMax"/>
-        </c:scaling>
-        <c:delete val="0"/>
-        <c:axPos val="l"/>
-        <c:majorTickMark val="out"/>
-        <c:minorTickMark val="none"/>
-        <c:tickLblPos val="nextTo"/>
-        <c:crossAx val="-2113994440"/>
-        <c:crosses val="autoZero"/>
-        <c:auto val="1"/>
-        <c:lblAlgn val="ctr"/>
-        <c:lblOffset val="100"/>
-        <c:noMultiLvlLbl val="0"/>
-      </c:catAx>
-      <c:valAx>
-        <c:axId val="-2113994440"/>
-        <c:scaling/>
-        <c:delete val="0"/>
-        <c:axPos val="b"/>
-        <c:majorGridlines/>
-        <c:majorTickMark val="out"/>
-        <c:minorTickMark val="none"/>
-        <c:tickLblPos val="nextTo"/>
-        <c:crossAx val="-2068027336"/>
-        <c:crosses val="autoZero"/>
-      </c:valAx>
-    </c:plotArea>
     <c:legend>
       <c:legendPos val="b"/>
       <c:txPr>
@@ -396,7 +713,7 @@
         <a:lstStyle/>
         <a:p>
           <a:pPr>
-            <a:defRPr sz="1000"/>
+            <a:defRPr sz="1100" b="0"/>
           </a:pPr>
         </a:p>
       </c:txPr>
@@ -422,12 +739,36 @@
 <file path=ppt/charts/chart3.xml><?xml version="1.0" encoding="utf-8"?>
 <c:chartSpace xmlns:c="http://schemas.openxmlformats.org/drawingml/2006/chart" xmlns:a="http://schemas.openxmlformats.org/drawingml/2006/main" xmlns:r="http://schemas.openxmlformats.org/officeDocument/2006/relationships">
   <c:date1904 val="0"/>
+  <c:roundedCorners val="0"/>
   <c:chart>
+    <c:title>
+      <c:tx>
+        <c:rich>
+          <a:bodyPr/>
+          <a:lstStyle/>
+          <a:p>
+            <a:pPr>
+              <a:defRPr sz="2000" b="1">
+                <a:solidFill>
+                  <a:srgbClr val="192A56"/>
+                </a:solidFill>
+              </a:defRPr>
+            </a:pPr>
+            <a:r>
+              <a:t>Trend Analysis</a:t>
+            </a:r>
+          </a:p>
+        </c:rich>
+      </c:tx>
+      <c:layout/>
+      <c:overlay val="0"/>
+    </c:title>
     <c:autoTitleDeleted val="0"/>
     <c:plotArea>
-      <c:barChart>
-        <c:barDir val="col"/>
-        <c:grouping val="clustered"/>
+      <c:layout/>
+      <c:areaChart>
+        <c:grouping val="stacked"/>
+        <c:varyColors val="0"/>
         <c:ser>
           <c:idx val="0"/>
           <c:order val="0"/>
@@ -437,55 +778,66 @@
               <c:strCache>
                 <c:ptCount val="1"/>
                 <c:pt idx="0">
-                  <c:v>Values</c:v>
+                  <c:v>MarketCap</c:v>
                 </c:pt>
               </c:strCache>
             </c:strRef>
           </c:tx>
+          <c:spPr>
+            <a:solidFill>
+              <a:srgbClr val="2980B9"/>
+            </a:solidFill>
+          </c:spPr>
           <c:cat>
             <c:strRef>
-              <c:f>Sheet1!$A$2:$A$11</c:f>
+              <c:f>Sheet1!$A$2:$A$13</c:f>
               <c:strCache>
-                <c:ptCount val="10"/>
+                <c:ptCount val="12"/>
                 <c:pt idx="0">
-                  <c:v>Item 1</c:v>
+                  <c:v>AAPL</c:v>
                 </c:pt>
                 <c:pt idx="1">
-                  <c:v>Item 2</c:v>
+                  <c:v>MSFT</c:v>
                 </c:pt>
                 <c:pt idx="2">
-                  <c:v>Item 3</c:v>
+                  <c:v>GOOGL</c:v>
                 </c:pt>
                 <c:pt idx="3">
-                  <c:v>Item 4</c:v>
+                  <c:v>AMZN</c:v>
                 </c:pt>
                 <c:pt idx="4">
-                  <c:v>Item 5</c:v>
+                  <c:v>TSLA</c:v>
                 </c:pt>
                 <c:pt idx="5">
-                  <c:v>Item 6</c:v>
+                  <c:v>nan</c:v>
                 </c:pt>
                 <c:pt idx="6">
-                  <c:v>Item 7</c:v>
+                  <c:v>nan</c:v>
                 </c:pt>
                 <c:pt idx="7">
-                  <c:v>Item 8</c:v>
+                  <c:v>nan</c:v>
                 </c:pt>
                 <c:pt idx="8">
-                  <c:v>Item 9</c:v>
+                  <c:v>nan</c:v>
                 </c:pt>
                 <c:pt idx="9">
-                  <c:v>Item 10</c:v>
+                  <c:v>nan</c:v>
+                </c:pt>
+                <c:pt idx="10">
+                  <c:v>nan</c:v>
+                </c:pt>
+                <c:pt idx="11">
+                  <c:v>nan</c:v>
                 </c:pt>
               </c:strCache>
             </c:strRef>
           </c:cat>
           <c:val>
             <c:numRef>
-              <c:f>Sheet1!$B$2:$B$11</c:f>
+              <c:f>Sheet1!$B$2:$B$13</c:f>
               <c:numCache>
                 <c:formatCode>General</c:formatCode>
-                <c:ptCount val="10"/>
+                <c:ptCount val="12"/>
                 <c:pt idx="0">
                   <c:v>4027681603584.0</c:v>
                 </c:pt>
@@ -514,26 +866,259 @@
                   <c:v>0.0</c:v>
                 </c:pt>
                 <c:pt idx="9">
+                  <c:v>0.0</c:v>
+                </c:pt>
+                <c:pt idx="10">
+                  <c:v>0.0</c:v>
+                </c:pt>
+                <c:pt idx="11">
                   <c:v>0.0</c:v>
                 </c:pt>
               </c:numCache>
             </c:numRef>
           </c:val>
         </c:ser>
-        <c:axId val="-2068027336"/>
-        <c:axId val="-2113994440"/>
-      </c:barChart>
+        <c:ser>
+          <c:idx val="1"/>
+          <c:order val="1"/>
+          <c:tx>
+            <c:strRef>
+              <c:f>Sheet1!$C$1</c:f>
+              <c:strCache>
+                <c:ptCount val="1"/>
+                <c:pt idx="0">
+                  <c:v>CurrentPrice</c:v>
+                </c:pt>
+              </c:strCache>
+            </c:strRef>
+          </c:tx>
+          <c:spPr>
+            <a:solidFill>
+              <a:srgbClr val="27AE60"/>
+            </a:solidFill>
+          </c:spPr>
+          <c:cat>
+            <c:strRef>
+              <c:f>Sheet1!$A$2:$A$13</c:f>
+              <c:strCache>
+                <c:ptCount val="12"/>
+                <c:pt idx="0">
+                  <c:v>AAPL</c:v>
+                </c:pt>
+                <c:pt idx="1">
+                  <c:v>MSFT</c:v>
+                </c:pt>
+                <c:pt idx="2">
+                  <c:v>GOOGL</c:v>
+                </c:pt>
+                <c:pt idx="3">
+                  <c:v>AMZN</c:v>
+                </c:pt>
+                <c:pt idx="4">
+                  <c:v>TSLA</c:v>
+                </c:pt>
+                <c:pt idx="5">
+                  <c:v>nan</c:v>
+                </c:pt>
+                <c:pt idx="6">
+                  <c:v>nan</c:v>
+                </c:pt>
+                <c:pt idx="7">
+                  <c:v>nan</c:v>
+                </c:pt>
+                <c:pt idx="8">
+                  <c:v>nan</c:v>
+                </c:pt>
+                <c:pt idx="9">
+                  <c:v>nan</c:v>
+                </c:pt>
+                <c:pt idx="10">
+                  <c:v>nan</c:v>
+                </c:pt>
+                <c:pt idx="11">
+                  <c:v>nan</c:v>
+                </c:pt>
+              </c:strCache>
+            </c:strRef>
+          </c:cat>
+          <c:val>
+            <c:numRef>
+              <c:f>Sheet1!$C$2:$C$13</c:f>
+              <c:numCache>
+                <c:formatCode>General</c:formatCode>
+                <c:ptCount val="12"/>
+                <c:pt idx="0">
+                  <c:v>270.37</c:v>
+                </c:pt>
+                <c:pt idx="1">
+                  <c:v>517.81</c:v>
+                </c:pt>
+                <c:pt idx="2">
+                  <c:v>281.19</c:v>
+                </c:pt>
+                <c:pt idx="3">
+                  <c:v>244.22</c:v>
+                </c:pt>
+                <c:pt idx="4">
+                  <c:v>456.56</c:v>
+                </c:pt>
+                <c:pt idx="5">
+                  <c:v>0.0</c:v>
+                </c:pt>
+                <c:pt idx="6">
+                  <c:v>0.0</c:v>
+                </c:pt>
+                <c:pt idx="7">
+                  <c:v>0.0</c:v>
+                </c:pt>
+                <c:pt idx="8">
+                  <c:v>0.0</c:v>
+                </c:pt>
+                <c:pt idx="9">
+                  <c:v>0.0</c:v>
+                </c:pt>
+                <c:pt idx="10">
+                  <c:v>0.0</c:v>
+                </c:pt>
+                <c:pt idx="11">
+                  <c:v>0.0</c:v>
+                </c:pt>
+              </c:numCache>
+            </c:numRef>
+          </c:val>
+        </c:ser>
+        <c:ser>
+          <c:idx val="2"/>
+          <c:order val="2"/>
+          <c:tx>
+            <c:strRef>
+              <c:f>Sheet1!$D$1</c:f>
+              <c:strCache>
+                <c:ptCount val="1"/>
+                <c:pt idx="0">
+                  <c:v>TrailingPE</c:v>
+                </c:pt>
+              </c:strCache>
+            </c:strRef>
+          </c:tx>
+          <c:spPr>
+            <a:solidFill>
+              <a:srgbClr val="E67E22"/>
+            </a:solidFill>
+          </c:spPr>
+          <c:cat>
+            <c:strRef>
+              <c:f>Sheet1!$A$2:$A$13</c:f>
+              <c:strCache>
+                <c:ptCount val="12"/>
+                <c:pt idx="0">
+                  <c:v>AAPL</c:v>
+                </c:pt>
+                <c:pt idx="1">
+                  <c:v>MSFT</c:v>
+                </c:pt>
+                <c:pt idx="2">
+                  <c:v>GOOGL</c:v>
+                </c:pt>
+                <c:pt idx="3">
+                  <c:v>AMZN</c:v>
+                </c:pt>
+                <c:pt idx="4">
+                  <c:v>TSLA</c:v>
+                </c:pt>
+                <c:pt idx="5">
+                  <c:v>nan</c:v>
+                </c:pt>
+                <c:pt idx="6">
+                  <c:v>nan</c:v>
+                </c:pt>
+                <c:pt idx="7">
+                  <c:v>nan</c:v>
+                </c:pt>
+                <c:pt idx="8">
+                  <c:v>nan</c:v>
+                </c:pt>
+                <c:pt idx="9">
+                  <c:v>nan</c:v>
+                </c:pt>
+                <c:pt idx="10">
+                  <c:v>nan</c:v>
+                </c:pt>
+                <c:pt idx="11">
+                  <c:v>nan</c:v>
+                </c:pt>
+              </c:strCache>
+            </c:strRef>
+          </c:cat>
+          <c:val>
+            <c:numRef>
+              <c:f>Sheet1!$D$2:$D$13</c:f>
+              <c:numCache>
+                <c:formatCode>General</c:formatCode>
+                <c:ptCount val="12"/>
+                <c:pt idx="0">
+                  <c:v>36.24</c:v>
+                </c:pt>
+                <c:pt idx="1">
+                  <c:v>36.78</c:v>
+                </c:pt>
+                <c:pt idx="2">
+                  <c:v>27.79</c:v>
+                </c:pt>
+                <c:pt idx="3">
+                  <c:v>34.49</c:v>
+                </c:pt>
+                <c:pt idx="4">
+                  <c:v>312.71</c:v>
+                </c:pt>
+                <c:pt idx="5">
+                  <c:v>0.0</c:v>
+                </c:pt>
+                <c:pt idx="6">
+                  <c:v>0.0</c:v>
+                </c:pt>
+                <c:pt idx="7">
+                  <c:v>0.0</c:v>
+                </c:pt>
+                <c:pt idx="8">
+                  <c:v>0.0</c:v>
+                </c:pt>
+                <c:pt idx="9">
+                  <c:v>0.0</c:v>
+                </c:pt>
+                <c:pt idx="10">
+                  <c:v>0.0</c:v>
+                </c:pt>
+                <c:pt idx="11">
+                  <c:v>0.0</c:v>
+                </c:pt>
+              </c:numCache>
+            </c:numRef>
+          </c:val>
+        </c:ser>
+        <c:dLbls>
+          <c:showLegendKey val="0"/>
+          <c:showVal val="0"/>
+          <c:showCatName val="0"/>
+          <c:showSerName val="0"/>
+          <c:showPercent val="0"/>
+          <c:showBubbleSize val="0"/>
+        </c:dLbls>
+        <c:axId val="-2101159928"/>
+        <c:axId val="-2100718248"/>
+      </c:areaChart>
       <c:catAx>
-        <c:axId val="-2068027336"/>
+        <c:axId val="-2101159928"/>
         <c:scaling>
           <c:orientation val="minMax"/>
         </c:scaling>
         <c:delete val="0"/>
         <c:axPos val="b"/>
+        <c:numFmt formatCode="General" sourceLinked="1"/>
         <c:majorTickMark val="out"/>
         <c:minorTickMark val="none"/>
         <c:tickLblPos val="nextTo"/>
-        <c:crossAx val="-2113994440"/>
+        <c:crossAx val="-2100718248"/>
         <c:crosses val="autoZero"/>
         <c:auto val="1"/>
         <c:lblAlgn val="ctr"/>
@@ -541,19 +1126,39 @@
         <c:noMultiLvlLbl val="0"/>
       </c:catAx>
       <c:valAx>
-        <c:axId val="-2113994440"/>
-        <c:scaling/>
+        <c:axId val="-2100718248"/>
+        <c:scaling>
+          <c:orientation val="minMax"/>
+        </c:scaling>
         <c:delete val="0"/>
         <c:axPos val="l"/>
         <c:majorGridlines/>
+        <c:numFmt formatCode="General" sourceLinked="1"/>
         <c:majorTickMark val="out"/>
         <c:minorTickMark val="none"/>
         <c:tickLblPos val="nextTo"/>
-        <c:crossAx val="-2068027336"/>
+        <c:crossAx val="-2101159928"/>
         <c:crosses val="autoZero"/>
+        <c:crossBetween val="midCat"/>
       </c:valAx>
     </c:plotArea>
-    <c:dispBlanksAs val="gap"/>
+    <c:legend>
+      <c:legendPos val="b"/>
+      <c:layout/>
+      <c:overlay val="0"/>
+      <c:txPr>
+        <a:bodyPr/>
+        <a:lstStyle/>
+        <a:p>
+          <a:pPr>
+            <a:defRPr sz="1100" b="0"/>
+          </a:pPr>
+        </a:p>
+      </c:txPr>
+    </c:legend>
+    <c:plotVisOnly val="1"/>
+    <c:dispBlanksAs val="zero"/>
+    <c:showDLblsOverMax val="0"/>
   </c:chart>
   <c:txPr>
     <a:bodyPr/>
@@ -562,7 +1167,7 @@
       <a:pPr>
         <a:defRPr sz="1800"/>
       </a:pPr>
-      <a:endParaRPr lang="en-US"/>
+      <a:endParaRPr/>
     </a:p>
   </c:txPr>
   <c:externalData r:id="rId1">

--- a/examples/professional_demo/tech_stocks_pro_tier.pptx
+++ b/examples/professional_demo/tech_stocks_pro_tier.pptx
@@ -118,7 +118,6 @@
 <file path=ppt/charts/chart1.xml><?xml version="1.0" encoding="utf-8"?>
 <c:chartSpace xmlns:c="http://schemas.openxmlformats.org/drawingml/2006/chart" xmlns:a="http://schemas.openxmlformats.org/drawingml/2006/main" xmlns:r="http://schemas.openxmlformats.org/officeDocument/2006/relationships">
   <c:date1904 val="0"/>
-  <c:roundedCorners val="0"/>
   <c:chart>
     <c:title>
       <c:tx>
@@ -135,445 +134,6 @@
             </a:pPr>
             <a:r>
               <a:t>Data Insights</a:t>
-            </a:r>
-          </a:p>
-        </c:rich>
-      </c:tx>
-      <c:layout/>
-      <c:overlay val="0"/>
-    </c:title>
-    <c:autoTitleDeleted val="0"/>
-    <c:plotArea>
-      <c:layout/>
-      <c:areaChart>
-        <c:grouping val="stacked"/>
-        <c:varyColors val="0"/>
-        <c:ser>
-          <c:idx val="0"/>
-          <c:order val="0"/>
-          <c:tx>
-            <c:strRef>
-              <c:f>Sheet1!$B$1</c:f>
-              <c:strCache>
-                <c:ptCount val="1"/>
-                <c:pt idx="0">
-                  <c:v>MarketCap</c:v>
-                </c:pt>
-              </c:strCache>
-            </c:strRef>
-          </c:tx>
-          <c:spPr>
-            <a:solidFill>
-              <a:srgbClr val="2980B9"/>
-            </a:solidFill>
-          </c:spPr>
-          <c:cat>
-            <c:strRef>
-              <c:f>Sheet1!$A$2:$A$13</c:f>
-              <c:strCache>
-                <c:ptCount val="12"/>
-                <c:pt idx="0">
-                  <c:v>AAPL</c:v>
-                </c:pt>
-                <c:pt idx="1">
-                  <c:v>MSFT</c:v>
-                </c:pt>
-                <c:pt idx="2">
-                  <c:v>GOOGL</c:v>
-                </c:pt>
-                <c:pt idx="3">
-                  <c:v>AMZN</c:v>
-                </c:pt>
-                <c:pt idx="4">
-                  <c:v>TSLA</c:v>
-                </c:pt>
-                <c:pt idx="5">
-                  <c:v>nan</c:v>
-                </c:pt>
-                <c:pt idx="6">
-                  <c:v>nan</c:v>
-                </c:pt>
-                <c:pt idx="7">
-                  <c:v>nan</c:v>
-                </c:pt>
-                <c:pt idx="8">
-                  <c:v>nan</c:v>
-                </c:pt>
-                <c:pt idx="9">
-                  <c:v>nan</c:v>
-                </c:pt>
-                <c:pt idx="10">
-                  <c:v>nan</c:v>
-                </c:pt>
-                <c:pt idx="11">
-                  <c:v>nan</c:v>
-                </c:pt>
-              </c:strCache>
-            </c:strRef>
-          </c:cat>
-          <c:val>
-            <c:numRef>
-              <c:f>Sheet1!$B$2:$B$13</c:f>
-              <c:numCache>
-                <c:formatCode>General</c:formatCode>
-                <c:ptCount val="12"/>
-                <c:pt idx="0">
-                  <c:v>4027681603584.0</c:v>
-                </c:pt>
-                <c:pt idx="1">
-                  <c:v>3907646914560.0</c:v>
-                </c:pt>
-                <c:pt idx="2">
-                  <c:v>3398890160128.0</c:v>
-                </c:pt>
-                <c:pt idx="3">
-                  <c:v>2609979064320.0</c:v>
-                </c:pt>
-                <c:pt idx="4">
-                  <c:v>1518435958784.0</c:v>
-                </c:pt>
-                <c:pt idx="5">
-                  <c:v>0.0</c:v>
-                </c:pt>
-                <c:pt idx="6">
-                  <c:v>0.0</c:v>
-                </c:pt>
-                <c:pt idx="7">
-                  <c:v>0.0</c:v>
-                </c:pt>
-                <c:pt idx="8">
-                  <c:v>0.0</c:v>
-                </c:pt>
-                <c:pt idx="9">
-                  <c:v>0.0</c:v>
-                </c:pt>
-                <c:pt idx="10">
-                  <c:v>0.0</c:v>
-                </c:pt>
-                <c:pt idx="11">
-                  <c:v>0.0</c:v>
-                </c:pt>
-              </c:numCache>
-            </c:numRef>
-          </c:val>
-        </c:ser>
-        <c:ser>
-          <c:idx val="1"/>
-          <c:order val="1"/>
-          <c:tx>
-            <c:strRef>
-              <c:f>Sheet1!$C$1</c:f>
-              <c:strCache>
-                <c:ptCount val="1"/>
-                <c:pt idx="0">
-                  <c:v>CurrentPrice</c:v>
-                </c:pt>
-              </c:strCache>
-            </c:strRef>
-          </c:tx>
-          <c:spPr>
-            <a:solidFill>
-              <a:srgbClr val="27AE60"/>
-            </a:solidFill>
-          </c:spPr>
-          <c:cat>
-            <c:strRef>
-              <c:f>Sheet1!$A$2:$A$13</c:f>
-              <c:strCache>
-                <c:ptCount val="12"/>
-                <c:pt idx="0">
-                  <c:v>AAPL</c:v>
-                </c:pt>
-                <c:pt idx="1">
-                  <c:v>MSFT</c:v>
-                </c:pt>
-                <c:pt idx="2">
-                  <c:v>GOOGL</c:v>
-                </c:pt>
-                <c:pt idx="3">
-                  <c:v>AMZN</c:v>
-                </c:pt>
-                <c:pt idx="4">
-                  <c:v>TSLA</c:v>
-                </c:pt>
-                <c:pt idx="5">
-                  <c:v>nan</c:v>
-                </c:pt>
-                <c:pt idx="6">
-                  <c:v>nan</c:v>
-                </c:pt>
-                <c:pt idx="7">
-                  <c:v>nan</c:v>
-                </c:pt>
-                <c:pt idx="8">
-                  <c:v>nan</c:v>
-                </c:pt>
-                <c:pt idx="9">
-                  <c:v>nan</c:v>
-                </c:pt>
-                <c:pt idx="10">
-                  <c:v>nan</c:v>
-                </c:pt>
-                <c:pt idx="11">
-                  <c:v>nan</c:v>
-                </c:pt>
-              </c:strCache>
-            </c:strRef>
-          </c:cat>
-          <c:val>
-            <c:numRef>
-              <c:f>Sheet1!$C$2:$C$13</c:f>
-              <c:numCache>
-                <c:formatCode>General</c:formatCode>
-                <c:ptCount val="12"/>
-                <c:pt idx="0">
-                  <c:v>270.37</c:v>
-                </c:pt>
-                <c:pt idx="1">
-                  <c:v>517.81</c:v>
-                </c:pt>
-                <c:pt idx="2">
-                  <c:v>281.19</c:v>
-                </c:pt>
-                <c:pt idx="3">
-                  <c:v>244.22</c:v>
-                </c:pt>
-                <c:pt idx="4">
-                  <c:v>456.56</c:v>
-                </c:pt>
-                <c:pt idx="5">
-                  <c:v>0.0</c:v>
-                </c:pt>
-                <c:pt idx="6">
-                  <c:v>0.0</c:v>
-                </c:pt>
-                <c:pt idx="7">
-                  <c:v>0.0</c:v>
-                </c:pt>
-                <c:pt idx="8">
-                  <c:v>0.0</c:v>
-                </c:pt>
-                <c:pt idx="9">
-                  <c:v>0.0</c:v>
-                </c:pt>
-                <c:pt idx="10">
-                  <c:v>0.0</c:v>
-                </c:pt>
-                <c:pt idx="11">
-                  <c:v>0.0</c:v>
-                </c:pt>
-              </c:numCache>
-            </c:numRef>
-          </c:val>
-        </c:ser>
-        <c:ser>
-          <c:idx val="2"/>
-          <c:order val="2"/>
-          <c:tx>
-            <c:strRef>
-              <c:f>Sheet1!$D$1</c:f>
-              <c:strCache>
-                <c:ptCount val="1"/>
-                <c:pt idx="0">
-                  <c:v>TrailingPE</c:v>
-                </c:pt>
-              </c:strCache>
-            </c:strRef>
-          </c:tx>
-          <c:spPr>
-            <a:solidFill>
-              <a:srgbClr val="E67E22"/>
-            </a:solidFill>
-          </c:spPr>
-          <c:cat>
-            <c:strRef>
-              <c:f>Sheet1!$A$2:$A$13</c:f>
-              <c:strCache>
-                <c:ptCount val="12"/>
-                <c:pt idx="0">
-                  <c:v>AAPL</c:v>
-                </c:pt>
-                <c:pt idx="1">
-                  <c:v>MSFT</c:v>
-                </c:pt>
-                <c:pt idx="2">
-                  <c:v>GOOGL</c:v>
-                </c:pt>
-                <c:pt idx="3">
-                  <c:v>AMZN</c:v>
-                </c:pt>
-                <c:pt idx="4">
-                  <c:v>TSLA</c:v>
-                </c:pt>
-                <c:pt idx="5">
-                  <c:v>nan</c:v>
-                </c:pt>
-                <c:pt idx="6">
-                  <c:v>nan</c:v>
-                </c:pt>
-                <c:pt idx="7">
-                  <c:v>nan</c:v>
-                </c:pt>
-                <c:pt idx="8">
-                  <c:v>nan</c:v>
-                </c:pt>
-                <c:pt idx="9">
-                  <c:v>nan</c:v>
-                </c:pt>
-                <c:pt idx="10">
-                  <c:v>nan</c:v>
-                </c:pt>
-                <c:pt idx="11">
-                  <c:v>nan</c:v>
-                </c:pt>
-              </c:strCache>
-            </c:strRef>
-          </c:cat>
-          <c:val>
-            <c:numRef>
-              <c:f>Sheet1!$D$2:$D$13</c:f>
-              <c:numCache>
-                <c:formatCode>General</c:formatCode>
-                <c:ptCount val="12"/>
-                <c:pt idx="0">
-                  <c:v>36.24</c:v>
-                </c:pt>
-                <c:pt idx="1">
-                  <c:v>36.78</c:v>
-                </c:pt>
-                <c:pt idx="2">
-                  <c:v>27.79</c:v>
-                </c:pt>
-                <c:pt idx="3">
-                  <c:v>34.49</c:v>
-                </c:pt>
-                <c:pt idx="4">
-                  <c:v>312.71</c:v>
-                </c:pt>
-                <c:pt idx="5">
-                  <c:v>0.0</c:v>
-                </c:pt>
-                <c:pt idx="6">
-                  <c:v>0.0</c:v>
-                </c:pt>
-                <c:pt idx="7">
-                  <c:v>0.0</c:v>
-                </c:pt>
-                <c:pt idx="8">
-                  <c:v>0.0</c:v>
-                </c:pt>
-                <c:pt idx="9">
-                  <c:v>0.0</c:v>
-                </c:pt>
-                <c:pt idx="10">
-                  <c:v>0.0</c:v>
-                </c:pt>
-                <c:pt idx="11">
-                  <c:v>0.0</c:v>
-                </c:pt>
-              </c:numCache>
-            </c:numRef>
-          </c:val>
-        </c:ser>
-        <c:dLbls>
-          <c:showLegendKey val="0"/>
-          <c:showVal val="0"/>
-          <c:showCatName val="0"/>
-          <c:showSerName val="0"/>
-          <c:showPercent val="0"/>
-          <c:showBubbleSize val="0"/>
-        </c:dLbls>
-        <c:axId val="-2101159928"/>
-        <c:axId val="-2100718248"/>
-      </c:areaChart>
-      <c:catAx>
-        <c:axId val="-2101159928"/>
-        <c:scaling>
-          <c:orientation val="minMax"/>
-        </c:scaling>
-        <c:delete val="0"/>
-        <c:axPos val="b"/>
-        <c:numFmt formatCode="General" sourceLinked="1"/>
-        <c:majorTickMark val="out"/>
-        <c:minorTickMark val="none"/>
-        <c:tickLblPos val="nextTo"/>
-        <c:crossAx val="-2100718248"/>
-        <c:crosses val="autoZero"/>
-        <c:auto val="1"/>
-        <c:lblAlgn val="ctr"/>
-        <c:lblOffset val="100"/>
-        <c:noMultiLvlLbl val="0"/>
-      </c:catAx>
-      <c:valAx>
-        <c:axId val="-2100718248"/>
-        <c:scaling>
-          <c:orientation val="minMax"/>
-        </c:scaling>
-        <c:delete val="0"/>
-        <c:axPos val="l"/>
-        <c:majorGridlines/>
-        <c:numFmt formatCode="General" sourceLinked="1"/>
-        <c:majorTickMark val="out"/>
-        <c:minorTickMark val="none"/>
-        <c:tickLblPos val="nextTo"/>
-        <c:crossAx val="-2101159928"/>
-        <c:crosses val="autoZero"/>
-        <c:crossBetween val="midCat"/>
-      </c:valAx>
-    </c:plotArea>
-    <c:legend>
-      <c:legendPos val="b"/>
-      <c:layout/>
-      <c:overlay val="0"/>
-      <c:txPr>
-        <a:bodyPr/>
-        <a:lstStyle/>
-        <a:p>
-          <a:pPr>
-            <a:defRPr sz="1100" b="0"/>
-          </a:pPr>
-        </a:p>
-      </c:txPr>
-    </c:legend>
-    <c:plotVisOnly val="1"/>
-    <c:dispBlanksAs val="zero"/>
-    <c:showDLblsOverMax val="0"/>
-  </c:chart>
-  <c:txPr>
-    <a:bodyPr/>
-    <a:lstStyle/>
-    <a:p>
-      <a:pPr>
-        <a:defRPr sz="1800"/>
-      </a:pPr>
-      <a:endParaRPr/>
-    </a:p>
-  </c:txPr>
-  <c:externalData r:id="rId1">
-    <c:autoUpdate val="0"/>
-  </c:externalData>
-</c:chartSpace>
-</file>
-
-<file path=ppt/charts/chart2.xml><?xml version="1.0" encoding="utf-8"?>
-<c:chartSpace xmlns:c="http://schemas.openxmlformats.org/drawingml/2006/chart" xmlns:a="http://schemas.openxmlformats.org/drawingml/2006/main" xmlns:r="http://schemas.openxmlformats.org/officeDocument/2006/relationships">
-  <c:date1904 val="0"/>
-  <c:chart>
-    <c:title>
-      <c:tx>
-        <c:rich>
-          <a:bodyPr/>
-          <a:lstStyle/>
-          <a:p>
-            <a:pPr>
-              <a:defRPr sz="2000" b="1">
-                <a:solidFill>
-                  <a:srgbClr val="192A56"/>
-                </a:solidFill>
-              </a:defRPr>
-            </a:pPr>
-            <a:r>
-              <a:t>Sector Distribution</a:t>
             </a:r>
           </a:p>
         </c:rich>
@@ -584,7 +144,7 @@
     <c:autoTitleDeleted val="0"/>
     <c:plotArea>
       <c:barChart>
-        <c:barDir val="col"/>
+        <c:barDir val="bar"/>
         <c:grouping val="clustered"/>
         <c:ser>
           <c:idx val="0"/>
@@ -682,7 +242,7 @@
           <c:orientation val="minMax"/>
         </c:scaling>
         <c:delete val="0"/>
-        <c:axPos val="b"/>
+        <c:axPos val="l"/>
         <c:majorTickMark val="out"/>
         <c:minorTickMark val="none"/>
         <c:tickLblPos val="nextTo"/>
@@ -697,7 +257,7 @@
         <c:axId val="-2113994440"/>
         <c:scaling/>
         <c:delete val="0"/>
-        <c:axPos val="l"/>
+        <c:axPos val="b"/>
         <c:majorGridlines/>
         <c:majorTickMark val="out"/>
         <c:minorTickMark val="none"/>
@@ -736,38 +296,124 @@
 </c:chartSpace>
 </file>
 
-<file path=ppt/charts/chart3.xml><?xml version="1.0" encoding="utf-8"?>
+<file path=ppt/charts/chart2.xml><?xml version="1.0" encoding="utf-8"?>
 <c:chartSpace xmlns:c="http://schemas.openxmlformats.org/drawingml/2006/chart" xmlns:a="http://schemas.openxmlformats.org/drawingml/2006/main" xmlns:r="http://schemas.openxmlformats.org/officeDocument/2006/relationships">
   <c:date1904 val="0"/>
   <c:roundedCorners val="0"/>
   <c:chart>
-    <c:title>
-      <c:tx>
-        <c:rich>
-          <a:bodyPr/>
-          <a:lstStyle/>
-          <a:p>
-            <a:pPr>
-              <a:defRPr sz="2000" b="1">
-                <a:solidFill>
-                  <a:srgbClr val="192A56"/>
-                </a:solidFill>
-              </a:defRPr>
-            </a:pPr>
-            <a:r>
-              <a:t>Trend Analysis</a:t>
-            </a:r>
-          </a:p>
-        </c:rich>
-      </c:tx>
-      <c:layout/>
-      <c:overlay val="0"/>
-    </c:title>
     <c:autoTitleDeleted val="0"/>
     <c:plotArea>
       <c:layout/>
-      <c:areaChart>
-        <c:grouping val="stacked"/>
+      <c:doughnutChart>
+        <c:varyColors val="1"/>
+        <c:ser>
+          <c:idx val="0"/>
+          <c:order val="0"/>
+          <c:tx>
+            <c:strRef>
+              <c:f>Sheet1!$B$1</c:f>
+              <c:strCache>
+                <c:ptCount val="1"/>
+                <c:pt idx="0">
+                  <c:v>Distribution</c:v>
+                </c:pt>
+              </c:strCache>
+            </c:strRef>
+          </c:tx>
+          <c:cat>
+            <c:strRef>
+              <c:f>Sheet1!$A$2:$A$6</c:f>
+              <c:strCache>
+                <c:ptCount val="5"/>
+                <c:pt idx="0">
+                  <c:v>AAPL</c:v>
+                </c:pt>
+                <c:pt idx="1">
+                  <c:v>MSFT</c:v>
+                </c:pt>
+                <c:pt idx="2">
+                  <c:v>GOOGL</c:v>
+                </c:pt>
+                <c:pt idx="3">
+                  <c:v>AMZN</c:v>
+                </c:pt>
+                <c:pt idx="4">
+                  <c:v>TSLA</c:v>
+                </c:pt>
+              </c:strCache>
+            </c:strRef>
+          </c:cat>
+          <c:val>
+            <c:numRef>
+              <c:f>Sheet1!$B$2:$B$6</c:f>
+              <c:numCache>
+                <c:formatCode>General</c:formatCode>
+                <c:ptCount val="5"/>
+                <c:pt idx="0">
+                  <c:v>4027681603584.0</c:v>
+                </c:pt>
+                <c:pt idx="1">
+                  <c:v>3907646914560.0</c:v>
+                </c:pt>
+                <c:pt idx="2">
+                  <c:v>3398890160128.0</c:v>
+                </c:pt>
+                <c:pt idx="3">
+                  <c:v>2609979064320.0</c:v>
+                </c:pt>
+                <c:pt idx="4">
+                  <c:v>1518435958784.0</c:v>
+                </c:pt>
+              </c:numCache>
+            </c:numRef>
+          </c:val>
+        </c:ser>
+        <c:dLbls>
+          <c:showLegendKey val="0"/>
+          <c:showVal val="0"/>
+          <c:showCatName val="0"/>
+          <c:showSerName val="0"/>
+          <c:showPercent val="0"/>
+          <c:showBubbleSize val="0"/>
+          <c:showLeaderLines val="1"/>
+        </c:dLbls>
+        <c:firstSliceAng val="0"/>
+        <c:holeSize val="50"/>
+      </c:doughnutChart>
+    </c:plotArea>
+    <c:legend>
+      <c:legendPos/>
+      <c:layout/>
+      <c:overlay val="0"/>
+    </c:legend>
+    <c:plotVisOnly val="1"/>
+    <c:dispBlanksAs val="gap"/>
+    <c:showDLblsOverMax val="0"/>
+  </c:chart>
+  <c:txPr>
+    <a:bodyPr/>
+    <a:lstStyle/>
+    <a:p>
+      <a:pPr>
+        <a:defRPr sz="1800"/>
+      </a:pPr>
+      <a:endParaRPr/>
+    </a:p>
+  </c:txPr>
+  <c:externalData r:id="rId1">
+    <c:autoUpdate val="0"/>
+  </c:externalData>
+</c:chartSpace>
+</file>
+
+<file path=ppt/charts/chart3.xml><?xml version="1.0" encoding="utf-8"?>
+<c:chartSpace xmlns:c="http://schemas.openxmlformats.org/drawingml/2006/chart" xmlns:a="http://schemas.openxmlformats.org/drawingml/2006/main" xmlns:r="http://schemas.openxmlformats.org/officeDocument/2006/relationships">
+  <c:date1904 val="0"/>
+  <c:chart>
+    <c:autoTitleDeleted val="0"/>
+    <c:plotArea>
+      <c:lineChart>
+        <c:grouping val="standard"/>
         <c:varyColors val="0"/>
         <c:ser>
           <c:idx val="0"/>
@@ -783,61 +429,83 @@
               </c:strCache>
             </c:strRef>
           </c:tx>
-          <c:spPr>
-            <a:solidFill>
-              <a:srgbClr val="2980B9"/>
-            </a:solidFill>
-          </c:spPr>
+          <c:marker>
+            <c:symbol val="none"/>
+          </c:marker>
           <c:cat>
             <c:strRef>
-              <c:f>Sheet1!$A$2:$A$13</c:f>
+              <c:f>Sheet1!$A$2:$A$21</c:f>
               <c:strCache>
-                <c:ptCount val="12"/>
+                <c:ptCount val="20"/>
                 <c:pt idx="0">
-                  <c:v>AAPL</c:v>
+                  <c:v>NaT</c:v>
                 </c:pt>
                 <c:pt idx="1">
-                  <c:v>MSFT</c:v>
+                  <c:v>NaT</c:v>
                 </c:pt>
                 <c:pt idx="2">
-                  <c:v>GOOGL</c:v>
+                  <c:v>NaT</c:v>
                 </c:pt>
                 <c:pt idx="3">
-                  <c:v>AMZN</c:v>
+                  <c:v>NaT</c:v>
                 </c:pt>
                 <c:pt idx="4">
-                  <c:v>TSLA</c:v>
+                  <c:v>NaT</c:v>
                 </c:pt>
                 <c:pt idx="5">
-                  <c:v>nan</c:v>
+                  <c:v>2020-11-02</c:v>
                 </c:pt>
                 <c:pt idx="6">
-                  <c:v>nan</c:v>
+                  <c:v>2020-11-03</c:v>
                 </c:pt>
                 <c:pt idx="7">
-                  <c:v>nan</c:v>
+                  <c:v>2020-11-04</c:v>
                 </c:pt>
                 <c:pt idx="8">
-                  <c:v>nan</c:v>
+                  <c:v>2020-11-05</c:v>
                 </c:pt>
                 <c:pt idx="9">
-                  <c:v>nan</c:v>
+                  <c:v>2020-11-06</c:v>
                 </c:pt>
                 <c:pt idx="10">
-                  <c:v>nan</c:v>
+                  <c:v>2020-11-09</c:v>
                 </c:pt>
                 <c:pt idx="11">
-                  <c:v>nan</c:v>
+                  <c:v>2020-11-10</c:v>
+                </c:pt>
+                <c:pt idx="12">
+                  <c:v>2020-11-11</c:v>
+                </c:pt>
+                <c:pt idx="13">
+                  <c:v>2020-11-12</c:v>
+                </c:pt>
+                <c:pt idx="14">
+                  <c:v>2020-11-13</c:v>
+                </c:pt>
+                <c:pt idx="15">
+                  <c:v>2020-11-16</c:v>
+                </c:pt>
+                <c:pt idx="16">
+                  <c:v>2020-11-17</c:v>
+                </c:pt>
+                <c:pt idx="17">
+                  <c:v>2020-11-18</c:v>
+                </c:pt>
+                <c:pt idx="18">
+                  <c:v>2020-11-19</c:v>
+                </c:pt>
+                <c:pt idx="19">
+                  <c:v>2020-11-20</c:v>
                 </c:pt>
               </c:strCache>
             </c:strRef>
           </c:cat>
           <c:val>
             <c:numRef>
-              <c:f>Sheet1!$B$2:$B$13</c:f>
+              <c:f>Sheet1!$B$2:$B$21</c:f>
               <c:numCache>
                 <c:formatCode>General</c:formatCode>
-                <c:ptCount val="12"/>
+                <c:ptCount val="20"/>
                 <c:pt idx="0">
                   <c:v>4027681603584.0</c:v>
                 </c:pt>
@@ -872,11 +540,36 @@
                   <c:v>0.0</c:v>
                 </c:pt>
                 <c:pt idx="11">
+                  <c:v>0.0</c:v>
+                </c:pt>
+                <c:pt idx="12">
+                  <c:v>0.0</c:v>
+                </c:pt>
+                <c:pt idx="13">
+                  <c:v>0.0</c:v>
+                </c:pt>
+                <c:pt idx="14">
+                  <c:v>0.0</c:v>
+                </c:pt>
+                <c:pt idx="15">
+                  <c:v>0.0</c:v>
+                </c:pt>
+                <c:pt idx="16">
+                  <c:v>0.0</c:v>
+                </c:pt>
+                <c:pt idx="17">
+                  <c:v>0.0</c:v>
+                </c:pt>
+                <c:pt idx="18">
+                  <c:v>0.0</c:v>
+                </c:pt>
+                <c:pt idx="19">
                   <c:v>0.0</c:v>
                 </c:pt>
               </c:numCache>
             </c:numRef>
           </c:val>
+          <c:smooth val="0"/>
         </c:ser>
         <c:ser>
           <c:idx val="1"/>
@@ -892,75 +585,97 @@
               </c:strCache>
             </c:strRef>
           </c:tx>
-          <c:spPr>
-            <a:solidFill>
-              <a:srgbClr val="27AE60"/>
-            </a:solidFill>
-          </c:spPr>
+          <c:marker>
+            <c:symbol val="none"/>
+          </c:marker>
           <c:cat>
             <c:strRef>
-              <c:f>Sheet1!$A$2:$A$13</c:f>
+              <c:f>Sheet1!$A$2:$A$21</c:f>
               <c:strCache>
-                <c:ptCount val="12"/>
+                <c:ptCount val="20"/>
                 <c:pt idx="0">
-                  <c:v>AAPL</c:v>
+                  <c:v>NaT</c:v>
                 </c:pt>
                 <c:pt idx="1">
-                  <c:v>MSFT</c:v>
+                  <c:v>NaT</c:v>
                 </c:pt>
                 <c:pt idx="2">
-                  <c:v>GOOGL</c:v>
+                  <c:v>NaT</c:v>
                 </c:pt>
                 <c:pt idx="3">
-                  <c:v>AMZN</c:v>
+                  <c:v>NaT</c:v>
                 </c:pt>
                 <c:pt idx="4">
-                  <c:v>TSLA</c:v>
+                  <c:v>NaT</c:v>
                 </c:pt>
                 <c:pt idx="5">
-                  <c:v>nan</c:v>
+                  <c:v>2020-11-02</c:v>
                 </c:pt>
                 <c:pt idx="6">
-                  <c:v>nan</c:v>
+                  <c:v>2020-11-03</c:v>
                 </c:pt>
                 <c:pt idx="7">
-                  <c:v>nan</c:v>
+                  <c:v>2020-11-04</c:v>
                 </c:pt>
                 <c:pt idx="8">
-                  <c:v>nan</c:v>
+                  <c:v>2020-11-05</c:v>
                 </c:pt>
                 <c:pt idx="9">
-                  <c:v>nan</c:v>
+                  <c:v>2020-11-06</c:v>
                 </c:pt>
                 <c:pt idx="10">
-                  <c:v>nan</c:v>
+                  <c:v>2020-11-09</c:v>
                 </c:pt>
                 <c:pt idx="11">
-                  <c:v>nan</c:v>
+                  <c:v>2020-11-10</c:v>
+                </c:pt>
+                <c:pt idx="12">
+                  <c:v>2020-11-11</c:v>
+                </c:pt>
+                <c:pt idx="13">
+                  <c:v>2020-11-12</c:v>
+                </c:pt>
+                <c:pt idx="14">
+                  <c:v>2020-11-13</c:v>
+                </c:pt>
+                <c:pt idx="15">
+                  <c:v>2020-11-16</c:v>
+                </c:pt>
+                <c:pt idx="16">
+                  <c:v>2020-11-17</c:v>
+                </c:pt>
+                <c:pt idx="17">
+                  <c:v>2020-11-18</c:v>
+                </c:pt>
+                <c:pt idx="18">
+                  <c:v>2020-11-19</c:v>
+                </c:pt>
+                <c:pt idx="19">
+                  <c:v>2020-11-20</c:v>
                 </c:pt>
               </c:strCache>
             </c:strRef>
           </c:cat>
           <c:val>
             <c:numRef>
-              <c:f>Sheet1!$C$2:$C$13</c:f>
+              <c:f>Sheet1!$C$2:$C$21</c:f>
               <c:numCache>
                 <c:formatCode>General</c:formatCode>
-                <c:ptCount val="12"/>
+                <c:ptCount val="20"/>
                 <c:pt idx="0">
-                  <c:v>270.37</c:v>
+                  <c:v>270.3699951171875</c:v>
                 </c:pt>
                 <c:pt idx="1">
-                  <c:v>517.81</c:v>
+                  <c:v>517.8099975585938</c:v>
                 </c:pt>
                 <c:pt idx="2">
-                  <c:v>281.19</c:v>
+                  <c:v>281.1900024414062</c:v>
                 </c:pt>
                 <c:pt idx="3">
-                  <c:v>244.22</c:v>
+                  <c:v>244.2200012207031</c:v>
                 </c:pt>
                 <c:pt idx="4">
-                  <c:v>456.56</c:v>
+                  <c:v>456.5599975585938</c:v>
                 </c:pt>
                 <c:pt idx="5">
                   <c:v>0.0</c:v>
@@ -981,11 +696,36 @@
                   <c:v>0.0</c:v>
                 </c:pt>
                 <c:pt idx="11">
+                  <c:v>0.0</c:v>
+                </c:pt>
+                <c:pt idx="12">
+                  <c:v>0.0</c:v>
+                </c:pt>
+                <c:pt idx="13">
+                  <c:v>0.0</c:v>
+                </c:pt>
+                <c:pt idx="14">
+                  <c:v>0.0</c:v>
+                </c:pt>
+                <c:pt idx="15">
+                  <c:v>0.0</c:v>
+                </c:pt>
+                <c:pt idx="16">
+                  <c:v>0.0</c:v>
+                </c:pt>
+                <c:pt idx="17">
+                  <c:v>0.0</c:v>
+                </c:pt>
+                <c:pt idx="18">
+                  <c:v>0.0</c:v>
+                </c:pt>
+                <c:pt idx="19">
                   <c:v>0.0</c:v>
                 </c:pt>
               </c:numCache>
             </c:numRef>
           </c:val>
+          <c:smooth val="0"/>
         </c:ser>
         <c:ser>
           <c:idx val="2"/>
@@ -1001,75 +741,97 @@
               </c:strCache>
             </c:strRef>
           </c:tx>
-          <c:spPr>
-            <a:solidFill>
-              <a:srgbClr val="E67E22"/>
-            </a:solidFill>
-          </c:spPr>
+          <c:marker>
+            <c:symbol val="none"/>
+          </c:marker>
           <c:cat>
             <c:strRef>
-              <c:f>Sheet1!$A$2:$A$13</c:f>
+              <c:f>Sheet1!$A$2:$A$21</c:f>
               <c:strCache>
-                <c:ptCount val="12"/>
+                <c:ptCount val="20"/>
                 <c:pt idx="0">
-                  <c:v>AAPL</c:v>
+                  <c:v>NaT</c:v>
                 </c:pt>
                 <c:pt idx="1">
-                  <c:v>MSFT</c:v>
+                  <c:v>NaT</c:v>
                 </c:pt>
                 <c:pt idx="2">
-                  <c:v>GOOGL</c:v>
+                  <c:v>NaT</c:v>
                 </c:pt>
                 <c:pt idx="3">
-                  <c:v>AMZN</c:v>
+                  <c:v>NaT</c:v>
                 </c:pt>
                 <c:pt idx="4">
-                  <c:v>TSLA</c:v>
+                  <c:v>NaT</c:v>
                 </c:pt>
                 <c:pt idx="5">
-                  <c:v>nan</c:v>
+                  <c:v>2020-11-02</c:v>
                 </c:pt>
                 <c:pt idx="6">
-                  <c:v>nan</c:v>
+                  <c:v>2020-11-03</c:v>
                 </c:pt>
                 <c:pt idx="7">
-                  <c:v>nan</c:v>
+                  <c:v>2020-11-04</c:v>
                 </c:pt>
                 <c:pt idx="8">
-                  <c:v>nan</c:v>
+                  <c:v>2020-11-05</c:v>
                 </c:pt>
                 <c:pt idx="9">
-                  <c:v>nan</c:v>
+                  <c:v>2020-11-06</c:v>
                 </c:pt>
                 <c:pt idx="10">
-                  <c:v>nan</c:v>
+                  <c:v>2020-11-09</c:v>
                 </c:pt>
                 <c:pt idx="11">
-                  <c:v>nan</c:v>
+                  <c:v>2020-11-10</c:v>
+                </c:pt>
+                <c:pt idx="12">
+                  <c:v>2020-11-11</c:v>
+                </c:pt>
+                <c:pt idx="13">
+                  <c:v>2020-11-12</c:v>
+                </c:pt>
+                <c:pt idx="14">
+                  <c:v>2020-11-13</c:v>
+                </c:pt>
+                <c:pt idx="15">
+                  <c:v>2020-11-16</c:v>
+                </c:pt>
+                <c:pt idx="16">
+                  <c:v>2020-11-17</c:v>
+                </c:pt>
+                <c:pt idx="17">
+                  <c:v>2020-11-18</c:v>
+                </c:pt>
+                <c:pt idx="18">
+                  <c:v>2020-11-19</c:v>
+                </c:pt>
+                <c:pt idx="19">
+                  <c:v>2020-11-20</c:v>
                 </c:pt>
               </c:strCache>
             </c:strRef>
           </c:cat>
           <c:val>
             <c:numRef>
-              <c:f>Sheet1!$D$2:$D$13</c:f>
+              <c:f>Sheet1!$D$2:$D$21</c:f>
               <c:numCache>
                 <c:formatCode>General</c:formatCode>
-                <c:ptCount val="12"/>
+                <c:ptCount val="20"/>
                 <c:pt idx="0">
-                  <c:v>36.24</c:v>
+                  <c:v>36.242626</c:v>
                 </c:pt>
                 <c:pt idx="1">
-                  <c:v>36.78</c:v>
+                  <c:v>36.77628</c:v>
                 </c:pt>
                 <c:pt idx="2">
-                  <c:v>27.79</c:v>
+                  <c:v>27.785574</c:v>
                 </c:pt>
                 <c:pt idx="3">
-                  <c:v>34.49</c:v>
+                  <c:v>34.49435</c:v>
                 </c:pt>
                 <c:pt idx="4">
-                  <c:v>312.71</c:v>
+                  <c:v>312.7123</c:v>
                 </c:pt>
                 <c:pt idx="5">
                   <c:v>0.0</c:v>
@@ -1090,35 +852,53 @@
                   <c:v>0.0</c:v>
                 </c:pt>
                 <c:pt idx="11">
+                  <c:v>0.0</c:v>
+                </c:pt>
+                <c:pt idx="12">
+                  <c:v>0.0</c:v>
+                </c:pt>
+                <c:pt idx="13">
+                  <c:v>0.0</c:v>
+                </c:pt>
+                <c:pt idx="14">
+                  <c:v>0.0</c:v>
+                </c:pt>
+                <c:pt idx="15">
+                  <c:v>0.0</c:v>
+                </c:pt>
+                <c:pt idx="16">
+                  <c:v>0.0</c:v>
+                </c:pt>
+                <c:pt idx="17">
+                  <c:v>0.0</c:v>
+                </c:pt>
+                <c:pt idx="18">
+                  <c:v>0.0</c:v>
+                </c:pt>
+                <c:pt idx="19">
                   <c:v>0.0</c:v>
                 </c:pt>
               </c:numCache>
             </c:numRef>
           </c:val>
+          <c:smooth val="0"/>
         </c:ser>
-        <c:dLbls>
-          <c:showLegendKey val="0"/>
-          <c:showVal val="0"/>
-          <c:showCatName val="0"/>
-          <c:showSerName val="0"/>
-          <c:showPercent val="0"/>
-          <c:showBubbleSize val="0"/>
-        </c:dLbls>
-        <c:axId val="-2101159928"/>
-        <c:axId val="-2100718248"/>
-      </c:areaChart>
+        <c:marker val="1"/>
+        <c:smooth val="0"/>
+        <c:axId val="2118791784"/>
+        <c:axId val="2140495176"/>
+      </c:lineChart>
       <c:catAx>
-        <c:axId val="-2101159928"/>
+        <c:axId val="2118791784"/>
         <c:scaling>
           <c:orientation val="minMax"/>
         </c:scaling>
         <c:delete val="0"/>
         <c:axPos val="b"/>
-        <c:numFmt formatCode="General" sourceLinked="1"/>
         <c:majorTickMark val="out"/>
         <c:minorTickMark val="none"/>
         <c:tickLblPos val="nextTo"/>
-        <c:crossAx val="-2100718248"/>
+        <c:crossAx val="2140495176"/>
         <c:crosses val="autoZero"/>
         <c:auto val="1"/>
         <c:lblAlgn val="ctr"/>
@@ -1126,38 +906,25 @@
         <c:noMultiLvlLbl val="0"/>
       </c:catAx>
       <c:valAx>
-        <c:axId val="-2100718248"/>
-        <c:scaling>
-          <c:orientation val="minMax"/>
-        </c:scaling>
+        <c:axId val="2140495176"/>
+        <c:scaling/>
         <c:delete val="0"/>
         <c:axPos val="l"/>
         <c:majorGridlines/>
-        <c:numFmt formatCode="General" sourceLinked="1"/>
         <c:majorTickMark val="out"/>
         <c:minorTickMark val="none"/>
         <c:tickLblPos val="nextTo"/>
-        <c:crossAx val="-2101159928"/>
+        <c:crossAx val="2118791784"/>
         <c:crosses val="autoZero"/>
-        <c:crossBetween val="midCat"/>
       </c:valAx>
     </c:plotArea>
     <c:legend>
       <c:legendPos val="b"/>
       <c:layout/>
       <c:overlay val="0"/>
-      <c:txPr>
-        <a:bodyPr/>
-        <a:lstStyle/>
-        <a:p>
-          <a:pPr>
-            <a:defRPr sz="1100" b="0"/>
-          </a:pPr>
-        </a:p>
-      </c:txPr>
     </c:legend>
     <c:plotVisOnly val="1"/>
-    <c:dispBlanksAs val="zero"/>
+    <c:dispBlanksAs val="gap"/>
     <c:showDLblsOverMax val="0"/>
   </c:chart>
   <c:txPr>
@@ -1167,7 +934,7 @@
       <a:pPr>
         <a:defRPr sz="1800"/>
       </a:pPr>
-      <a:endParaRPr/>
+      <a:endParaRPr lang="en-US"/>
     </a:p>
   </c:txPr>
   <c:externalData r:id="rId1">
